--- a/docs/KOI_Marketplace_Pack_Test_Guide.pptx
+++ b/docs/KOI_Marketplace_Pack_Test_Guide.pptx
@@ -4083,7 +4083,7 @@
                 <a:ea typeface="Calibri" pitchFamily="34" charset="-122"/>
                 <a:cs typeface="Calibri" pitchFamily="34" charset="-120"/>
               </a:rPr>
-              <a:t>Cortex XDR integration configured — the hunt sweep queries xdr_data</a:t>
+              <a:t>Nothing else — the hunt sweep queries xdr_data, which XSIAM holds natively</a:t>
             </a:r>
             <a:endParaRPr lang="en-US" sz="1050" dirty="0"/>
           </a:p>
@@ -4917,7 +4917,7 @@
                 <a:ea typeface="Calibri" pitchFamily="34" charset="-122"/>
                 <a:cs typeface="Calibri" pitchFamily="34" charset="-120"/>
               </a:rPr>
-              <a:t>Without a Cortex XDR integration the sweep reports that the XQL engine is unavailable and stops cleanly — that is a graceful skip, not a failure.</a:t>
+              <a:t>The sweep checks the XQL engine is answering before it runs, and stops cleanly if not. On XSIAM the engine is provisioned by the platform, so that check should simply pass.</a:t>
             </a:r>
             <a:endParaRPr lang="en-US" sz="1000" dirty="0"/>
           </a:p>
@@ -5327,7 +5327,7 @@
                 <a:ea typeface="Calibri" pitchFamily="34" charset="-122"/>
                 <a:cs typeface="Calibri" pitchFamily="34" charset="-120"/>
               </a:rPr>
-              <a:t>An endpoint group containing your agents</a:t>
+              <a:t>An endpoint group — easiest is to tag the agents, then make a dynamic group on that tag</a:t>
             </a:r>
             <a:endParaRPr lang="en-US" sz="1050" dirty="0"/>
           </a:p>
@@ -9506,7 +9506,7 @@
                 <a:ea typeface="Calibri" pitchFamily="34" charset="-122"/>
                 <a:cs typeface="Calibri" pitchFamily="34" charset="-120"/>
               </a:rPr>
-              <a:t>No Cortex XDR integration</a:t>
+              <a:t>The XQL engine did not answer</a:t>
             </a:r>
             <a:endParaRPr lang="en-US" sz="1000" dirty="0"/>
           </a:p>
@@ -9545,7 +9545,7 @@
                 <a:ea typeface="Calibri" pitchFamily="34" charset="-122"/>
                 <a:cs typeface="Calibri" pitchFamily="34" charset="-120"/>
               </a:rPr>
-              <a:t>Expected. Configure Cortex XDR to enable the hunts</a:t>
+              <a:t>Re-run. XSIAM provisions the engine, so this should not persist</a:t>
             </a:r>
             <a:endParaRPr lang="en-US" sz="1000" dirty="0"/>
           </a:p>
@@ -13199,7 +13199,7 @@
                 <a:ea typeface="Calibri" pitchFamily="34" charset="-122"/>
                 <a:cs typeface="Calibri" pitchFamily="34" charset="-120"/>
               </a:rPr>
-              <a:t>Tests 1 to 3 prove data is arriving and correct. Tests 4 to 7 prove the automation. Tests 8 and 9 prove fleet script execution — the only ones needing the Core REST API integration. Test 10 is the alert layout.</a:t>
+              <a:t>Tests 1 to 3 prove data is arriving and correct. Tests 4 to 7 prove the automation. Tests 8 and 9 prove fleet script execution — the only ones needing the Core REST API integration. Test 10 is the alert layout. Nothing here needs a Cortex XDR integration: XSIAM is the XDR, and its XQL engine is built in.</a:t>
             </a:r>
             <a:endParaRPr lang="en-US" sz="1100" dirty="0"/>
           </a:p>
@@ -14107,7 +14107,7 @@
                 <a:ea typeface="Calibri" pitchFamily="34" charset="-122"/>
                 <a:cs typeface="Calibri" pitchFamily="34" charset="-120"/>
               </a:rPr>
-              <a:t>Cortex XDR integration</a:t>
+              <a:t>Core REST API instance</a:t>
             </a:r>
             <a:endParaRPr lang="en-US" sz="1050" dirty="0"/>
           </a:p>
@@ -14146,7 +14146,7 @@
                 <a:ea typeface="Calibri" pitchFamily="34" charset="-122"/>
                 <a:cs typeface="Calibri" pitchFamily="34" charset="-120"/>
               </a:rPr>
-              <a:t>Settings → Data Sources → Cortex XDR</a:t>
+              <a:t>Settings → Data Sources → Add → Core REST API</a:t>
             </a:r>
             <a:endParaRPr lang="en-US" sz="1000" dirty="0"/>
           </a:p>
@@ -14179,13 +14179,13 @@
             <a:r>
               <a:rPr lang="en-US" sz="1000" b="1" dirty="0">
                 <a:solidFill>
-                  <a:srgbClr val="22D3EE"/>
-                </a:solidFill>
-                <a:latin typeface="Calibri" pitchFamily="34" charset="0"/>
-                <a:ea typeface="Calibri" pitchFamily="34" charset="-122"/>
-                <a:cs typeface="Calibri" pitchFamily="34" charset="-120"/>
-              </a:rPr>
-              <a:t>Tests 5, 7 enrichment lanes</a:t>
+                  <a:srgbClr val="F5A524"/>
+                </a:solidFill>
+                <a:latin typeface="Calibri" pitchFamily="34" charset="0"/>
+                <a:ea typeface="Calibri" pitchFamily="34" charset="-122"/>
+                <a:cs typeface="Calibri" pitchFamily="34" charset="-120"/>
+              </a:rPr>
+              <a:t>Tests 8-9 only</a:t>
             </a:r>
             <a:endParaRPr lang="en-US" sz="1000" dirty="0"/>
           </a:p>
@@ -14251,7 +14251,7 @@
                 <a:ea typeface="Calibri" pitchFamily="34" charset="-122"/>
                 <a:cs typeface="Calibri" pitchFamily="34" charset="-120"/>
               </a:rPr>
-              <a:t>Core REST API instance</a:t>
+              <a:t>KOI script in Action Center</a:t>
             </a:r>
             <a:endParaRPr lang="en-US" sz="1050" dirty="0"/>
           </a:p>
@@ -14290,7 +14290,7 @@
                 <a:ea typeface="Calibri" pitchFamily="34" charset="-122"/>
                 <a:cs typeface="Calibri" pitchFamily="34" charset="-120"/>
               </a:rPr>
-              <a:t>Settings → Data Sources → Add → Core REST API</a:t>
+              <a:t>Action Center → Scripts Library → upload</a:t>
             </a:r>
             <a:endParaRPr lang="en-US" sz="1000" dirty="0"/>
           </a:p>
@@ -14323,13 +14323,13 @@
             <a:r>
               <a:rPr lang="en-US" sz="1000" b="1" dirty="0">
                 <a:solidFill>
-                  <a:srgbClr val="F5A524"/>
-                </a:solidFill>
-                <a:latin typeface="Calibri" pitchFamily="34" charset="0"/>
-                <a:ea typeface="Calibri" pitchFamily="34" charset="-122"/>
-                <a:cs typeface="Calibri" pitchFamily="34" charset="-120"/>
-              </a:rPr>
-              <a:t>Tests 8-9 only</a:t>
+                  <a:srgbClr val="22D3EE"/>
+                </a:solidFill>
+                <a:latin typeface="Calibri" pitchFamily="34" charset="0"/>
+                <a:ea typeface="Calibri" pitchFamily="34" charset="-122"/>
+                <a:cs typeface="Calibri" pitchFamily="34" charset="-120"/>
+              </a:rPr>
+              <a:t>Tests 8-9</a:t>
             </a:r>
             <a:endParaRPr lang="en-US" sz="1000" dirty="0"/>
           </a:p>
@@ -14395,7 +14395,7 @@
                 <a:ea typeface="Calibri" pitchFamily="34" charset="-122"/>
                 <a:cs typeface="Calibri" pitchFamily="34" charset="-120"/>
               </a:rPr>
-              <a:t>KOI script in Action Center</a:t>
+              <a:t>An endpoint group</a:t>
             </a:r>
             <a:endParaRPr lang="en-US" sz="1050" dirty="0"/>
           </a:p>
@@ -14434,7 +14434,7 @@
                 <a:ea typeface="Calibri" pitchFamily="34" charset="-122"/>
                 <a:cs typeface="Calibri" pitchFamily="34" charset="-120"/>
               </a:rPr>
-              <a:t>Action Center → Scripts Library → upload</a:t>
+              <a:t>Endpoints → tag agents, then Endpoint Groups → dynamic</a:t>
             </a:r>
             <a:endParaRPr lang="en-US" sz="1000" dirty="0"/>
           </a:p>
@@ -14539,7 +14539,7 @@
                 <a:ea typeface="Calibri" pitchFamily="34" charset="-122"/>
                 <a:cs typeface="Calibri" pitchFamily="34" charset="-120"/>
               </a:rPr>
-              <a:t>An endpoint group</a:t>
+              <a:t>"Koi Script Runner" JSON List</a:t>
             </a:r>
             <a:endParaRPr lang="en-US" sz="1050" dirty="0"/>
           </a:p>
@@ -14578,7 +14578,7 @@
                 <a:ea typeface="Calibri" pitchFamily="34" charset="-122"/>
                 <a:cs typeface="Calibri" pitchFamily="34" charset="-120"/>
               </a:rPr>
-              <a:t>Endpoints → Endpoint Groups</a:t>
+              <a:t>Settings → Object Setup → Lists</a:t>
             </a:r>
             <a:endParaRPr lang="en-US" sz="1000" dirty="0"/>
           </a:p>
@@ -14626,150 +14626,6 @@
       <p:sp>
         <p:nvSpPr>
           <p:cNvPr id="39" name="Shape 37"/>
-          <p:cNvSpPr/>
-          <p:nvPr/>
-        </p:nvSpPr>
-        <p:spPr>
-          <a:xfrm>
-            <a:off x="548640" y="4974336"/>
-            <a:ext cx="11064240" cy="365760"/>
-          </a:xfrm>
-          <a:prstGeom prst="roundRect">
-            <a:avLst>
-              <a:gd name="adj" fmla="val 12500"/>
-            </a:avLst>
-          </a:prstGeom>
-          <a:solidFill>
-            <a:srgbClr val="15171B"/>
-          </a:solidFill>
-          <a:ln w="12700">
-            <a:solidFill>
-              <a:srgbClr val="15171B"/>
-            </a:solidFill>
-            <a:prstDash val="solid"/>
-          </a:ln>
-        </p:spPr>
-      </p:sp>
-      <p:sp>
-        <p:nvSpPr>
-          <p:cNvPr id="40" name="Text 38"/>
-          <p:cNvSpPr/>
-          <p:nvPr/>
-        </p:nvSpPr>
-        <p:spPr>
-          <a:xfrm>
-            <a:off x="822960" y="5065776"/>
-            <a:ext cx="2926080" cy="237744"/>
-          </a:xfrm>
-          <a:prstGeom prst="rect">
-            <a:avLst/>
-          </a:prstGeom>
-          <a:noFill/>
-          <a:ln/>
-        </p:spPr>
-        <p:txBody>
-          <a:bodyPr wrap="square" lIns="0" tIns="0" rIns="0" bIns="0" rtlCol="0" anchor="t"/>
-          <a:lstStyle/>
-          <a:p>
-            <a:pPr indent="0" marL="0">
-              <a:buNone/>
-            </a:pPr>
-            <a:r>
-              <a:rPr lang="en-US" sz="1050" b="1" dirty="0">
-                <a:solidFill>
-                  <a:srgbClr val="FFFFFF"/>
-                </a:solidFill>
-                <a:latin typeface="Calibri" pitchFamily="34" charset="0"/>
-                <a:ea typeface="Calibri" pitchFamily="34" charset="-122"/>
-                <a:cs typeface="Calibri" pitchFamily="34" charset="-120"/>
-              </a:rPr>
-              <a:t>"Koi Script Runner" JSON List</a:t>
-            </a:r>
-            <a:endParaRPr lang="en-US" sz="1050" dirty="0"/>
-          </a:p>
-        </p:txBody>
-      </p:sp>
-      <p:sp>
-        <p:nvSpPr>
-          <p:cNvPr id="41" name="Text 39"/>
-          <p:cNvSpPr/>
-          <p:nvPr/>
-        </p:nvSpPr>
-        <p:spPr>
-          <a:xfrm>
-            <a:off x="3840480" y="5065776"/>
-            <a:ext cx="3840480" cy="237744"/>
-          </a:xfrm>
-          <a:prstGeom prst="rect">
-            <a:avLst/>
-          </a:prstGeom>
-          <a:noFill/>
-          <a:ln/>
-        </p:spPr>
-        <p:txBody>
-          <a:bodyPr wrap="square" lIns="0" tIns="0" rIns="0" bIns="0" rtlCol="0" anchor="t"/>
-          <a:lstStyle/>
-          <a:p>
-            <a:pPr indent="0" marL="0">
-              <a:buNone/>
-            </a:pPr>
-            <a:r>
-              <a:rPr lang="en-US" sz="1000" dirty="0">
-                <a:solidFill>
-                  <a:srgbClr val="B4B7BD"/>
-                </a:solidFill>
-                <a:latin typeface="Calibri" pitchFamily="34" charset="0"/>
-                <a:ea typeface="Calibri" pitchFamily="34" charset="-122"/>
-                <a:cs typeface="Calibri" pitchFamily="34" charset="-120"/>
-              </a:rPr>
-              <a:t>Settings → Object Setup → Lists</a:t>
-            </a:r>
-            <a:endParaRPr lang="en-US" sz="1000" dirty="0"/>
-          </a:p>
-        </p:txBody>
-      </p:sp>
-      <p:sp>
-        <p:nvSpPr>
-          <p:cNvPr id="42" name="Text 40"/>
-          <p:cNvSpPr/>
-          <p:nvPr/>
-        </p:nvSpPr>
-        <p:spPr>
-          <a:xfrm>
-            <a:off x="7772400" y="5065776"/>
-            <a:ext cx="3566160" cy="237744"/>
-          </a:xfrm>
-          <a:prstGeom prst="rect">
-            <a:avLst/>
-          </a:prstGeom>
-          <a:noFill/>
-          <a:ln/>
-        </p:spPr>
-        <p:txBody>
-          <a:bodyPr wrap="square" lIns="0" tIns="0" rIns="0" bIns="0" rtlCol="0" anchor="t"/>
-          <a:lstStyle/>
-          <a:p>
-            <a:pPr indent="0" marL="0">
-              <a:buNone/>
-            </a:pPr>
-            <a:r>
-              <a:rPr lang="en-US" sz="1000" b="1" dirty="0">
-                <a:solidFill>
-                  <a:srgbClr val="22D3EE"/>
-                </a:solidFill>
-                <a:latin typeface="Calibri" pitchFamily="34" charset="0"/>
-                <a:ea typeface="Calibri" pitchFamily="34" charset="-122"/>
-                <a:cs typeface="Calibri" pitchFamily="34" charset="-120"/>
-              </a:rPr>
-              <a:t>Tests 8-9</a:t>
-            </a:r>
-            <a:endParaRPr lang="en-US" sz="1000" dirty="0"/>
-          </a:p>
-        </p:txBody>
-      </p:sp>
-      <p:sp>
-        <p:nvSpPr>
-          <p:cNvPr id="43" name="Shape 41"/>
           <p:cNvSpPr/>
           <p:nvPr/>
         </p:nvSpPr>
@@ -14796,7 +14652,7 @@
       </p:sp>
       <p:sp>
         <p:nvSpPr>
-          <p:cNvPr id="44" name="Shape 42"/>
+          <p:cNvPr id="40" name="Shape 38"/>
           <p:cNvSpPr/>
           <p:nvPr/>
         </p:nvSpPr>
@@ -14823,7 +14679,7 @@
       </p:sp>
       <p:sp>
         <p:nvSpPr>
-          <p:cNvPr id="45" name="Text 43"/>
+          <p:cNvPr id="41" name="Text 39"/>
           <p:cNvSpPr/>
           <p:nvPr/>
         </p:nvSpPr>
@@ -14862,7 +14718,7 @@
       </p:sp>
       <p:sp>
         <p:nvSpPr>
-          <p:cNvPr id="46" name="Text 44"/>
+          <p:cNvPr id="42" name="Text 40"/>
           <p:cNvSpPr/>
           <p:nvPr/>
         </p:nvSpPr>
@@ -20135,7 +19991,7 @@
                 <a:ea typeface="Calibri" pitchFamily="34" charset="-122"/>
                 <a:cs typeface="Calibri" pitchFamily="34" charset="-120"/>
               </a:rPr>
-              <a:t>Cortex XDR integration for the execution-evidence lanes (optional)</a:t>
+              <a:t>Nothing else — the XQL engine XSIAM uses for execution evidence is built in</a:t>
             </a:r>
             <a:endParaRPr lang="en-US" sz="1050" dirty="0"/>
           </a:p>

--- a/docs/KOI_Marketplace_Pack_Test_Guide.pptx
+++ b/docs/KOI_Marketplace_Pack_Test_Guide.pptx
@@ -5249,7 +5249,7 @@
                 <a:ea typeface="Calibri" pitchFamily="34" charset="-122"/>
                 <a:cs typeface="Calibri" pitchFamily="34" charset="-120"/>
               </a:rPr>
-              <a:t>A KOI script in Action Center → Scripts Library (it must take no parameters)</a:t>
+              <a:t>The KOI deployment script — download it from YOUR KOI console, then upload it to Action Center → Scripts Library. This is KOI's script, not a Cortex one. It must take no parameters</a:t>
             </a:r>
             <a:endParaRPr lang="en-US" sz="1050" dirty="0"/>
           </a:p>
@@ -5405,7 +5405,7 @@
                 <a:ea typeface="Calibri" pitchFamily="34" charset="-122"/>
                 <a:cs typeface="Calibri" pitchFamily="34" charset="-120"/>
               </a:rPr>
-              <a:t>A JSON List named exactly "Koi Script Runner"</a:t>
+              <a:t>A JSON List named exactly "Koi Script Runner" — sample content ships with this pack</a:t>
             </a:r>
             <a:endParaRPr lang="en-US" sz="1050" dirty="0"/>
           </a:p>
@@ -5420,11 +5420,11 @@
         <p:spPr>
           <a:xfrm>
             <a:off x="548640" y="2651760"/>
-            <a:ext cx="6400800" cy="2665476"/>
+            <a:ext cx="6400800" cy="3200400"/>
           </a:xfrm>
           <a:prstGeom prst="roundRect">
             <a:avLst>
-              <a:gd name="adj" fmla="val 1715"/>
+              <a:gd name="adj" fmla="val 1429"/>
             </a:avLst>
           </a:prstGeom>
           <a:solidFill>
@@ -5552,7 +5552,7 @@
                 <a:ea typeface="Calibri" pitchFamily="34" charset="-122"/>
                 <a:cs typeface="Calibri" pitchFamily="34" charset="-120"/>
               </a:rPr>
-              <a:t>Settings → Object Setup → Lists → New List, type JSON, named Koi Script Runner.</a:t>
+              <a:t>Settings → Object Setup → Lists → New List, type JSON, named exactly Koi Script Runner.</a:t>
             </a:r>
             <a:endParaRPr lang="en-US" sz="1150" dirty="0"/>
           </a:p>
@@ -5633,7 +5633,7 @@
                 <a:ea typeface="Calibri" pitchFamily="34" charset="-122"/>
                 <a:cs typeface="Calibri" pitchFamily="34" charset="-120"/>
               </a:rPr>
-              <a:t>Give each entry a script name, endpoint_os, endpoint group, tracker_list and rescan_interval_hours.</a:t>
+              <a:t>Paste the sample list content that ships with this pack (see the pack README), then edit it.</a:t>
             </a:r>
             <a:endParaRPr lang="en-US" sz="1150" dirty="0"/>
           </a:p>
@@ -5714,7 +5714,7 @@
                 <a:ea typeface="Calibri" pitchFamily="34" charset="-122"/>
                 <a:cs typeface="Calibri" pitchFamily="34" charset="-120"/>
               </a:rPr>
-              <a:t>Automation → Jobs → New Job → time-triggered → playbook KOI Ext Script Runner - Refresh Job.</a:t>
+              <a:t>Set endpoint_groups to your group name and script.name to the KOI script exactly as it appears in Action Center.</a:t>
             </a:r>
             <a:endParaRPr lang="en-US" sz="1150" dirty="0"/>
           </a:p>
@@ -5768,7 +5768,7 @@
         <p:spPr>
           <a:xfrm>
             <a:off x="1152144" y="4768596"/>
-            <a:ext cx="5486400" cy="246888"/>
+            <a:ext cx="5486400" cy="438912"/>
           </a:xfrm>
           <a:prstGeom prst="rect">
             <a:avLst/>
@@ -5795,6 +5795,249 @@
                 <a:ea typeface="Calibri" pitchFamily="34" charset="-122"/>
                 <a:cs typeface="Calibri" pitchFamily="34" charset="-120"/>
               </a:rPr>
+              <a:t>Add one entry per operating system you deploy to — each entry pairs one script with one OS.</a:t>
+            </a:r>
+            <a:endParaRPr lang="en-US" sz="1150" dirty="0"/>
+          </a:p>
+        </p:txBody>
+      </p:sp>
+      <p:sp>
+        <p:nvSpPr>
+          <p:cNvPr id="24" name="Text 22"/>
+          <p:cNvSpPr/>
+          <p:nvPr/>
+        </p:nvSpPr>
+        <p:spPr>
+          <a:xfrm>
+            <a:off x="859536" y="5285232"/>
+            <a:ext cx="219456" cy="256032"/>
+          </a:xfrm>
+          <a:prstGeom prst="rect">
+            <a:avLst/>
+          </a:prstGeom>
+          <a:noFill/>
+          <a:ln/>
+        </p:spPr>
+        <p:txBody>
+          <a:bodyPr wrap="square" lIns="0" tIns="0" rIns="0" bIns="0" rtlCol="0" anchor="t"/>
+          <a:lstStyle/>
+          <a:p>
+            <a:pPr indent="0" marL="0">
+              <a:buNone/>
+            </a:pPr>
+            <a:r>
+              <a:rPr lang="en-US" sz="1150" b="1" dirty="0">
+                <a:solidFill>
+                  <a:srgbClr val="E8551F"/>
+                </a:solidFill>
+                <a:latin typeface="Calibri" pitchFamily="34" charset="0"/>
+                <a:ea typeface="Calibri" pitchFamily="34" charset="-122"/>
+                <a:cs typeface="Calibri" pitchFamily="34" charset="-120"/>
+              </a:rPr>
+              <a:t>5</a:t>
+            </a:r>
+            <a:endParaRPr lang="en-US" sz="1150" dirty="0"/>
+          </a:p>
+        </p:txBody>
+      </p:sp>
+      <p:sp>
+        <p:nvSpPr>
+          <p:cNvPr id="25" name="Text 23"/>
+          <p:cNvSpPr/>
+          <p:nvPr/>
+        </p:nvSpPr>
+        <p:spPr>
+          <a:xfrm>
+            <a:off x="1152144" y="5285232"/>
+            <a:ext cx="5486400" cy="438912"/>
+          </a:xfrm>
+          <a:prstGeom prst="rect">
+            <a:avLst/>
+          </a:prstGeom>
+          <a:noFill/>
+          <a:ln/>
+        </p:spPr>
+        <p:txBody>
+          <a:bodyPr wrap="square" lIns="0" tIns="0" rIns="0" bIns="0" rtlCol="0" anchor="t"/>
+          <a:lstStyle/>
+          <a:p>
+            <a:pPr indent="0" marL="0">
+              <a:lnSpc>
+                <a:spcPts val="1500"/>
+              </a:lnSpc>
+              <a:buNone/>
+            </a:pPr>
+            <a:r>
+              <a:rPr lang="en-US" sz="1150" dirty="0">
+                <a:solidFill>
+                  <a:srgbClr val="B4B7BD"/>
+                </a:solidFill>
+                <a:latin typeface="Calibri" pitchFamily="34" charset="0"/>
+                <a:ea typeface="Calibri" pitchFamily="34" charset="-122"/>
+                <a:cs typeface="Calibri" pitchFamily="34" charset="-120"/>
+              </a:rPr>
+              <a:t>tracker_list and rescan_interval_hours already carry working defaults — leave them unless you want a different rescan window.</a:t>
+            </a:r>
+            <a:endParaRPr lang="en-US" sz="1150" dirty="0"/>
+          </a:p>
+        </p:txBody>
+      </p:sp>
+      <p:sp>
+        <p:nvSpPr>
+          <p:cNvPr id="26" name="Text 24"/>
+          <p:cNvSpPr/>
+          <p:nvPr/>
+        </p:nvSpPr>
+        <p:spPr>
+          <a:xfrm>
+            <a:off x="859536" y="5801868"/>
+            <a:ext cx="219456" cy="256032"/>
+          </a:xfrm>
+          <a:prstGeom prst="rect">
+            <a:avLst/>
+          </a:prstGeom>
+          <a:noFill/>
+          <a:ln/>
+        </p:spPr>
+        <p:txBody>
+          <a:bodyPr wrap="square" lIns="0" tIns="0" rIns="0" bIns="0" rtlCol="0" anchor="t"/>
+          <a:lstStyle/>
+          <a:p>
+            <a:pPr indent="0" marL="0">
+              <a:buNone/>
+            </a:pPr>
+            <a:r>
+              <a:rPr lang="en-US" sz="1150" b="1" dirty="0">
+                <a:solidFill>
+                  <a:srgbClr val="E8551F"/>
+                </a:solidFill>
+                <a:latin typeface="Calibri" pitchFamily="34" charset="0"/>
+                <a:ea typeface="Calibri" pitchFamily="34" charset="-122"/>
+                <a:cs typeface="Calibri" pitchFamily="34" charset="-120"/>
+              </a:rPr>
+              <a:t>6</a:t>
+            </a:r>
+            <a:endParaRPr lang="en-US" sz="1150" dirty="0"/>
+          </a:p>
+        </p:txBody>
+      </p:sp>
+      <p:sp>
+        <p:nvSpPr>
+          <p:cNvPr id="27" name="Text 25"/>
+          <p:cNvSpPr/>
+          <p:nvPr/>
+        </p:nvSpPr>
+        <p:spPr>
+          <a:xfrm>
+            <a:off x="1152144" y="5801868"/>
+            <a:ext cx="5486400" cy="438912"/>
+          </a:xfrm>
+          <a:prstGeom prst="rect">
+            <a:avLst/>
+          </a:prstGeom>
+          <a:noFill/>
+          <a:ln/>
+        </p:spPr>
+        <p:txBody>
+          <a:bodyPr wrap="square" lIns="0" tIns="0" rIns="0" bIns="0" rtlCol="0" anchor="t"/>
+          <a:lstStyle/>
+          <a:p>
+            <a:pPr indent="0" marL="0">
+              <a:lnSpc>
+                <a:spcPts val="1500"/>
+              </a:lnSpc>
+              <a:buNone/>
+            </a:pPr>
+            <a:r>
+              <a:rPr lang="en-US" sz="1150" dirty="0">
+                <a:solidFill>
+                  <a:srgbClr val="B4B7BD"/>
+                </a:solidFill>
+                <a:latin typeface="Calibri" pitchFamily="34" charset="0"/>
+                <a:ea typeface="Calibri" pitchFamily="34" charset="-122"/>
+                <a:cs typeface="Calibri" pitchFamily="34" charset="-120"/>
+              </a:rPr>
+              <a:t>Automation → Jobs → New Job → time-triggered → playbook KOI Ext Script Runner - Refresh Job.</a:t>
+            </a:r>
+            <a:endParaRPr lang="en-US" sz="1150" dirty="0"/>
+          </a:p>
+        </p:txBody>
+      </p:sp>
+      <p:sp>
+        <p:nvSpPr>
+          <p:cNvPr id="28" name="Text 26"/>
+          <p:cNvSpPr/>
+          <p:nvPr/>
+        </p:nvSpPr>
+        <p:spPr>
+          <a:xfrm>
+            <a:off x="859536" y="6318504"/>
+            <a:ext cx="219456" cy="256032"/>
+          </a:xfrm>
+          <a:prstGeom prst="rect">
+            <a:avLst/>
+          </a:prstGeom>
+          <a:noFill/>
+          <a:ln/>
+        </p:spPr>
+        <p:txBody>
+          <a:bodyPr wrap="square" lIns="0" tIns="0" rIns="0" bIns="0" rtlCol="0" anchor="t"/>
+          <a:lstStyle/>
+          <a:p>
+            <a:pPr indent="0" marL="0">
+              <a:buNone/>
+            </a:pPr>
+            <a:r>
+              <a:rPr lang="en-US" sz="1150" b="1" dirty="0">
+                <a:solidFill>
+                  <a:srgbClr val="E8551F"/>
+                </a:solidFill>
+                <a:latin typeface="Calibri" pitchFamily="34" charset="0"/>
+                <a:ea typeface="Calibri" pitchFamily="34" charset="-122"/>
+                <a:cs typeface="Calibri" pitchFamily="34" charset="-120"/>
+              </a:rPr>
+              <a:t>7</a:t>
+            </a:r>
+            <a:endParaRPr lang="en-US" sz="1150" dirty="0"/>
+          </a:p>
+        </p:txBody>
+      </p:sp>
+      <p:sp>
+        <p:nvSpPr>
+          <p:cNvPr id="29" name="Text 27"/>
+          <p:cNvSpPr/>
+          <p:nvPr/>
+        </p:nvSpPr>
+        <p:spPr>
+          <a:xfrm>
+            <a:off x="1152144" y="6318504"/>
+            <a:ext cx="5486400" cy="246888"/>
+          </a:xfrm>
+          <a:prstGeom prst="rect">
+            <a:avLst/>
+          </a:prstGeom>
+          <a:noFill/>
+          <a:ln/>
+        </p:spPr>
+        <p:txBody>
+          <a:bodyPr wrap="square" lIns="0" tIns="0" rIns="0" bIns="0" rtlCol="0" anchor="t"/>
+          <a:lstStyle/>
+          <a:p>
+            <a:pPr indent="0" marL="0">
+              <a:lnSpc>
+                <a:spcPts val="1500"/>
+              </a:lnSpc>
+              <a:buNone/>
+            </a:pPr>
+            <a:r>
+              <a:rPr lang="en-US" sz="1150" dirty="0">
+                <a:solidFill>
+                  <a:srgbClr val="B4B7BD"/>
+                </a:solidFill>
+                <a:latin typeface="Calibri" pitchFamily="34" charset="0"/>
+                <a:ea typeface="Calibri" pitchFamily="34" charset="-122"/>
+                <a:cs typeface="Calibri" pitchFamily="34" charset="-120"/>
+              </a:rPr>
               <a:t>Enable the Job, then Run now.</a:t>
             </a:r>
             <a:endParaRPr lang="en-US" sz="1150" dirty="0"/>
@@ -5803,18 +6046,18 @@
       </p:sp>
       <p:sp>
         <p:nvSpPr>
-          <p:cNvPr id="24" name="Shape 22"/>
+          <p:cNvPr id="30" name="Shape 28"/>
           <p:cNvSpPr/>
           <p:nvPr/>
         </p:nvSpPr>
         <p:spPr>
           <a:xfrm>
             <a:off x="7315200" y="2651760"/>
-            <a:ext cx="4297680" cy="2665476"/>
+            <a:ext cx="4297680" cy="3200400"/>
           </a:xfrm>
           <a:prstGeom prst="roundRect">
             <a:avLst>
-              <a:gd name="adj" fmla="val 1715"/>
+              <a:gd name="adj" fmla="val 1429"/>
             </a:avLst>
           </a:prstGeom>
           <a:solidFill>
@@ -5830,7 +6073,7 @@
       </p:sp>
       <p:sp>
         <p:nvSpPr>
-          <p:cNvPr id="25" name="Text 23"/>
+          <p:cNvPr id="31" name="Text 29"/>
           <p:cNvSpPr/>
           <p:nvPr/>
         </p:nvSpPr>
@@ -5869,7 +6112,7 @@
       </p:sp>
       <p:sp>
         <p:nvSpPr>
-          <p:cNvPr id="26" name="Text 24"/>
+          <p:cNvPr id="32" name="Text 30"/>
           <p:cNvSpPr/>
           <p:nvPr/>
         </p:nvSpPr>
@@ -5908,7 +6151,7 @@
       </p:sp>
       <p:sp>
         <p:nvSpPr>
-          <p:cNvPr id="27" name="Text 25"/>
+          <p:cNvPr id="33" name="Text 31"/>
           <p:cNvSpPr/>
           <p:nvPr/>
         </p:nvSpPr>
@@ -5950,7 +6193,7 @@
       </p:sp>
       <p:sp>
         <p:nvSpPr>
-          <p:cNvPr id="28" name="Text 26"/>
+          <p:cNvPr id="34" name="Text 32"/>
           <p:cNvSpPr/>
           <p:nvPr/>
         </p:nvSpPr>
@@ -5989,7 +6232,7 @@
       </p:sp>
       <p:sp>
         <p:nvSpPr>
-          <p:cNvPr id="29" name="Text 27"/>
+          <p:cNvPr id="35" name="Text 33"/>
           <p:cNvSpPr/>
           <p:nvPr/>
         </p:nvSpPr>
@@ -6031,7 +6274,7 @@
       </p:sp>
       <p:sp>
         <p:nvSpPr>
-          <p:cNvPr id="30" name="Text 28"/>
+          <p:cNvPr id="36" name="Text 34"/>
           <p:cNvSpPr/>
           <p:nvPr/>
         </p:nvSpPr>
@@ -6070,7 +6313,7 @@
       </p:sp>
       <p:sp>
         <p:nvSpPr>
-          <p:cNvPr id="31" name="Text 29"/>
+          <p:cNvPr id="37" name="Text 35"/>
           <p:cNvSpPr/>
           <p:nvPr/>
         </p:nvSpPr>
@@ -6112,13 +6355,13 @@
       </p:sp>
       <p:sp>
         <p:nvSpPr>
-          <p:cNvPr id="32" name="Shape 30"/>
-          <p:cNvSpPr/>
-          <p:nvPr/>
-        </p:nvSpPr>
-        <p:spPr>
-          <a:xfrm>
-            <a:off x="548640" y="5463540"/>
+          <p:cNvPr id="38" name="Shape 36"/>
+          <p:cNvSpPr/>
+          <p:nvPr/>
+        </p:nvSpPr>
+        <p:spPr>
+          <a:xfrm>
+            <a:off x="548640" y="5998464"/>
             <a:ext cx="11064240" cy="658368"/>
           </a:xfrm>
           <a:prstGeom prst="roundRect">
@@ -6139,13 +6382,13 @@
       </p:sp>
       <p:sp>
         <p:nvSpPr>
-          <p:cNvPr id="33" name="Shape 31"/>
-          <p:cNvSpPr/>
-          <p:nvPr/>
-        </p:nvSpPr>
-        <p:spPr>
-          <a:xfrm>
-            <a:off x="786384" y="5646420"/>
+          <p:cNvPr id="39" name="Shape 37"/>
+          <p:cNvSpPr/>
+          <p:nvPr/>
+        </p:nvSpPr>
+        <p:spPr>
+          <a:xfrm>
+            <a:off x="786384" y="6181344"/>
             <a:ext cx="292608" cy="292608"/>
           </a:xfrm>
           <a:prstGeom prst="roundRect">
@@ -6166,13 +6409,13 @@
       </p:sp>
       <p:sp>
         <p:nvSpPr>
-          <p:cNvPr id="34" name="Text 32"/>
-          <p:cNvSpPr/>
-          <p:nvPr/>
-        </p:nvSpPr>
-        <p:spPr>
-          <a:xfrm>
-            <a:off x="786384" y="5646420"/>
+          <p:cNvPr id="40" name="Text 38"/>
+          <p:cNvSpPr/>
+          <p:nvPr/>
+        </p:nvSpPr>
+        <p:spPr>
+          <a:xfrm>
+            <a:off x="786384" y="6181344"/>
             <a:ext cx="292608" cy="292608"/>
           </a:xfrm>
           <a:prstGeom prst="rect">
@@ -6205,13 +6448,13 @@
       </p:sp>
       <p:sp>
         <p:nvSpPr>
-          <p:cNvPr id="35" name="Text 33"/>
-          <p:cNvSpPr/>
-          <p:nvPr/>
-        </p:nvSpPr>
-        <p:spPr>
-          <a:xfrm>
-            <a:off x="1243584" y="5573268"/>
+          <p:cNvPr id="41" name="Text 39"/>
+          <p:cNvSpPr/>
+          <p:nvPr/>
+        </p:nvSpPr>
+        <p:spPr>
+          <a:xfrm>
+            <a:off x="1243584" y="6108192"/>
             <a:ext cx="10058400" cy="438912"/>
           </a:xfrm>
           <a:prstGeom prst="rect">

--- a/docs/KOI_Marketplace_Pack_Test_Guide.pptx
+++ b/docs/KOI_Marketplace_Pack_Test_Guide.pptx
@@ -6479,7 +6479,7 @@
         <p:spPr>
           <a:xfrm>
             <a:off x="1152144" y="4279392"/>
-            <a:ext cx="5486400" cy="438912"/>
+            <a:ext cx="5486400" cy="630936"/>
           </a:xfrm>
           <a:prstGeom prst="rect">
             <a:avLst/>
@@ -6506,7 +6506,7 @@
                 <a:ea typeface="Calibri" pitchFamily="34" charset="-122"/>
                 <a:cs typeface="Calibri" pitchFamily="34" charset="-120"/>
               </a:rPr>
-              <a:t>Open Lists/list-Koi_Script_Runner.json in the pack, copy its data value, and paste it in.</a:t>
+              <a:t>Open Lists/README.md in the pack and copy the JSON block — it is formatted ready to paste (do NOT copy from list-Koi_Script_Runner.json; its data field is escaped).</a:t>
             </a:r>
             <a:endParaRPr lang="en-US" sz="1150" dirty="0"/>
           </a:p>
@@ -6520,7 +6520,7 @@
         </p:nvSpPr>
         <p:spPr>
           <a:xfrm>
-            <a:off x="859536" y="4796028"/>
+            <a:off x="859536" y="4983480"/>
             <a:ext cx="219456" cy="256032"/>
           </a:xfrm>
           <a:prstGeom prst="rect">
@@ -6559,7 +6559,7 @@
         </p:nvSpPr>
         <p:spPr>
           <a:xfrm>
-            <a:off x="1152144" y="4796028"/>
+            <a:off x="1152144" y="4983480"/>
             <a:ext cx="5486400" cy="438912"/>
           </a:xfrm>
           <a:prstGeom prst="rect">
@@ -6601,7 +6601,7 @@
         </p:nvSpPr>
         <p:spPr>
           <a:xfrm>
-            <a:off x="859536" y="5312664"/>
+            <a:off x="859536" y="5500116"/>
             <a:ext cx="219456" cy="256032"/>
           </a:xfrm>
           <a:prstGeom prst="rect">
@@ -6640,7 +6640,7 @@
         </p:nvSpPr>
         <p:spPr>
           <a:xfrm>
-            <a:off x="1152144" y="5312664"/>
+            <a:off x="1152144" y="5500116"/>
             <a:ext cx="5486400" cy="438912"/>
           </a:xfrm>
           <a:prstGeom prst="rect">
@@ -6682,7 +6682,7 @@
         </p:nvSpPr>
         <p:spPr>
           <a:xfrm>
-            <a:off x="859536" y="5829300"/>
+            <a:off x="859536" y="6016752"/>
             <a:ext cx="219456" cy="256032"/>
           </a:xfrm>
           <a:prstGeom prst="rect">
@@ -6721,7 +6721,7 @@
         </p:nvSpPr>
         <p:spPr>
           <a:xfrm>
-            <a:off x="1152144" y="5829300"/>
+            <a:off x="1152144" y="6016752"/>
             <a:ext cx="5486400" cy="438912"/>
           </a:xfrm>
           <a:prstGeom prst="rect">

--- a/docs/KOI_Marketplace_Pack_Test_Guide.pptx
+++ b/docs/KOI_Marketplace_Pack_Test_Guide.pptx
@@ -20,10 +20,9 @@
     <p:sldId id="268" r:id="rId14"/>
     <p:sldId id="269" r:id="rId15"/>
     <p:sldId id="270" r:id="rId16"/>
-    <p:sldId id="271" r:id="rId17"/>
   </p:sldIdLst>
   <p:notesMasterIdLst>
-    <p:notesMasterId r:id="rId18"/>
+    <p:notesMasterId r:id="rId17"/>
   </p:notesMasterIdLst>
   <p:sldSz cx="12192000" cy="6858000"/>
   <p:notesSz cx="6858000" cy="12192000"/>
@@ -1069,94 +1068,6 @@
             <a:fld id="{F7021451-1387-4CA6-816F-3879F97B5CBC}" type="slidenum">
               <a:rPr lang="en-US"/>
               <a:t>15</a:t>
-            </a:fld>
-            <a:endParaRPr lang="en-US"/>
-          </a:p>
-        </p:txBody>
-      </p:sp>
-    </p:spTree>
-    <p:extLst>
-      <p:ext uri="{BB962C8B-B14F-4D97-AF65-F5344CB8AC3E}">
-        <p14:creationId xmlns:p14="http://schemas.microsoft.com/office/powerpoint/2010/main" val="1024086991"/>
-      </p:ext>
-    </p:extLst>
-  </p:cSld>
-  <p:clrMapOvr>
-    <a:masterClrMapping/>
-  </p:clrMapOvr>
-</p:notes>
-</file>
-
-<file path=ppt/notesSlides/notesSlide16.xml><?xml version="1.0" encoding="utf-8"?>
-<p:notes xmlns:a="http://schemas.openxmlformats.org/drawingml/2006/main" xmlns:r="http://schemas.openxmlformats.org/officeDocument/2006/relationships" xmlns:p="http://schemas.openxmlformats.org/presentationml/2006/main">
-  <p:cSld>
-    <p:spTree>
-      <p:nvGrpSpPr>
-        <p:cNvPr id="1" name=""/>
-        <p:cNvGrpSpPr/>
-        <p:nvPr/>
-      </p:nvGrpSpPr>
-      <p:grpSpPr>
-        <a:xfrm>
-          <a:off x="0" y="0"/>
-          <a:ext cx="0" cy="0"/>
-          <a:chOff x="0" y="0"/>
-          <a:chExt cx="0" cy="0"/>
-        </a:xfrm>
-      </p:grpSpPr>
-      <p:sp>
-        <p:nvSpPr>
-          <p:cNvPr id="2" name="Slide Image Placeholder 1"/>
-          <p:cNvSpPr>
-            <a:spLocks noGrp="1" noRot="1" noChangeAspect="1"/>
-          </p:cNvSpPr>
-          <p:nvPr>
-            <p:ph type="sldImg"/>
-          </p:nvPr>
-        </p:nvSpPr>
-        <p:spPr/>
-      </p:sp>
-      <p:sp>
-        <p:nvSpPr>
-          <p:cNvPr id="3" name="Notes Placeholder 2"/>
-          <p:cNvSpPr>
-            <a:spLocks noGrp="1"/>
-          </p:cNvSpPr>
-          <p:nvPr>
-            <p:ph type="body" idx="1"/>
-          </p:nvPr>
-        </p:nvSpPr>
-        <p:spPr/>
-        <p:txBody>
-          <a:bodyPr/>
-          <a:lstStyle/>
-          <a:p>
-            <a:r>
-              <a:rPr lang="en-US" dirty="0"/>
-              <a:t/>
-            </a:r>
-            <a:endParaRPr lang="en-US" dirty="0"/>
-          </a:p>
-        </p:txBody>
-      </p:sp>
-      <p:sp>
-        <p:nvSpPr>
-          <p:cNvPr id="4" name="Slide Number Placeholder 3"/>
-          <p:cNvSpPr>
-            <a:spLocks noGrp="1"/>
-          </p:cNvSpPr>
-          <p:nvPr>
-            <p:ph type="sldNum" sz="quarter" idx="10"/>
-          </p:nvPr>
-        </p:nvSpPr>
-        <p:spPr/>
-        <p:txBody>
-          <a:bodyPr/>
-          <a:lstStyle/>
-          <a:p>
-            <a:fld id="{F7021451-1387-4CA6-816F-3879F97B5CBC}" type="slidenum">
-              <a:rPr lang="en-US"/>
-              <a:t>16</a:t>
             </a:fld>
             <a:endParaRPr lang="en-US"/>
           </a:p>
@@ -3832,141 +3743,6 @@
           </a:p>
         </p:txBody>
       </p:sp>
-      <p:sp>
-        <p:nvSpPr>
-          <p:cNvPr id="37" name="Shape 35"/>
-          <p:cNvSpPr/>
-          <p:nvPr/>
-        </p:nvSpPr>
-        <p:spPr>
-          <a:xfrm>
-            <a:off x="548640" y="5052060"/>
-            <a:ext cx="11064240" cy="658368"/>
-          </a:xfrm>
-          <a:prstGeom prst="roundRect">
-            <a:avLst>
-              <a:gd name="adj" fmla="val 6944"/>
-            </a:avLst>
-          </a:prstGeom>
-          <a:solidFill>
-            <a:srgbClr val="1C2026"/>
-          </a:solidFill>
-          <a:ln w="12700">
-            <a:solidFill>
-              <a:srgbClr val="1C2026"/>
-            </a:solidFill>
-            <a:prstDash val="solid"/>
-          </a:ln>
-        </p:spPr>
-      </p:sp>
-      <p:sp>
-        <p:nvSpPr>
-          <p:cNvPr id="38" name="Shape 36"/>
-          <p:cNvSpPr/>
-          <p:nvPr/>
-        </p:nvSpPr>
-        <p:spPr>
-          <a:xfrm>
-            <a:off x="786384" y="5234940"/>
-            <a:ext cx="292608" cy="292608"/>
-          </a:xfrm>
-          <a:prstGeom prst="roundRect">
-            <a:avLst>
-              <a:gd name="adj" fmla="val 28125"/>
-            </a:avLst>
-          </a:prstGeom>
-          <a:solidFill>
-            <a:srgbClr val="F5A524"/>
-          </a:solidFill>
-          <a:ln w="12700">
-            <a:solidFill>
-              <a:srgbClr val="F5A524"/>
-            </a:solidFill>
-            <a:prstDash val="solid"/>
-          </a:ln>
-        </p:spPr>
-      </p:sp>
-      <p:sp>
-        <p:nvSpPr>
-          <p:cNvPr id="39" name="Text 37"/>
-          <p:cNvSpPr/>
-          <p:nvPr/>
-        </p:nvSpPr>
-        <p:spPr>
-          <a:xfrm>
-            <a:off x="786384" y="5234940"/>
-            <a:ext cx="292608" cy="292608"/>
-          </a:xfrm>
-          <a:prstGeom prst="rect">
-            <a:avLst/>
-          </a:prstGeom>
-          <a:noFill/>
-          <a:ln/>
-        </p:spPr>
-        <p:txBody>
-          <a:bodyPr wrap="square" lIns="0" tIns="0" rIns="0" bIns="0" rtlCol="0" anchor="ctr"/>
-          <a:lstStyle/>
-          <a:p>
-            <a:pPr algn="ctr" indent="0" marL="0">
-              <a:buNone/>
-            </a:pPr>
-            <a:r>
-              <a:rPr lang="en-US" sz="1300" b="1" dirty="0">
-                <a:solidFill>
-                  <a:srgbClr val="FFFFFF"/>
-                </a:solidFill>
-                <a:latin typeface="Calibri" pitchFamily="34" charset="0"/>
-                <a:ea typeface="Calibri" pitchFamily="34" charset="-122"/>
-                <a:cs typeface="Calibri" pitchFamily="34" charset="-120"/>
-              </a:rPr>
-              <a:t>!</a:t>
-            </a:r>
-            <a:endParaRPr lang="en-US" sz="1300" dirty="0"/>
-          </a:p>
-        </p:txBody>
-      </p:sp>
-      <p:sp>
-        <p:nvSpPr>
-          <p:cNvPr id="40" name="Text 38"/>
-          <p:cNvSpPr/>
-          <p:nvPr/>
-        </p:nvSpPr>
-        <p:spPr>
-          <a:xfrm>
-            <a:off x="1243584" y="5161788"/>
-            <a:ext cx="10058400" cy="438912"/>
-          </a:xfrm>
-          <a:prstGeom prst="rect">
-            <a:avLst/>
-          </a:prstGeom>
-          <a:noFill/>
-          <a:ln/>
-        </p:spPr>
-        <p:txBody>
-          <a:bodyPr wrap="square" lIns="0" tIns="0" rIns="0" bIns="0" rtlCol="0" anchor="t"/>
-          <a:lstStyle/>
-          <a:p>
-            <a:pPr indent="0" marL="0">
-              <a:lnSpc>
-                <a:spcPts val="1200"/>
-              </a:lnSpc>
-              <a:buNone/>
-            </a:pPr>
-            <a:r>
-              <a:rPr lang="en-US" sz="1000" dirty="0">
-                <a:solidFill>
-                  <a:srgbClr val="B4B7BD"/>
-                </a:solidFill>
-                <a:latin typeface="Calibri" pitchFamily="34" charset="0"/>
-                <a:ea typeface="Calibri" pitchFamily="34" charset="-122"/>
-                <a:cs typeface="Calibri" pitchFamily="34" charset="-120"/>
-              </a:rPr>
-              <a:t>Re-run this after any change to the response playbook. If a run ever completes without stopping for approval, stop and investigate before using the pack in production.</a:t>
-            </a:r>
-            <a:endParaRPr lang="en-US" sz="1000" dirty="0"/>
-          </a:p>
-        </p:txBody>
-      </p:sp>
     </p:spTree>
   </p:cSld>
   <p:clrMapOvr>
@@ -5286,141 +5062,6 @@
           </a:p>
         </p:txBody>
       </p:sp>
-      <p:sp>
-        <p:nvSpPr>
-          <p:cNvPr id="35" name="Shape 33"/>
-          <p:cNvSpPr/>
-          <p:nvPr/>
-        </p:nvSpPr>
-        <p:spPr>
-          <a:xfrm>
-            <a:off x="548640" y="4910328"/>
-            <a:ext cx="11064240" cy="658368"/>
-          </a:xfrm>
-          <a:prstGeom prst="roundRect">
-            <a:avLst>
-              <a:gd name="adj" fmla="val 6944"/>
-            </a:avLst>
-          </a:prstGeom>
-          <a:solidFill>
-            <a:srgbClr val="1C2026"/>
-          </a:solidFill>
-          <a:ln w="12700">
-            <a:solidFill>
-              <a:srgbClr val="1C2026"/>
-            </a:solidFill>
-            <a:prstDash val="solid"/>
-          </a:ln>
-        </p:spPr>
-      </p:sp>
-      <p:sp>
-        <p:nvSpPr>
-          <p:cNvPr id="36" name="Shape 34"/>
-          <p:cNvSpPr/>
-          <p:nvPr/>
-        </p:nvSpPr>
-        <p:spPr>
-          <a:xfrm>
-            <a:off x="786384" y="5093208"/>
-            <a:ext cx="292608" cy="292608"/>
-          </a:xfrm>
-          <a:prstGeom prst="roundRect">
-            <a:avLst>
-              <a:gd name="adj" fmla="val 28125"/>
-            </a:avLst>
-          </a:prstGeom>
-          <a:solidFill>
-            <a:srgbClr val="F5A524"/>
-          </a:solidFill>
-          <a:ln w="12700">
-            <a:solidFill>
-              <a:srgbClr val="F5A524"/>
-            </a:solidFill>
-            <a:prstDash val="solid"/>
-          </a:ln>
-        </p:spPr>
-      </p:sp>
-      <p:sp>
-        <p:nvSpPr>
-          <p:cNvPr id="37" name="Text 35"/>
-          <p:cNvSpPr/>
-          <p:nvPr/>
-        </p:nvSpPr>
-        <p:spPr>
-          <a:xfrm>
-            <a:off x="786384" y="5093208"/>
-            <a:ext cx="292608" cy="292608"/>
-          </a:xfrm>
-          <a:prstGeom prst="rect">
-            <a:avLst/>
-          </a:prstGeom>
-          <a:noFill/>
-          <a:ln/>
-        </p:spPr>
-        <p:txBody>
-          <a:bodyPr wrap="square" lIns="0" tIns="0" rIns="0" bIns="0" rtlCol="0" anchor="ctr"/>
-          <a:lstStyle/>
-          <a:p>
-            <a:pPr algn="ctr" indent="0" marL="0">
-              <a:buNone/>
-            </a:pPr>
-            <a:r>
-              <a:rPr lang="en-US" sz="1300" b="1" dirty="0">
-                <a:solidFill>
-                  <a:srgbClr val="FFFFFF"/>
-                </a:solidFill>
-                <a:latin typeface="Calibri" pitchFamily="34" charset="0"/>
-                <a:ea typeface="Calibri" pitchFamily="34" charset="-122"/>
-                <a:cs typeface="Calibri" pitchFamily="34" charset="-120"/>
-              </a:rPr>
-              <a:t>!</a:t>
-            </a:r>
-            <a:endParaRPr lang="en-US" sz="1300" dirty="0"/>
-          </a:p>
-        </p:txBody>
-      </p:sp>
-      <p:sp>
-        <p:nvSpPr>
-          <p:cNvPr id="38" name="Text 36"/>
-          <p:cNvSpPr/>
-          <p:nvPr/>
-        </p:nvSpPr>
-        <p:spPr>
-          <a:xfrm>
-            <a:off x="1243584" y="5020056"/>
-            <a:ext cx="10058400" cy="438912"/>
-          </a:xfrm>
-          <a:prstGeom prst="rect">
-            <a:avLst/>
-          </a:prstGeom>
-          <a:noFill/>
-          <a:ln/>
-        </p:spPr>
-        <p:txBody>
-          <a:bodyPr wrap="square" lIns="0" tIns="0" rIns="0" bIns="0" rtlCol="0" anchor="t"/>
-          <a:lstStyle/>
-          <a:p>
-            <a:pPr indent="0" marL="0">
-              <a:lnSpc>
-                <a:spcPts val="1200"/>
-              </a:lnSpc>
-              <a:buNone/>
-            </a:pPr>
-            <a:r>
-              <a:rPr lang="en-US" sz="1000" dirty="0">
-                <a:solidFill>
-                  <a:srgbClr val="B4B7BD"/>
-                </a:solidFill>
-                <a:latin typeface="Calibri" pitchFamily="34" charset="0"/>
-                <a:ea typeface="Calibri" pitchFamily="34" charset="-122"/>
-                <a:cs typeface="Calibri" pitchFamily="34" charset="-120"/>
-              </a:rPr>
-              <a:t>The sweep checks the XQL engine is answering before it runs, and stops cleanly if not. On XSIAM the engine is provisioned by the platform, so that check should simply pass.</a:t>
-            </a:r>
-            <a:endParaRPr lang="en-US" sz="1000" dirty="0"/>
-          </a:p>
-        </p:txBody>
-      </p:sp>
     </p:spTree>
   </p:cSld>
   <p:clrMapOvr>
@@ -6293,11 +5934,11 @@
         <p:spPr>
           <a:xfrm>
             <a:off x="548640" y="3232404"/>
-            <a:ext cx="6400800" cy="2656332"/>
+            <a:ext cx="6400800" cy="3351276"/>
           </a:xfrm>
           <a:prstGeom prst="roundRect">
             <a:avLst>
-              <a:gd name="adj" fmla="val 1721"/>
+              <a:gd name="adj" fmla="val 1364"/>
             </a:avLst>
           </a:prstGeom>
           <a:solidFill>
@@ -6764,11 +6405,11 @@
         <p:spPr>
           <a:xfrm>
             <a:off x="7315200" y="3232404"/>
-            <a:ext cx="4297680" cy="2656332"/>
+            <a:ext cx="4297680" cy="3351276"/>
           </a:xfrm>
           <a:prstGeom prst="roundRect">
             <a:avLst>
-              <a:gd name="adj" fmla="val 1721"/>
+              <a:gd name="adj" fmla="val 1364"/>
             </a:avLst>
           </a:prstGeom>
           <a:solidFill>
@@ -7061,141 +6702,6 @@
               <a:t>Re-running adds new endpoints without disturbing existing rows.</a:t>
             </a:r>
             <a:endParaRPr lang="en-US" sz="1150" dirty="0"/>
-          </a:p>
-        </p:txBody>
-      </p:sp>
-      <p:sp>
-        <p:nvSpPr>
-          <p:cNvPr id="43" name="Shape 41"/>
-          <p:cNvSpPr/>
-          <p:nvPr/>
-        </p:nvSpPr>
-        <p:spPr>
-          <a:xfrm>
-            <a:off x="548640" y="6016752"/>
-            <a:ext cx="11064240" cy="658368"/>
-          </a:xfrm>
-          <a:prstGeom prst="roundRect">
-            <a:avLst>
-              <a:gd name="adj" fmla="val 6944"/>
-            </a:avLst>
-          </a:prstGeom>
-          <a:solidFill>
-            <a:srgbClr val="1C2026"/>
-          </a:solidFill>
-          <a:ln w="12700">
-            <a:solidFill>
-              <a:srgbClr val="1C2026"/>
-            </a:solidFill>
-            <a:prstDash val="solid"/>
-          </a:ln>
-        </p:spPr>
-      </p:sp>
-      <p:sp>
-        <p:nvSpPr>
-          <p:cNvPr id="44" name="Shape 42"/>
-          <p:cNvSpPr/>
-          <p:nvPr/>
-        </p:nvSpPr>
-        <p:spPr>
-          <a:xfrm>
-            <a:off x="786384" y="6199632"/>
-            <a:ext cx="292608" cy="292608"/>
-          </a:xfrm>
-          <a:prstGeom prst="roundRect">
-            <a:avLst>
-              <a:gd name="adj" fmla="val 28125"/>
-            </a:avLst>
-          </a:prstGeom>
-          <a:solidFill>
-            <a:srgbClr val="F5A524"/>
-          </a:solidFill>
-          <a:ln w="12700">
-            <a:solidFill>
-              <a:srgbClr val="F5A524"/>
-            </a:solidFill>
-            <a:prstDash val="solid"/>
-          </a:ln>
-        </p:spPr>
-      </p:sp>
-      <p:sp>
-        <p:nvSpPr>
-          <p:cNvPr id="45" name="Text 43"/>
-          <p:cNvSpPr/>
-          <p:nvPr/>
-        </p:nvSpPr>
-        <p:spPr>
-          <a:xfrm>
-            <a:off x="786384" y="6199632"/>
-            <a:ext cx="292608" cy="292608"/>
-          </a:xfrm>
-          <a:prstGeom prst="rect">
-            <a:avLst/>
-          </a:prstGeom>
-          <a:noFill/>
-          <a:ln/>
-        </p:spPr>
-        <p:txBody>
-          <a:bodyPr wrap="square" lIns="0" tIns="0" rIns="0" bIns="0" rtlCol="0" anchor="ctr"/>
-          <a:lstStyle/>
-          <a:p>
-            <a:pPr algn="ctr" indent="0" marL="0">
-              <a:buNone/>
-            </a:pPr>
-            <a:r>
-              <a:rPr lang="en-US" sz="1300" b="1" dirty="0">
-                <a:solidFill>
-                  <a:srgbClr val="FFFFFF"/>
-                </a:solidFill>
-                <a:latin typeface="Calibri" pitchFamily="34" charset="0"/>
-                <a:ea typeface="Calibri" pitchFamily="34" charset="-122"/>
-                <a:cs typeface="Calibri" pitchFamily="34" charset="-120"/>
-              </a:rPr>
-              <a:t>!</a:t>
-            </a:r>
-            <a:endParaRPr lang="en-US" sz="1300" dirty="0"/>
-          </a:p>
-        </p:txBody>
-      </p:sp>
-      <p:sp>
-        <p:nvSpPr>
-          <p:cNvPr id="46" name="Text 44"/>
-          <p:cNvSpPr/>
-          <p:nvPr/>
-        </p:nvSpPr>
-        <p:spPr>
-          <a:xfrm>
-            <a:off x="1243584" y="6126480"/>
-            <a:ext cx="10058400" cy="438912"/>
-          </a:xfrm>
-          <a:prstGeom prst="rect">
-            <a:avLst/>
-          </a:prstGeom>
-          <a:noFill/>
-          <a:ln/>
-        </p:spPr>
-        <p:txBody>
-          <a:bodyPr wrap="square" lIns="0" tIns="0" rIns="0" bIns="0" rtlCol="0" anchor="t"/>
-          <a:lstStyle/>
-          <a:p>
-            <a:pPr indent="0" marL="0">
-              <a:lnSpc>
-                <a:spcPts val="1200"/>
-              </a:lnSpc>
-              <a:buNone/>
-            </a:pPr>
-            <a:r>
-              <a:rPr lang="en-US" sz="1000" dirty="0">
-                <a:solidFill>
-                  <a:srgbClr val="B4B7BD"/>
-                </a:solidFill>
-                <a:latin typeface="Calibri" pitchFamily="34" charset="0"/>
-                <a:ea typeface="Calibri" pitchFamily="34" charset="-122"/>
-                <a:cs typeface="Calibri" pitchFamily="34" charset="-120"/>
-              </a:rPr>
-              <a:t>Without a Core REST API instance this test cannot pass — the refresh reads endpoint groups through it, and the tracker simply stays empty.</a:t>
-            </a:r>
-            <a:endParaRPr lang="en-US" sz="1000" dirty="0"/>
           </a:p>
         </p:txBody>
       </p:sp>
@@ -7909,11 +7415,11 @@
         <p:spPr>
           <a:xfrm>
             <a:off x="548640" y="2670048"/>
-            <a:ext cx="6400800" cy="2852928"/>
+            <a:ext cx="6400800" cy="3557016"/>
           </a:xfrm>
           <a:prstGeom prst="roundRect">
             <a:avLst>
-              <a:gd name="adj" fmla="val 1603"/>
+              <a:gd name="adj" fmla="val 1285"/>
             </a:avLst>
           </a:prstGeom>
           <a:solidFill>
@@ -8299,11 +7805,11 @@
         <p:spPr>
           <a:xfrm>
             <a:off x="7315200" y="2670048"/>
-            <a:ext cx="4297680" cy="2852928"/>
+            <a:ext cx="4297680" cy="3557016"/>
           </a:xfrm>
           <a:prstGeom prst="roundRect">
             <a:avLst>
-              <a:gd name="adj" fmla="val 1603"/>
+              <a:gd name="adj" fmla="val 1285"/>
             </a:avLst>
           </a:prstGeom>
           <a:solidFill>
@@ -8682,107 +8188,53 @@
       </p:sp>
       <p:sp>
         <p:nvSpPr>
-          <p:cNvPr id="39" name="Shape 37"/>
-          <p:cNvSpPr/>
-          <p:nvPr/>
-        </p:nvSpPr>
-        <p:spPr>
-          <a:xfrm>
-            <a:off x="548640" y="5650992"/>
-            <a:ext cx="11064240" cy="658368"/>
-          </a:xfrm>
-          <a:prstGeom prst="roundRect">
-            <a:avLst>
-              <a:gd name="adj" fmla="val 6944"/>
-            </a:avLst>
-          </a:prstGeom>
-          <a:solidFill>
-            <a:srgbClr val="1C2026"/>
-          </a:solidFill>
-          <a:ln w="12700">
-            <a:solidFill>
-              <a:srgbClr val="1C2026"/>
-            </a:solidFill>
-            <a:prstDash val="solid"/>
-          </a:ln>
-        </p:spPr>
-      </p:sp>
-      <p:sp>
-        <p:nvSpPr>
-          <p:cNvPr id="40" name="Shape 38"/>
-          <p:cNvSpPr/>
-          <p:nvPr/>
-        </p:nvSpPr>
-        <p:spPr>
-          <a:xfrm>
-            <a:off x="786384" y="5833872"/>
-            <a:ext cx="292608" cy="292608"/>
-          </a:xfrm>
-          <a:prstGeom prst="roundRect">
-            <a:avLst>
-              <a:gd name="adj" fmla="val 28125"/>
-            </a:avLst>
-          </a:prstGeom>
-          <a:solidFill>
-            <a:srgbClr val="F5A524"/>
-          </a:solidFill>
-          <a:ln w="12700">
-            <a:solidFill>
-              <a:srgbClr val="F5A524"/>
-            </a:solidFill>
-            <a:prstDash val="solid"/>
-          </a:ln>
-        </p:spPr>
-      </p:sp>
-      <p:sp>
-        <p:nvSpPr>
-          <p:cNvPr id="41" name="Text 39"/>
-          <p:cNvSpPr/>
-          <p:nvPr/>
-        </p:nvSpPr>
-        <p:spPr>
-          <a:xfrm>
-            <a:off x="786384" y="5833872"/>
-            <a:ext cx="292608" cy="292608"/>
-          </a:xfrm>
-          <a:prstGeom prst="rect">
-            <a:avLst/>
-          </a:prstGeom>
-          <a:noFill/>
-          <a:ln/>
-        </p:spPr>
-        <p:txBody>
-          <a:bodyPr wrap="square" lIns="0" tIns="0" rIns="0" bIns="0" rtlCol="0" anchor="ctr"/>
-          <a:lstStyle/>
-          <a:p>
-            <a:pPr algn="ctr" indent="0" marL="0">
-              <a:buNone/>
-            </a:pPr>
-            <a:r>
-              <a:rPr lang="en-US" sz="1300" b="1" dirty="0">
-                <a:solidFill>
-                  <a:srgbClr val="FFFFFF"/>
-                </a:solidFill>
-                <a:latin typeface="Calibri" pitchFamily="34" charset="0"/>
-                <a:ea typeface="Calibri" pitchFamily="34" charset="-122"/>
-                <a:cs typeface="Calibri" pitchFamily="34" charset="-120"/>
-              </a:rPr>
-              <a:t>!</a:t>
-            </a:r>
-            <a:endParaRPr lang="en-US" sz="1300" dirty="0"/>
-          </a:p>
-        </p:txBody>
-      </p:sp>
-      <p:sp>
-        <p:nvSpPr>
-          <p:cNvPr id="42" name="Text 40"/>
-          <p:cNvSpPr/>
-          <p:nvPr/>
-        </p:nvSpPr>
-        <p:spPr>
-          <a:xfrm>
-            <a:off x="1243584" y="5760720"/>
-            <a:ext cx="10058400" cy="438912"/>
+          <p:cNvPr id="39" name="Text 37"/>
+          <p:cNvSpPr/>
+          <p:nvPr/>
+        </p:nvSpPr>
+        <p:spPr>
+          <a:xfrm>
+            <a:off x="7626096" y="5266944"/>
+            <a:ext cx="219456" cy="256032"/>
+          </a:xfrm>
+          <a:prstGeom prst="rect">
+            <a:avLst/>
+          </a:prstGeom>
+          <a:noFill/>
+          <a:ln/>
+        </p:spPr>
+        <p:txBody>
+          <a:bodyPr wrap="square" lIns="0" tIns="0" rIns="0" bIns="0" rtlCol="0" anchor="t"/>
+          <a:lstStyle/>
+          <a:p>
+            <a:pPr indent="0" marL="0">
+              <a:buNone/>
+            </a:pPr>
+            <a:r>
+              <a:rPr lang="en-US" sz="1150" b="1" dirty="0">
+                <a:solidFill>
+                  <a:srgbClr val="3FB950"/>
+                </a:solidFill>
+                <a:latin typeface="Calibri" pitchFamily="34" charset="0"/>
+                <a:ea typeface="Calibri" pitchFamily="34" charset="-122"/>
+                <a:cs typeface="Calibri" pitchFamily="34" charset="-120"/>
+              </a:rPr>
+              <a:t>✓</a:t>
+            </a:r>
+            <a:endParaRPr lang="en-US" sz="1150" dirty="0"/>
+          </a:p>
+        </p:txBody>
+      </p:sp>
+      <p:sp>
+        <p:nvSpPr>
+          <p:cNvPr id="40" name="Text 38"/>
+          <p:cNvSpPr/>
+          <p:nvPr/>
+        </p:nvSpPr>
+        <p:spPr>
+          <a:xfrm>
+            <a:off x="7918704" y="5266944"/>
+            <a:ext cx="3383280" cy="630936"/>
           </a:xfrm>
           <a:prstGeom prst="rect">
             <a:avLst/>
@@ -8796,12 +8248,12 @@
           <a:p>
             <a:pPr indent="0" marL="0">
               <a:lnSpc>
-                <a:spcPts val="1200"/>
+                <a:spcPts val="1500"/>
               </a:lnSpc>
               <a:buNone/>
             </a:pPr>
             <a:r>
-              <a:rPr lang="en-US" sz="1000" dirty="0">
+              <a:rPr lang="en-US" sz="1150" dirty="0">
                 <a:solidFill>
                   <a:srgbClr val="B4B7BD"/>
                 </a:solidFill>
@@ -8809,9 +8261,9 @@
                 <a:ea typeface="Calibri" pitchFamily="34" charset="-122"/>
                 <a:cs typeface="Calibri" pitchFamily="34" charset="-120"/>
               </a:rPr>
-              <a:t>SKIPPED means nothing is due right now and sends no email, by design. STILL RUNNING means the script was dispatched and Action Center is finishing on its own. Neither is a failure.</a:t>
-            </a:r>
-            <a:endParaRPr lang="en-US" sz="1000" dirty="0"/>
+              <a:t>A SKIPPED entry means nothing was due; a STILL RUNNING entry means Action Center is finishing on its own. Both are normal and send no email.</a:t>
+            </a:r>
+            <a:endParaRPr lang="en-US" sz="1150" dirty="0"/>
           </a:p>
         </p:txBody>
       </p:sp>
@@ -10053,141 +9505,6 @@
           </a:p>
         </p:txBody>
       </p:sp>
-      <p:sp>
-        <p:nvSpPr>
-          <p:cNvPr id="33" name="Shape 31"/>
-          <p:cNvSpPr/>
-          <p:nvPr/>
-        </p:nvSpPr>
-        <p:spPr>
-          <a:xfrm>
-            <a:off x="548640" y="4910328"/>
-            <a:ext cx="11064240" cy="658368"/>
-          </a:xfrm>
-          <a:prstGeom prst="roundRect">
-            <a:avLst>
-              <a:gd name="adj" fmla="val 6944"/>
-            </a:avLst>
-          </a:prstGeom>
-          <a:solidFill>
-            <a:srgbClr val="1C2026"/>
-          </a:solidFill>
-          <a:ln w="12700">
-            <a:solidFill>
-              <a:srgbClr val="1C2026"/>
-            </a:solidFill>
-            <a:prstDash val="solid"/>
-          </a:ln>
-        </p:spPr>
-      </p:sp>
-      <p:sp>
-        <p:nvSpPr>
-          <p:cNvPr id="34" name="Shape 32"/>
-          <p:cNvSpPr/>
-          <p:nvPr/>
-        </p:nvSpPr>
-        <p:spPr>
-          <a:xfrm>
-            <a:off x="786384" y="5093208"/>
-            <a:ext cx="292608" cy="292608"/>
-          </a:xfrm>
-          <a:prstGeom prst="roundRect">
-            <a:avLst>
-              <a:gd name="adj" fmla="val 28125"/>
-            </a:avLst>
-          </a:prstGeom>
-          <a:solidFill>
-            <a:srgbClr val="F5A524"/>
-          </a:solidFill>
-          <a:ln w="12700">
-            <a:solidFill>
-              <a:srgbClr val="F5A524"/>
-            </a:solidFill>
-            <a:prstDash val="solid"/>
-          </a:ln>
-        </p:spPr>
-      </p:sp>
-      <p:sp>
-        <p:nvSpPr>
-          <p:cNvPr id="35" name="Text 33"/>
-          <p:cNvSpPr/>
-          <p:nvPr/>
-        </p:nvSpPr>
-        <p:spPr>
-          <a:xfrm>
-            <a:off x="786384" y="5093208"/>
-            <a:ext cx="292608" cy="292608"/>
-          </a:xfrm>
-          <a:prstGeom prst="rect">
-            <a:avLst/>
-          </a:prstGeom>
-          <a:noFill/>
-          <a:ln/>
-        </p:spPr>
-        <p:txBody>
-          <a:bodyPr wrap="square" lIns="0" tIns="0" rIns="0" bIns="0" rtlCol="0" anchor="ctr"/>
-          <a:lstStyle/>
-          <a:p>
-            <a:pPr algn="ctr" indent="0" marL="0">
-              <a:buNone/>
-            </a:pPr>
-            <a:r>
-              <a:rPr lang="en-US" sz="1300" b="1" dirty="0">
-                <a:solidFill>
-                  <a:srgbClr val="FFFFFF"/>
-                </a:solidFill>
-                <a:latin typeface="Calibri" pitchFamily="34" charset="0"/>
-                <a:ea typeface="Calibri" pitchFamily="34" charset="-122"/>
-                <a:cs typeface="Calibri" pitchFamily="34" charset="-120"/>
-              </a:rPr>
-              <a:t>!</a:t>
-            </a:r>
-            <a:endParaRPr lang="en-US" sz="1300" dirty="0"/>
-          </a:p>
-        </p:txBody>
-      </p:sp>
-      <p:sp>
-        <p:nvSpPr>
-          <p:cNvPr id="36" name="Text 34"/>
-          <p:cNvSpPr/>
-          <p:nvPr/>
-        </p:nvSpPr>
-        <p:spPr>
-          <a:xfrm>
-            <a:off x="1243584" y="5020056"/>
-            <a:ext cx="10058400" cy="438912"/>
-          </a:xfrm>
-          <a:prstGeom prst="rect">
-            <a:avLst/>
-          </a:prstGeom>
-          <a:noFill/>
-          <a:ln/>
-        </p:spPr>
-        <p:txBody>
-          <a:bodyPr wrap="square" lIns="0" tIns="0" rIns="0" bIns="0" rtlCol="0" anchor="t"/>
-          <a:lstStyle/>
-          <a:p>
-            <a:pPr indent="0" marL="0">
-              <a:lnSpc>
-                <a:spcPts val="1200"/>
-              </a:lnSpc>
-              <a:buNone/>
-            </a:pPr>
-            <a:r>
-              <a:rPr lang="en-US" sz="1000" dirty="0">
-                <a:solidFill>
-                  <a:srgbClr val="B4B7BD"/>
-                </a:solidFill>
-                <a:latin typeface="Calibri" pitchFamily="34" charset="0"/>
-                <a:ea typeface="Calibri" pitchFamily="34" charset="-122"/>
-                <a:cs typeface="Calibri" pitchFamily="34" charset="-120"/>
-              </a:rPr>
-              <a:t>This is what the extension adds over the Marketplace pack alone. If fields are empty, triage has not run on that alert yet — it is triage that writes them.</a:t>
-            </a:r>
-            <a:endParaRPr lang="en-US" sz="1000" dirty="0"/>
-          </a:p>
-        </p:txBody>
-      </p:sp>
     </p:spTree>
   </p:cSld>
   <p:clrMapOvr>
@@ -10222,1307 +9539,6 @@
       </p:grpSpPr>
       <p:sp>
         <p:nvSpPr>
-          <p:cNvPr id="2" name="Text 0"/>
-          <p:cNvSpPr/>
-          <p:nvPr/>
-        </p:nvSpPr>
-        <p:spPr>
-          <a:xfrm>
-            <a:off x="548640" y="384048"/>
-            <a:ext cx="11064240" cy="237744"/>
-          </a:xfrm>
-          <a:prstGeom prst="rect">
-            <a:avLst/>
-          </a:prstGeom>
-          <a:noFill/>
-          <a:ln/>
-        </p:spPr>
-        <p:txBody>
-          <a:bodyPr wrap="square" lIns="0" tIns="0" rIns="0" bIns="0" rtlCol="0" anchor="t"/>
-          <a:lstStyle/>
-          <a:p>
-            <a:pPr indent="0" marL="0">
-              <a:buNone/>
-            </a:pPr>
-            <a:r>
-              <a:rPr lang="en-US" sz="1100" b="1" spc="200" kern="0" dirty="0">
-                <a:solidFill>
-                  <a:srgbClr val="E8551F"/>
-                </a:solidFill>
-                <a:latin typeface="Calibri" pitchFamily="34" charset="0"/>
-                <a:ea typeface="Calibri" pitchFamily="34" charset="-122"/>
-                <a:cs typeface="Calibri" pitchFamily="34" charset="-120"/>
-              </a:rPr>
-              <a:t>IF SOMETHING FAILS</a:t>
-            </a:r>
-            <a:endParaRPr lang="en-US" sz="1100" dirty="0"/>
-          </a:p>
-        </p:txBody>
-      </p:sp>
-      <p:sp>
-        <p:nvSpPr>
-          <p:cNvPr id="3" name="Text 1"/>
-          <p:cNvSpPr/>
-          <p:nvPr/>
-        </p:nvSpPr>
-        <p:spPr>
-          <a:xfrm>
-            <a:off x="548640" y="640080"/>
-            <a:ext cx="11064240" cy="640080"/>
-          </a:xfrm>
-          <a:prstGeom prst="rect">
-            <a:avLst/>
-          </a:prstGeom>
-          <a:noFill/>
-          <a:ln/>
-        </p:spPr>
-        <p:txBody>
-          <a:bodyPr wrap="square" lIns="0" tIns="0" rIns="0" bIns="0" rtlCol="0" anchor="t"/>
-          <a:lstStyle/>
-          <a:p>
-            <a:pPr indent="0" marL="0">
-              <a:buNone/>
-            </a:pPr>
-            <a:r>
-              <a:rPr lang="en-US" sz="3100" b="1" dirty="0">
-                <a:solidFill>
-                  <a:srgbClr val="FFFFFF"/>
-                </a:solidFill>
-                <a:latin typeface="Calibri" pitchFamily="34" charset="0"/>
-                <a:ea typeface="Calibri" pitchFamily="34" charset="-122"/>
-                <a:cs typeface="Calibri" pitchFamily="34" charset="-120"/>
-              </a:rPr>
-              <a:t>Check the prerequisite before the product</a:t>
-            </a:r>
-            <a:endParaRPr lang="en-US" sz="3100" dirty="0"/>
-          </a:p>
-        </p:txBody>
-      </p:sp>
-      <p:sp>
-        <p:nvSpPr>
-          <p:cNvPr id="4" name="Shape 2"/>
-          <p:cNvSpPr/>
-          <p:nvPr/>
-        </p:nvSpPr>
-        <p:spPr>
-          <a:xfrm>
-            <a:off x="548640" y="1371600"/>
-            <a:ext cx="11064240" cy="457200"/>
-          </a:xfrm>
-          <a:prstGeom prst="roundRect">
-            <a:avLst>
-              <a:gd name="adj" fmla="val 10000"/>
-            </a:avLst>
-          </a:prstGeom>
-          <a:solidFill>
-            <a:srgbClr val="15171B"/>
-          </a:solidFill>
-          <a:ln w="12700">
-            <a:solidFill>
-              <a:srgbClr val="15171B"/>
-            </a:solidFill>
-            <a:prstDash val="solid"/>
-          </a:ln>
-        </p:spPr>
-      </p:sp>
-      <p:sp>
-        <p:nvSpPr>
-          <p:cNvPr id="5" name="Text 3"/>
-          <p:cNvSpPr/>
-          <p:nvPr/>
-        </p:nvSpPr>
-        <p:spPr>
-          <a:xfrm>
-            <a:off x="822960" y="1499616"/>
-            <a:ext cx="3017520" cy="237744"/>
-          </a:xfrm>
-          <a:prstGeom prst="rect">
-            <a:avLst/>
-          </a:prstGeom>
-          <a:noFill/>
-          <a:ln/>
-        </p:spPr>
-        <p:txBody>
-          <a:bodyPr wrap="square" lIns="0" tIns="0" rIns="0" bIns="0" rtlCol="0" anchor="t"/>
-          <a:lstStyle/>
-          <a:p>
-            <a:pPr indent="0" marL="0">
-              <a:buNone/>
-            </a:pPr>
-            <a:r>
-              <a:rPr lang="en-US" sz="1100" b="1" dirty="0">
-                <a:solidFill>
-                  <a:srgbClr val="FFFFFF"/>
-                </a:solidFill>
-                <a:latin typeface="Calibri" pitchFamily="34" charset="0"/>
-                <a:ea typeface="Calibri" pitchFamily="34" charset="-122"/>
-                <a:cs typeface="Calibri" pitchFamily="34" charset="-120"/>
-              </a:rPr>
-              <a:t>Integration not offered</a:t>
-            </a:r>
-            <a:endParaRPr lang="en-US" sz="1100" dirty="0"/>
-          </a:p>
-        </p:txBody>
-      </p:sp>
-      <p:sp>
-        <p:nvSpPr>
-          <p:cNvPr id="6" name="Text 4"/>
-          <p:cNvSpPr/>
-          <p:nvPr/>
-        </p:nvSpPr>
-        <p:spPr>
-          <a:xfrm>
-            <a:off x="4023360" y="1508760"/>
-            <a:ext cx="3108960" cy="237744"/>
-          </a:xfrm>
-          <a:prstGeom prst="rect">
-            <a:avLst/>
-          </a:prstGeom>
-          <a:noFill/>
-          <a:ln/>
-        </p:spPr>
-        <p:txBody>
-          <a:bodyPr wrap="square" lIns="0" tIns="0" rIns="0" bIns="0" rtlCol="0" anchor="t"/>
-          <a:lstStyle/>
-          <a:p>
-            <a:pPr indent="0" marL="0">
-              <a:buNone/>
-            </a:pPr>
-            <a:r>
-              <a:rPr lang="en-US" sz="1000" dirty="0">
-                <a:solidFill>
-                  <a:srgbClr val="F5A524"/>
-                </a:solidFill>
-                <a:latin typeface="Calibri" pitchFamily="34" charset="0"/>
-                <a:ea typeface="Calibri" pitchFamily="34" charset="-122"/>
-                <a:cs typeface="Calibri" pitchFamily="34" charset="-120"/>
-              </a:rPr>
-              <a:t>Marketplace KOI pack not installed</a:t>
-            </a:r>
-            <a:endParaRPr lang="en-US" sz="1000" dirty="0"/>
-          </a:p>
-        </p:txBody>
-      </p:sp>
-      <p:sp>
-        <p:nvSpPr>
-          <p:cNvPr id="7" name="Text 5"/>
-          <p:cNvSpPr/>
-          <p:nvPr/>
-        </p:nvSpPr>
-        <p:spPr>
-          <a:xfrm>
-            <a:off x="7315200" y="1508760"/>
-            <a:ext cx="4023360" cy="237744"/>
-          </a:xfrm>
-          <a:prstGeom prst="rect">
-            <a:avLst/>
-          </a:prstGeom>
-          <a:noFill/>
-          <a:ln/>
-        </p:spPr>
-        <p:txBody>
-          <a:bodyPr wrap="square" lIns="0" tIns="0" rIns="0" bIns="0" rtlCol="0" anchor="t"/>
-          <a:lstStyle/>
-          <a:p>
-            <a:pPr indent="0" marL="0">
-              <a:buNone/>
-            </a:pPr>
-            <a:r>
-              <a:rPr lang="en-US" sz="1000" dirty="0">
-                <a:solidFill>
-                  <a:srgbClr val="B4B7BD"/>
-                </a:solidFill>
-                <a:latin typeface="Calibri" pitchFamily="34" charset="0"/>
-                <a:ea typeface="Calibri" pitchFamily="34" charset="-122"/>
-                <a:cs typeface="Calibri" pitchFamily="34" charset="-120"/>
-              </a:rPr>
-              <a:t>Install it first — this extension ships no integration</a:t>
-            </a:r>
-            <a:endParaRPr lang="en-US" sz="1000" dirty="0"/>
-          </a:p>
-        </p:txBody>
-      </p:sp>
-      <p:sp>
-        <p:nvSpPr>
-          <p:cNvPr id="8" name="Shape 6"/>
-          <p:cNvSpPr/>
-          <p:nvPr/>
-        </p:nvSpPr>
-        <p:spPr>
-          <a:xfrm>
-            <a:off x="548640" y="1929384"/>
-            <a:ext cx="11064240" cy="457200"/>
-          </a:xfrm>
-          <a:prstGeom prst="roundRect">
-            <a:avLst>
-              <a:gd name="adj" fmla="val 10000"/>
-            </a:avLst>
-          </a:prstGeom>
-          <a:solidFill>
-            <a:srgbClr val="15171B"/>
-          </a:solidFill>
-          <a:ln w="12700">
-            <a:solidFill>
-              <a:srgbClr val="15171B"/>
-            </a:solidFill>
-            <a:prstDash val="solid"/>
-          </a:ln>
-        </p:spPr>
-      </p:sp>
-      <p:sp>
-        <p:nvSpPr>
-          <p:cNvPr id="9" name="Text 7"/>
-          <p:cNvSpPr/>
-          <p:nvPr/>
-        </p:nvSpPr>
-        <p:spPr>
-          <a:xfrm>
-            <a:off x="822960" y="2057400"/>
-            <a:ext cx="3017520" cy="237744"/>
-          </a:xfrm>
-          <a:prstGeom prst="rect">
-            <a:avLst/>
-          </a:prstGeom>
-          <a:noFill/>
-          <a:ln/>
-        </p:spPr>
-        <p:txBody>
-          <a:bodyPr wrap="square" lIns="0" tIns="0" rIns="0" bIns="0" rtlCol="0" anchor="t"/>
-          <a:lstStyle/>
-          <a:p>
-            <a:pPr indent="0" marL="0">
-              <a:buNone/>
-            </a:pPr>
-            <a:r>
-              <a:rPr lang="en-US" sz="1100" b="1" dirty="0">
-                <a:solidFill>
-                  <a:srgbClr val="FFFFFF"/>
-                </a:solidFill>
-                <a:latin typeface="Calibri" pitchFamily="34" charset="0"/>
-                <a:ea typeface="Calibri" pitchFamily="34" charset="-122"/>
-                <a:cs typeface="Calibri" pitchFamily="34" charset="-120"/>
-              </a:rPr>
-              <a:t>403 on KOI commands</a:t>
-            </a:r>
-            <a:endParaRPr lang="en-US" sz="1100" dirty="0"/>
-          </a:p>
-        </p:txBody>
-      </p:sp>
-      <p:sp>
-        <p:nvSpPr>
-          <p:cNvPr id="10" name="Text 8"/>
-          <p:cNvSpPr/>
-          <p:nvPr/>
-        </p:nvSpPr>
-        <p:spPr>
-          <a:xfrm>
-            <a:off x="4023360" y="2066544"/>
-            <a:ext cx="3108960" cy="237744"/>
-          </a:xfrm>
-          <a:prstGeom prst="rect">
-            <a:avLst/>
-          </a:prstGeom>
-          <a:noFill/>
-          <a:ln/>
-        </p:spPr>
-        <p:txBody>
-          <a:bodyPr wrap="square" lIns="0" tIns="0" rIns="0" bIns="0" rtlCol="0" anchor="t"/>
-          <a:lstStyle/>
-          <a:p>
-            <a:pPr indent="0" marL="0">
-              <a:buNone/>
-            </a:pPr>
-            <a:r>
-              <a:rPr lang="en-US" sz="1000" dirty="0">
-                <a:solidFill>
-                  <a:srgbClr val="F5A524"/>
-                </a:solidFill>
-                <a:latin typeface="Calibri" pitchFamily="34" charset="0"/>
-                <a:ea typeface="Calibri" pitchFamily="34" charset="-122"/>
-                <a:cs typeface="Calibri" pitchFamily="34" charset="-120"/>
-              </a:rPr>
-              <a:t>Source IP not accepted by KOI</a:t>
-            </a:r>
-            <a:endParaRPr lang="en-US" sz="1000" dirty="0"/>
-          </a:p>
-        </p:txBody>
-      </p:sp>
-      <p:sp>
-        <p:nvSpPr>
-          <p:cNvPr id="11" name="Text 9"/>
-          <p:cNvSpPr/>
-          <p:nvPr/>
-        </p:nvSpPr>
-        <p:spPr>
-          <a:xfrm>
-            <a:off x="7315200" y="2066544"/>
-            <a:ext cx="4023360" cy="237744"/>
-          </a:xfrm>
-          <a:prstGeom prst="rect">
-            <a:avLst/>
-          </a:prstGeom>
-          <a:noFill/>
-          <a:ln/>
-        </p:spPr>
-        <p:txBody>
-          <a:bodyPr wrap="square" lIns="0" tIns="0" rIns="0" bIns="0" rtlCol="0" anchor="t"/>
-          <a:lstStyle/>
-          <a:p>
-            <a:pPr indent="0" marL="0">
-              <a:buNone/>
-            </a:pPr>
-            <a:r>
-              <a:rPr lang="en-US" sz="1000" dirty="0">
-                <a:solidFill>
-                  <a:srgbClr val="B4B7BD"/>
-                </a:solidFill>
-                <a:latin typeface="Calibri" pitchFamily="34" charset="0"/>
-                <a:ea typeface="Calibri" pitchFamily="34" charset="-122"/>
-                <a:cs typeface="Calibri" pitchFamily="34" charset="-120"/>
-              </a:rPr>
-              <a:t>Run the instance on a Cortex engine KOI accepts</a:t>
-            </a:r>
-            <a:endParaRPr lang="en-US" sz="1000" dirty="0"/>
-          </a:p>
-        </p:txBody>
-      </p:sp>
-      <p:sp>
-        <p:nvSpPr>
-          <p:cNvPr id="12" name="Shape 10"/>
-          <p:cNvSpPr/>
-          <p:nvPr/>
-        </p:nvSpPr>
-        <p:spPr>
-          <a:xfrm>
-            <a:off x="548640" y="2487168"/>
-            <a:ext cx="11064240" cy="457200"/>
-          </a:xfrm>
-          <a:prstGeom prst="roundRect">
-            <a:avLst>
-              <a:gd name="adj" fmla="val 10000"/>
-            </a:avLst>
-          </a:prstGeom>
-          <a:solidFill>
-            <a:srgbClr val="15171B"/>
-          </a:solidFill>
-          <a:ln w="12700">
-            <a:solidFill>
-              <a:srgbClr val="15171B"/>
-            </a:solidFill>
-            <a:prstDash val="solid"/>
-          </a:ln>
-        </p:spPr>
-      </p:sp>
-      <p:sp>
-        <p:nvSpPr>
-          <p:cNvPr id="13" name="Text 11"/>
-          <p:cNvSpPr/>
-          <p:nvPr/>
-        </p:nvSpPr>
-        <p:spPr>
-          <a:xfrm>
-            <a:off x="822960" y="2615184"/>
-            <a:ext cx="3017520" cy="237744"/>
-          </a:xfrm>
-          <a:prstGeom prst="rect">
-            <a:avLst/>
-          </a:prstGeom>
-          <a:noFill/>
-          <a:ln/>
-        </p:spPr>
-        <p:txBody>
-          <a:bodyPr wrap="square" lIns="0" tIns="0" rIns="0" bIns="0" rtlCol="0" anchor="t"/>
-          <a:lstStyle/>
-          <a:p>
-            <a:pPr indent="0" marL="0">
-              <a:buNone/>
-            </a:pPr>
-            <a:r>
-              <a:rPr lang="en-US" sz="1100" b="1" dirty="0">
-                <a:solidFill>
-                  <a:srgbClr val="FFFFFF"/>
-                </a:solidFill>
-                <a:latin typeface="Calibri" pitchFamily="34" charset="0"/>
-                <a:ea typeface="Calibri" pitchFamily="34" charset="-122"/>
-                <a:cs typeface="Calibri" pitchFamily="34" charset="-120"/>
-              </a:rPr>
-              <a:t>Promoted fields missing</a:t>
-            </a:r>
-            <a:endParaRPr lang="en-US" sz="1100" dirty="0"/>
-          </a:p>
-        </p:txBody>
-      </p:sp>
-      <p:sp>
-        <p:nvSpPr>
-          <p:cNvPr id="14" name="Text 12"/>
-          <p:cNvSpPr/>
-          <p:nvPr/>
-        </p:nvSpPr>
-        <p:spPr>
-          <a:xfrm>
-            <a:off x="4023360" y="2624328"/>
-            <a:ext cx="3108960" cy="237744"/>
-          </a:xfrm>
-          <a:prstGeom prst="rect">
-            <a:avLst/>
-          </a:prstGeom>
-          <a:noFill/>
-          <a:ln/>
-        </p:spPr>
-        <p:txBody>
-          <a:bodyPr wrap="square" lIns="0" tIns="0" rIns="0" bIns="0" rtlCol="0" anchor="t"/>
-          <a:lstStyle/>
-          <a:p>
-            <a:pPr indent="0" marL="0">
-              <a:buNone/>
-            </a:pPr>
-            <a:r>
-              <a:rPr lang="en-US" sz="1000" dirty="0">
-                <a:solidFill>
-                  <a:srgbClr val="F5A524"/>
-                </a:solidFill>
-                <a:latin typeface="Calibri" pitchFamily="34" charset="0"/>
-                <a:ea typeface="Calibri" pitchFamily="34" charset="-122"/>
-                <a:cs typeface="Calibri" pitchFamily="34" charset="-120"/>
-              </a:rPr>
-              <a:t>This extension not installed or not active</a:t>
-            </a:r>
-            <a:endParaRPr lang="en-US" sz="1000" dirty="0"/>
-          </a:p>
-        </p:txBody>
-      </p:sp>
-      <p:sp>
-        <p:nvSpPr>
-          <p:cNvPr id="15" name="Text 13"/>
-          <p:cNvSpPr/>
-          <p:nvPr/>
-        </p:nvSpPr>
-        <p:spPr>
-          <a:xfrm>
-            <a:off x="7315200" y="2624328"/>
-            <a:ext cx="4023360" cy="237744"/>
-          </a:xfrm>
-          <a:prstGeom prst="rect">
-            <a:avLst/>
-          </a:prstGeom>
-          <a:noFill/>
-          <a:ln/>
-        </p:spPr>
-        <p:txBody>
-          <a:bodyPr wrap="square" lIns="0" tIns="0" rIns="0" bIns="0" rtlCol="0" anchor="t"/>
-          <a:lstStyle/>
-          <a:p>
-            <a:pPr indent="0" marL="0">
-              <a:buNone/>
-            </a:pPr>
-            <a:r>
-              <a:rPr lang="en-US" sz="1000" dirty="0">
-                <a:solidFill>
-                  <a:srgbClr val="B4B7BD"/>
-                </a:solidFill>
-                <a:latin typeface="Calibri" pitchFamily="34" charset="0"/>
-                <a:ea typeface="Calibri" pitchFamily="34" charset="-122"/>
-                <a:cs typeface="Calibri" pitchFamily="34" charset="-120"/>
-              </a:rPr>
-              <a:t>Re-check the pack installed and events arrived after it</a:t>
-            </a:r>
-            <a:endParaRPr lang="en-US" sz="1000" dirty="0"/>
-          </a:p>
-        </p:txBody>
-      </p:sp>
-      <p:sp>
-        <p:nvSpPr>
-          <p:cNvPr id="16" name="Shape 14"/>
-          <p:cNvSpPr/>
-          <p:nvPr/>
-        </p:nvSpPr>
-        <p:spPr>
-          <a:xfrm>
-            <a:off x="548640" y="3044952"/>
-            <a:ext cx="11064240" cy="457200"/>
-          </a:xfrm>
-          <a:prstGeom prst="roundRect">
-            <a:avLst>
-              <a:gd name="adj" fmla="val 10000"/>
-            </a:avLst>
-          </a:prstGeom>
-          <a:solidFill>
-            <a:srgbClr val="15171B"/>
-          </a:solidFill>
-          <a:ln w="12700">
-            <a:solidFill>
-              <a:srgbClr val="15171B"/>
-            </a:solidFill>
-            <a:prstDash val="solid"/>
-          </a:ln>
-        </p:spPr>
-      </p:sp>
-      <p:sp>
-        <p:nvSpPr>
-          <p:cNvPr id="17" name="Text 15"/>
-          <p:cNvSpPr/>
-          <p:nvPr/>
-        </p:nvSpPr>
-        <p:spPr>
-          <a:xfrm>
-            <a:off x="822960" y="3172968"/>
-            <a:ext cx="3017520" cy="237744"/>
-          </a:xfrm>
-          <a:prstGeom prst="rect">
-            <a:avLst/>
-          </a:prstGeom>
-          <a:noFill/>
-          <a:ln/>
-        </p:spPr>
-        <p:txBody>
-          <a:bodyPr wrap="square" lIns="0" tIns="0" rIns="0" bIns="0" rtlCol="0" anchor="t"/>
-          <a:lstStyle/>
-          <a:p>
-            <a:pPr indent="0" marL="0">
-              <a:buNone/>
-            </a:pPr>
-            <a:r>
-              <a:rPr lang="en-US" sz="1100" b="1" dirty="0">
-                <a:solidFill>
-                  <a:srgbClr val="FFFFFF"/>
-                </a:solidFill>
-                <a:latin typeface="Calibri" pitchFamily="34" charset="0"/>
-                <a:ea typeface="Calibri" pitchFamily="34" charset="-122"/>
-                <a:cs typeface="Calibri" pitchFamily="34" charset="-120"/>
-              </a:rPr>
-              <a:t>Everything triages Suspicious</a:t>
-            </a:r>
-            <a:endParaRPr lang="en-US" sz="1100" dirty="0"/>
-          </a:p>
-        </p:txBody>
-      </p:sp>
-      <p:sp>
-        <p:nvSpPr>
-          <p:cNvPr id="18" name="Text 16"/>
-          <p:cNvSpPr/>
-          <p:nvPr/>
-        </p:nvSpPr>
-        <p:spPr>
-          <a:xfrm>
-            <a:off x="4023360" y="3182112"/>
-            <a:ext cx="3108960" cy="237744"/>
-          </a:xfrm>
-          <a:prstGeom prst="rect">
-            <a:avLst/>
-          </a:prstGeom>
-          <a:noFill/>
-          <a:ln/>
-        </p:spPr>
-        <p:txBody>
-          <a:bodyPr wrap="square" lIns="0" tIns="0" rIns="0" bIns="0" rtlCol="0" anchor="t"/>
-          <a:lstStyle/>
-          <a:p>
-            <a:pPr indent="0" marL="0">
-              <a:buNone/>
-            </a:pPr>
-            <a:r>
-              <a:rPr lang="en-US" sz="1000" dirty="0">
-                <a:solidFill>
-                  <a:srgbClr val="F5A524"/>
-                </a:solidFill>
-                <a:latin typeface="Calibri" pitchFamily="34" charset="0"/>
-                <a:ea typeface="Calibri" pitchFamily="34" charset="-122"/>
-                <a:cs typeface="Calibri" pitchFamily="34" charset="-120"/>
-              </a:rPr>
-              <a:t>The alert carried no KOI detail</a:t>
-            </a:r>
-            <a:endParaRPr lang="en-US" sz="1000" dirty="0"/>
-          </a:p>
-        </p:txBody>
-      </p:sp>
-      <p:sp>
-        <p:nvSpPr>
-          <p:cNvPr id="19" name="Text 17"/>
-          <p:cNvSpPr/>
-          <p:nvPr/>
-        </p:nvSpPr>
-        <p:spPr>
-          <a:xfrm>
-            <a:off x="7315200" y="3182112"/>
-            <a:ext cx="4023360" cy="237744"/>
-          </a:xfrm>
-          <a:prstGeom prst="rect">
-            <a:avLst/>
-          </a:prstGeom>
-          <a:noFill/>
-          <a:ln/>
-        </p:spPr>
-        <p:txBody>
-          <a:bodyPr wrap="square" lIns="0" tIns="0" rIns="0" bIns="0" rtlCol="0" anchor="t"/>
-          <a:lstStyle/>
-          <a:p>
-            <a:pPr indent="0" marL="0">
-              <a:buNone/>
-            </a:pPr>
-            <a:r>
-              <a:rPr lang="en-US" sz="1000" dirty="0">
-                <a:solidFill>
-                  <a:srgbClr val="B4B7BD"/>
-                </a:solidFill>
-                <a:latin typeface="Calibri" pitchFamily="34" charset="0"/>
-                <a:ea typeface="Calibri" pitchFamily="34" charset="-122"/>
-                <a:cs typeface="Calibri" pitchFamily="34" charset="-120"/>
-              </a:rPr>
-              <a:t>Check the correlation rule passes KOI fields through</a:t>
-            </a:r>
-            <a:endParaRPr lang="en-US" sz="1000" dirty="0"/>
-          </a:p>
-        </p:txBody>
-      </p:sp>
-      <p:sp>
-        <p:nvSpPr>
-          <p:cNvPr id="20" name="Shape 18"/>
-          <p:cNvSpPr/>
-          <p:nvPr/>
-        </p:nvSpPr>
-        <p:spPr>
-          <a:xfrm>
-            <a:off x="548640" y="3602736"/>
-            <a:ext cx="11064240" cy="457200"/>
-          </a:xfrm>
-          <a:prstGeom prst="roundRect">
-            <a:avLst>
-              <a:gd name="adj" fmla="val 10000"/>
-            </a:avLst>
-          </a:prstGeom>
-          <a:solidFill>
-            <a:srgbClr val="15171B"/>
-          </a:solidFill>
-          <a:ln w="12700">
-            <a:solidFill>
-              <a:srgbClr val="15171B"/>
-            </a:solidFill>
-            <a:prstDash val="solid"/>
-          </a:ln>
-        </p:spPr>
-      </p:sp>
-      <p:sp>
-        <p:nvSpPr>
-          <p:cNvPr id="21" name="Text 19"/>
-          <p:cNvSpPr/>
-          <p:nvPr/>
-        </p:nvSpPr>
-        <p:spPr>
-          <a:xfrm>
-            <a:off x="822960" y="3730752"/>
-            <a:ext cx="3017520" cy="237744"/>
-          </a:xfrm>
-          <a:prstGeom prst="rect">
-            <a:avLst/>
-          </a:prstGeom>
-          <a:noFill/>
-          <a:ln/>
-        </p:spPr>
-        <p:txBody>
-          <a:bodyPr wrap="square" lIns="0" tIns="0" rIns="0" bIns="0" rtlCol="0" anchor="t"/>
-          <a:lstStyle/>
-          <a:p>
-            <a:pPr indent="0" marL="0">
-              <a:buNone/>
-            </a:pPr>
-            <a:r>
-              <a:rPr lang="en-US" sz="1100" b="1" dirty="0">
-                <a:solidFill>
-                  <a:srgbClr val="FFFFFF"/>
-                </a:solidFill>
-                <a:latin typeface="Calibri" pitchFamily="34" charset="0"/>
-                <a:ea typeface="Calibri" pitchFamily="34" charset="-122"/>
-                <a:cs typeface="Calibri" pitchFamily="34" charset="-120"/>
-              </a:rPr>
-              <a:t>Alert fields empty</a:t>
-            </a:r>
-            <a:endParaRPr lang="en-US" sz="1100" dirty="0"/>
-          </a:p>
-        </p:txBody>
-      </p:sp>
-      <p:sp>
-        <p:nvSpPr>
-          <p:cNvPr id="22" name="Text 20"/>
-          <p:cNvSpPr/>
-          <p:nvPr/>
-        </p:nvSpPr>
-        <p:spPr>
-          <a:xfrm>
-            <a:off x="4023360" y="3739896"/>
-            <a:ext cx="3108960" cy="237744"/>
-          </a:xfrm>
-          <a:prstGeom prst="rect">
-            <a:avLst/>
-          </a:prstGeom>
-          <a:noFill/>
-          <a:ln/>
-        </p:spPr>
-        <p:txBody>
-          <a:bodyPr wrap="square" lIns="0" tIns="0" rIns="0" bIns="0" rtlCol="0" anchor="t"/>
-          <a:lstStyle/>
-          <a:p>
-            <a:pPr indent="0" marL="0">
-              <a:buNone/>
-            </a:pPr>
-            <a:r>
-              <a:rPr lang="en-US" sz="1000" dirty="0">
-                <a:solidFill>
-                  <a:srgbClr val="F5A524"/>
-                </a:solidFill>
-                <a:latin typeface="Calibri" pitchFamily="34" charset="0"/>
-                <a:ea typeface="Calibri" pitchFamily="34" charset="-122"/>
-                <a:cs typeface="Calibri" pitchFamily="34" charset="-120"/>
-              </a:rPr>
-              <a:t>Triage has not run on that alert</a:t>
-            </a:r>
-            <a:endParaRPr lang="en-US" sz="1000" dirty="0"/>
-          </a:p>
-        </p:txBody>
-      </p:sp>
-      <p:sp>
-        <p:nvSpPr>
-          <p:cNvPr id="23" name="Text 21"/>
-          <p:cNvSpPr/>
-          <p:nvPr/>
-        </p:nvSpPr>
-        <p:spPr>
-          <a:xfrm>
-            <a:off x="7315200" y="3739896"/>
-            <a:ext cx="4023360" cy="237744"/>
-          </a:xfrm>
-          <a:prstGeom prst="rect">
-            <a:avLst/>
-          </a:prstGeom>
-          <a:noFill/>
-          <a:ln/>
-        </p:spPr>
-        <p:txBody>
-          <a:bodyPr wrap="square" lIns="0" tIns="0" rIns="0" bIns="0" rtlCol="0" anchor="t"/>
-          <a:lstStyle/>
-          <a:p>
-            <a:pPr indent="0" marL="0">
-              <a:buNone/>
-            </a:pPr>
-            <a:r>
-              <a:rPr lang="en-US" sz="1000" dirty="0">
-                <a:solidFill>
-                  <a:srgbClr val="B4B7BD"/>
-                </a:solidFill>
-                <a:latin typeface="Calibri" pitchFamily="34" charset="0"/>
-                <a:ea typeface="Calibri" pitchFamily="34" charset="-122"/>
-                <a:cs typeface="Calibri" pitchFamily="34" charset="-120"/>
-              </a:rPr>
-              <a:t>Triage writes them — run it first</a:t>
-            </a:r>
-            <a:endParaRPr lang="en-US" sz="1000" dirty="0"/>
-          </a:p>
-        </p:txBody>
-      </p:sp>
-      <p:sp>
-        <p:nvSpPr>
-          <p:cNvPr id="24" name="Shape 22"/>
-          <p:cNvSpPr/>
-          <p:nvPr/>
-        </p:nvSpPr>
-        <p:spPr>
-          <a:xfrm>
-            <a:off x="548640" y="4160520"/>
-            <a:ext cx="11064240" cy="457200"/>
-          </a:xfrm>
-          <a:prstGeom prst="roundRect">
-            <a:avLst>
-              <a:gd name="adj" fmla="val 10000"/>
-            </a:avLst>
-          </a:prstGeom>
-          <a:solidFill>
-            <a:srgbClr val="15171B"/>
-          </a:solidFill>
-          <a:ln w="12700">
-            <a:solidFill>
-              <a:srgbClr val="15171B"/>
-            </a:solidFill>
-            <a:prstDash val="solid"/>
-          </a:ln>
-        </p:spPr>
-      </p:sp>
-      <p:sp>
-        <p:nvSpPr>
-          <p:cNvPr id="25" name="Text 23"/>
-          <p:cNvSpPr/>
-          <p:nvPr/>
-        </p:nvSpPr>
-        <p:spPr>
-          <a:xfrm>
-            <a:off x="822960" y="4288536"/>
-            <a:ext cx="3017520" cy="237744"/>
-          </a:xfrm>
-          <a:prstGeom prst="rect">
-            <a:avLst/>
-          </a:prstGeom>
-          <a:noFill/>
-          <a:ln/>
-        </p:spPr>
-        <p:txBody>
-          <a:bodyPr wrap="square" lIns="0" tIns="0" rIns="0" bIns="0" rtlCol="0" anchor="t"/>
-          <a:lstStyle/>
-          <a:p>
-            <a:pPr indent="0" marL="0">
-              <a:buNone/>
-            </a:pPr>
-            <a:r>
-              <a:rPr lang="en-US" sz="1100" b="1" dirty="0">
-                <a:solidFill>
-                  <a:srgbClr val="FFFFFF"/>
-                </a:solidFill>
-                <a:latin typeface="Calibri" pitchFamily="34" charset="0"/>
-                <a:ea typeface="Calibri" pitchFamily="34" charset="-122"/>
-                <a:cs typeface="Calibri" pitchFamily="34" charset="-120"/>
-              </a:rPr>
-              <a:t>Hunt sweep skips immediately</a:t>
-            </a:r>
-            <a:endParaRPr lang="en-US" sz="1100" dirty="0"/>
-          </a:p>
-        </p:txBody>
-      </p:sp>
-      <p:sp>
-        <p:nvSpPr>
-          <p:cNvPr id="26" name="Text 24"/>
-          <p:cNvSpPr/>
-          <p:nvPr/>
-        </p:nvSpPr>
-        <p:spPr>
-          <a:xfrm>
-            <a:off x="4023360" y="4297680"/>
-            <a:ext cx="3108960" cy="237744"/>
-          </a:xfrm>
-          <a:prstGeom prst="rect">
-            <a:avLst/>
-          </a:prstGeom>
-          <a:noFill/>
-          <a:ln/>
-        </p:spPr>
-        <p:txBody>
-          <a:bodyPr wrap="square" lIns="0" tIns="0" rIns="0" bIns="0" rtlCol="0" anchor="t"/>
-          <a:lstStyle/>
-          <a:p>
-            <a:pPr indent="0" marL="0">
-              <a:buNone/>
-            </a:pPr>
-            <a:r>
-              <a:rPr lang="en-US" sz="1000" dirty="0">
-                <a:solidFill>
-                  <a:srgbClr val="F5A524"/>
-                </a:solidFill>
-                <a:latin typeface="Calibri" pitchFamily="34" charset="0"/>
-                <a:ea typeface="Calibri" pitchFamily="34" charset="-122"/>
-                <a:cs typeface="Calibri" pitchFamily="34" charset="-120"/>
-              </a:rPr>
-              <a:t>The XQL engine did not answer</a:t>
-            </a:r>
-            <a:endParaRPr lang="en-US" sz="1000" dirty="0"/>
-          </a:p>
-        </p:txBody>
-      </p:sp>
-      <p:sp>
-        <p:nvSpPr>
-          <p:cNvPr id="27" name="Text 25"/>
-          <p:cNvSpPr/>
-          <p:nvPr/>
-        </p:nvSpPr>
-        <p:spPr>
-          <a:xfrm>
-            <a:off x="7315200" y="4297680"/>
-            <a:ext cx="4023360" cy="237744"/>
-          </a:xfrm>
-          <a:prstGeom prst="rect">
-            <a:avLst/>
-          </a:prstGeom>
-          <a:noFill/>
-          <a:ln/>
-        </p:spPr>
-        <p:txBody>
-          <a:bodyPr wrap="square" lIns="0" tIns="0" rIns="0" bIns="0" rtlCol="0" anchor="t"/>
-          <a:lstStyle/>
-          <a:p>
-            <a:pPr indent="0" marL="0">
-              <a:buNone/>
-            </a:pPr>
-            <a:r>
-              <a:rPr lang="en-US" sz="1000" dirty="0">
-                <a:solidFill>
-                  <a:srgbClr val="B4B7BD"/>
-                </a:solidFill>
-                <a:latin typeface="Calibri" pitchFamily="34" charset="0"/>
-                <a:ea typeface="Calibri" pitchFamily="34" charset="-122"/>
-                <a:cs typeface="Calibri" pitchFamily="34" charset="-120"/>
-              </a:rPr>
-              <a:t>Re-run. XSIAM provisions the engine, so this should not persist</a:t>
-            </a:r>
-            <a:endParaRPr lang="en-US" sz="1000" dirty="0"/>
-          </a:p>
-        </p:txBody>
-      </p:sp>
-      <p:sp>
-        <p:nvSpPr>
-          <p:cNvPr id="28" name="Shape 26"/>
-          <p:cNvSpPr/>
-          <p:nvPr/>
-        </p:nvSpPr>
-        <p:spPr>
-          <a:xfrm>
-            <a:off x="548640" y="4718304"/>
-            <a:ext cx="11064240" cy="457200"/>
-          </a:xfrm>
-          <a:prstGeom prst="roundRect">
-            <a:avLst>
-              <a:gd name="adj" fmla="val 10000"/>
-            </a:avLst>
-          </a:prstGeom>
-          <a:solidFill>
-            <a:srgbClr val="15171B"/>
-          </a:solidFill>
-          <a:ln w="12700">
-            <a:solidFill>
-              <a:srgbClr val="15171B"/>
-            </a:solidFill>
-            <a:prstDash val="solid"/>
-          </a:ln>
-        </p:spPr>
-      </p:sp>
-      <p:sp>
-        <p:nvSpPr>
-          <p:cNvPr id="29" name="Text 27"/>
-          <p:cNvSpPr/>
-          <p:nvPr/>
-        </p:nvSpPr>
-        <p:spPr>
-          <a:xfrm>
-            <a:off x="822960" y="4846320"/>
-            <a:ext cx="3017520" cy="237744"/>
-          </a:xfrm>
-          <a:prstGeom prst="rect">
-            <a:avLst/>
-          </a:prstGeom>
-          <a:noFill/>
-          <a:ln/>
-        </p:spPr>
-        <p:txBody>
-          <a:bodyPr wrap="square" lIns="0" tIns="0" rIns="0" bIns="0" rtlCol="0" anchor="t"/>
-          <a:lstStyle/>
-          <a:p>
-            <a:pPr indent="0" marL="0">
-              <a:buNone/>
-            </a:pPr>
-            <a:r>
-              <a:rPr lang="en-US" sz="1100" b="1" dirty="0">
-                <a:solidFill>
-                  <a:srgbClr val="FFFFFF"/>
-                </a:solidFill>
-                <a:latin typeface="Calibri" pitchFamily="34" charset="0"/>
-                <a:ea typeface="Calibri" pitchFamily="34" charset="-122"/>
-                <a:cs typeface="Calibri" pitchFamily="34" charset="-120"/>
-              </a:rPr>
-              <a:t>Tracker List stays empty</a:t>
-            </a:r>
-            <a:endParaRPr lang="en-US" sz="1100" dirty="0"/>
-          </a:p>
-        </p:txBody>
-      </p:sp>
-      <p:sp>
-        <p:nvSpPr>
-          <p:cNvPr id="30" name="Text 28"/>
-          <p:cNvSpPr/>
-          <p:nvPr/>
-        </p:nvSpPr>
-        <p:spPr>
-          <a:xfrm>
-            <a:off x="4023360" y="4855464"/>
-            <a:ext cx="3108960" cy="237744"/>
-          </a:xfrm>
-          <a:prstGeom prst="rect">
-            <a:avLst/>
-          </a:prstGeom>
-          <a:noFill/>
-          <a:ln/>
-        </p:spPr>
-        <p:txBody>
-          <a:bodyPr wrap="square" lIns="0" tIns="0" rIns="0" bIns="0" rtlCol="0" anchor="t"/>
-          <a:lstStyle/>
-          <a:p>
-            <a:pPr indent="0" marL="0">
-              <a:buNone/>
-            </a:pPr>
-            <a:r>
-              <a:rPr lang="en-US" sz="1000" dirty="0">
-                <a:solidFill>
-                  <a:srgbClr val="F5A524"/>
-                </a:solidFill>
-                <a:latin typeface="Calibri" pitchFamily="34" charset="0"/>
-                <a:ea typeface="Calibri" pitchFamily="34" charset="-122"/>
-                <a:cs typeface="Calibri" pitchFamily="34" charset="-120"/>
-              </a:rPr>
-              <a:t>No Core REST API instance</a:t>
-            </a:r>
-            <a:endParaRPr lang="en-US" sz="1000" dirty="0"/>
-          </a:p>
-        </p:txBody>
-      </p:sp>
-      <p:sp>
-        <p:nvSpPr>
-          <p:cNvPr id="31" name="Text 29"/>
-          <p:cNvSpPr/>
-          <p:nvPr/>
-        </p:nvSpPr>
-        <p:spPr>
-          <a:xfrm>
-            <a:off x="7315200" y="4855464"/>
-            <a:ext cx="4023360" cy="237744"/>
-          </a:xfrm>
-          <a:prstGeom prst="rect">
-            <a:avLst/>
-          </a:prstGeom>
-          <a:noFill/>
-          <a:ln/>
-        </p:spPr>
-        <p:txBody>
-          <a:bodyPr wrap="square" lIns="0" tIns="0" rIns="0" bIns="0" rtlCol="0" anchor="t"/>
-          <a:lstStyle/>
-          <a:p>
-            <a:pPr indent="0" marL="0">
-              <a:buNone/>
-            </a:pPr>
-            <a:r>
-              <a:rPr lang="en-US" sz="1000" dirty="0">
-                <a:solidFill>
-                  <a:srgbClr val="B4B7BD"/>
-                </a:solidFill>
-                <a:latin typeface="Calibri" pitchFamily="34" charset="0"/>
-                <a:ea typeface="Calibri" pitchFamily="34" charset="-122"/>
-                <a:cs typeface="Calibri" pitchFamily="34" charset="-120"/>
-              </a:rPr>
-              <a:t>Configure it — Test 8 cannot pass without it</a:t>
-            </a:r>
-            <a:endParaRPr lang="en-US" sz="1000" dirty="0"/>
-          </a:p>
-        </p:txBody>
-      </p:sp>
-      <p:sp>
-        <p:nvSpPr>
-          <p:cNvPr id="32" name="Shape 30"/>
-          <p:cNvSpPr/>
-          <p:nvPr/>
-        </p:nvSpPr>
-        <p:spPr>
-          <a:xfrm>
-            <a:off x="548640" y="5276088"/>
-            <a:ext cx="11064240" cy="457200"/>
-          </a:xfrm>
-          <a:prstGeom prst="roundRect">
-            <a:avLst>
-              <a:gd name="adj" fmla="val 10000"/>
-            </a:avLst>
-          </a:prstGeom>
-          <a:solidFill>
-            <a:srgbClr val="15171B"/>
-          </a:solidFill>
-          <a:ln w="12700">
-            <a:solidFill>
-              <a:srgbClr val="15171B"/>
-            </a:solidFill>
-            <a:prstDash val="solid"/>
-          </a:ln>
-        </p:spPr>
-      </p:sp>
-      <p:sp>
-        <p:nvSpPr>
-          <p:cNvPr id="33" name="Text 31"/>
-          <p:cNvSpPr/>
-          <p:nvPr/>
-        </p:nvSpPr>
-        <p:spPr>
-          <a:xfrm>
-            <a:off x="822960" y="5404104"/>
-            <a:ext cx="3017520" cy="237744"/>
-          </a:xfrm>
-          <a:prstGeom prst="rect">
-            <a:avLst/>
-          </a:prstGeom>
-          <a:noFill/>
-          <a:ln/>
-        </p:spPr>
-        <p:txBody>
-          <a:bodyPr wrap="square" lIns="0" tIns="0" rIns="0" bIns="0" rtlCol="0" anchor="t"/>
-          <a:lstStyle/>
-          <a:p>
-            <a:pPr indent="0" marL="0">
-              <a:buNone/>
-            </a:pPr>
-            <a:r>
-              <a:rPr lang="en-US" sz="1100" b="1" dirty="0">
-                <a:solidFill>
-                  <a:srgbClr val="FFFFFF"/>
-                </a:solidFill>
-                <a:latin typeface="Calibri" pitchFamily="34" charset="0"/>
-                <a:ea typeface="Calibri" pitchFamily="34" charset="-122"/>
-                <a:cs typeface="Calibri" pitchFamily="34" charset="-120"/>
-              </a:rPr>
-              <a:t>A Job never fires</a:t>
-            </a:r>
-            <a:endParaRPr lang="en-US" sz="1100" dirty="0"/>
-          </a:p>
-        </p:txBody>
-      </p:sp>
-      <p:sp>
-        <p:nvSpPr>
-          <p:cNvPr id="34" name="Text 32"/>
-          <p:cNvSpPr/>
-          <p:nvPr/>
-        </p:nvSpPr>
-        <p:spPr>
-          <a:xfrm>
-            <a:off x="4023360" y="5413248"/>
-            <a:ext cx="3108960" cy="237744"/>
-          </a:xfrm>
-          <a:prstGeom prst="rect">
-            <a:avLst/>
-          </a:prstGeom>
-          <a:noFill/>
-          <a:ln/>
-        </p:spPr>
-        <p:txBody>
-          <a:bodyPr wrap="square" lIns="0" tIns="0" rIns="0" bIns="0" rtlCol="0" anchor="t"/>
-          <a:lstStyle/>
-          <a:p>
-            <a:pPr indent="0" marL="0">
-              <a:buNone/>
-            </a:pPr>
-            <a:r>
-              <a:rPr lang="en-US" sz="1000" dirty="0">
-                <a:solidFill>
-                  <a:srgbClr val="F5A524"/>
-                </a:solidFill>
-                <a:latin typeface="Calibri" pitchFamily="34" charset="0"/>
-                <a:ea typeface="Calibri" pitchFamily="34" charset="-122"/>
-                <a:cs typeface="Calibri" pitchFamily="34" charset="-120"/>
-              </a:rPr>
-              <a:t>It was created disabled</a:t>
-            </a:r>
-            <a:endParaRPr lang="en-US" sz="1000" dirty="0"/>
-          </a:p>
-        </p:txBody>
-      </p:sp>
-      <p:sp>
-        <p:nvSpPr>
-          <p:cNvPr id="35" name="Text 33"/>
-          <p:cNvSpPr/>
-          <p:nvPr/>
-        </p:nvSpPr>
-        <p:spPr>
-          <a:xfrm>
-            <a:off x="7315200" y="5413248"/>
-            <a:ext cx="4023360" cy="237744"/>
-          </a:xfrm>
-          <a:prstGeom prst="rect">
-            <a:avLst/>
-          </a:prstGeom>
-          <a:noFill/>
-          <a:ln/>
-        </p:spPr>
-        <p:txBody>
-          <a:bodyPr wrap="square" lIns="0" tIns="0" rIns="0" bIns="0" rtlCol="0" anchor="t"/>
-          <a:lstStyle/>
-          <a:p>
-            <a:pPr indent="0" marL="0">
-              <a:buNone/>
-            </a:pPr>
-            <a:r>
-              <a:rPr lang="en-US" sz="1000" dirty="0">
-                <a:solidFill>
-                  <a:srgbClr val="B4B7BD"/>
-                </a:solidFill>
-                <a:latin typeface="Calibri" pitchFamily="34" charset="0"/>
-                <a:ea typeface="Calibri" pitchFamily="34" charset="-122"/>
-                <a:cs typeface="Calibri" pitchFamily="34" charset="-120"/>
-              </a:rPr>
-              <a:t>Enable it and confirm a next-run time is shown</a:t>
-            </a:r>
-            <a:endParaRPr lang="en-US" sz="1000" dirty="0"/>
-          </a:p>
-        </p:txBody>
-      </p:sp>
-      <p:sp>
-        <p:nvSpPr>
-          <p:cNvPr id="36" name="Text 34"/>
-          <p:cNvSpPr/>
-          <p:nvPr/>
-        </p:nvSpPr>
-        <p:spPr>
-          <a:xfrm>
-            <a:off x="548640" y="5925312"/>
-            <a:ext cx="11064240" cy="274320"/>
-          </a:xfrm>
-          <a:prstGeom prst="rect">
-            <a:avLst/>
-          </a:prstGeom>
-          <a:noFill/>
-          <a:ln/>
-        </p:spPr>
-        <p:txBody>
-          <a:bodyPr wrap="square" lIns="0" tIns="0" rIns="0" bIns="0" rtlCol="0" anchor="t"/>
-          <a:lstStyle/>
-          <a:p>
-            <a:pPr indent="0" marL="0">
-              <a:buNone/>
-            </a:pPr>
-            <a:r>
-              <a:rPr lang="en-US" sz="1050" i="1" dirty="0">
-                <a:solidFill>
-                  <a:srgbClr val="6E747E"/>
-                </a:solidFill>
-                <a:latin typeface="Calibri" pitchFamily="34" charset="0"/>
-                <a:ea typeface="Calibri" pitchFamily="34" charset="-122"/>
-                <a:cs typeface="Calibri" pitchFamily="34" charset="-120"/>
-              </a:rPr>
-              <a:t>Seven of these eight are tenant setup, not the pack. Check the amber panel on the test before raising a defect.</a:t>
-            </a:r>
-            <a:endParaRPr lang="en-US" sz="1050" dirty="0"/>
-          </a:p>
-        </p:txBody>
-      </p:sp>
-    </p:spTree>
-  </p:cSld>
-  <p:clrMapOvr>
-    <a:masterClrMapping/>
-  </p:clrMapOvr>
-</p:sld>
-</file>
-
-<file path=ppt/slides/slide16.xml><?xml version="1.0" encoding="utf-8"?>
-<p:sld xmlns:a="http://schemas.openxmlformats.org/drawingml/2006/main" xmlns:r="http://schemas.openxmlformats.org/officeDocument/2006/relationships" xmlns:p="http://schemas.openxmlformats.org/presentationml/2006/main">
-  <p:cSld name="Slide 16">
-    <p:bg>
-      <p:bgPr>
-        <a:solidFill>
-          <a:srgbClr val="000000"/>
-        </a:solidFill>
-      </p:bgPr>
-    </p:bg>
-    <p:spTree>
-      <p:nvGrpSpPr>
-        <p:cNvPr id="1" name=""/>
-        <p:cNvGrpSpPr/>
-        <p:nvPr/>
-      </p:nvGrpSpPr>
-      <p:grpSpPr>
-        <a:xfrm>
-          <a:off x="0" y="0"/>
-          <a:ext cx="0" cy="0"/>
-          <a:chOff x="0" y="0"/>
-          <a:chExt cx="0" cy="0"/>
-        </a:xfrm>
-      </p:grpSpPr>
-      <p:sp>
-        <p:nvSpPr>
           <p:cNvPr id="2" name="Shape 0"/>
           <p:cNvSpPr/>
           <p:nvPr/>
@@ -14438,13 +12454,13 @@
             <a:r>
               <a:rPr lang="en-US" sz="1100" b="1" spc="150" kern="0" dirty="0">
                 <a:solidFill>
-                  <a:srgbClr val="F5A524"/>
-                </a:solidFill>
-                <a:latin typeface="Calibri" pitchFamily="34" charset="0"/>
-                <a:ea typeface="Calibri" pitchFamily="34" charset="-122"/>
-                <a:cs typeface="Calibri" pitchFamily="34" charset="-120"/>
-              </a:rPr>
-              <a:t>WHAT YOU NEED FIRST</a:t>
+                  <a:srgbClr val="22D3EE"/>
+                </a:solidFill>
+                <a:latin typeface="Calibri" pitchFamily="34" charset="0"/>
+                <a:ea typeface="Calibri" pitchFamily="34" charset="-122"/>
+                <a:cs typeface="Calibri" pitchFamily="34" charset="-120"/>
+              </a:rPr>
+              <a:t>PACK CONTENT</a:t>
             </a:r>
             <a:endParaRPr lang="en-US" sz="1100" dirty="0"/>
           </a:p>
@@ -14486,7 +12502,7 @@
                 <a:ea typeface="Calibri" pitchFamily="34" charset="-122"/>
                 <a:cs typeface="Calibri" pitchFamily="34" charset="-120"/>
               </a:rPr>
-              <a:t>The tenant setup this test depends on. If something here is missing the test cannot pass, and it will look like a product fault when it is not.</a:t>
+              <a:t>The content items that must be on the tenant for this test — playbooks, automations, rules, Lists. Useful if you upload the pack piece by piece rather than in one go.</a:t>
             </a:r>
             <a:endParaRPr lang="en-US" sz="1100" dirty="0"/>
           </a:p>
@@ -14546,13 +12562,13 @@
             <a:r>
               <a:rPr lang="en-US" sz="1100" b="1" spc="150" kern="0" dirty="0">
                 <a:solidFill>
-                  <a:srgbClr val="E8551F"/>
-                </a:solidFill>
-                <a:latin typeface="Calibri" pitchFamily="34" charset="0"/>
-                <a:ea typeface="Calibri" pitchFamily="34" charset="-122"/>
-                <a:cs typeface="Calibri" pitchFamily="34" charset="-120"/>
-              </a:rPr>
-              <a:t>STEPS</a:t>
+                  <a:srgbClr val="F5A524"/>
+                </a:solidFill>
+                <a:latin typeface="Calibri" pitchFamily="34" charset="0"/>
+                <a:ea typeface="Calibri" pitchFamily="34" charset="-122"/>
+                <a:cs typeface="Calibri" pitchFamily="34" charset="-120"/>
+              </a:rPr>
+              <a:t>TENANT SETUP</a:t>
             </a:r>
             <a:endParaRPr lang="en-US" sz="1100" dirty="0"/>
           </a:p>
@@ -14594,7 +12610,7 @@
                 <a:ea typeface="Calibri" pitchFamily="34" charset="-122"/>
                 <a:cs typeface="Calibri" pitchFamily="34" charset="-120"/>
               </a:rPr>
-              <a:t>What to click, in order, in the Cortex XSIAM console. Anything to paste is shown in monospace.</a:t>
+              <a:t>What you configure yourself: integration instances, an endpoint group, a script in Action Center, the configuration List.</a:t>
             </a:r>
             <a:endParaRPr lang="en-US" sz="1100" dirty="0"/>
           </a:p>
@@ -14654,13 +12670,13 @@
             <a:r>
               <a:rPr lang="en-US" sz="1100" b="1" spc="150" kern="0" dirty="0">
                 <a:solidFill>
-                  <a:srgbClr val="3FB950"/>
-                </a:solidFill>
-                <a:latin typeface="Calibri" pitchFamily="34" charset="0"/>
-                <a:ea typeface="Calibri" pitchFamily="34" charset="-122"/>
-                <a:cs typeface="Calibri" pitchFamily="34" charset="-120"/>
-              </a:rPr>
-              <a:t>WHAT TO EXPECT</a:t>
+                  <a:srgbClr val="E8551F"/>
+                </a:solidFill>
+                <a:latin typeface="Calibri" pitchFamily="34" charset="0"/>
+                <a:ea typeface="Calibri" pitchFamily="34" charset="-122"/>
+                <a:cs typeface="Calibri" pitchFamily="34" charset="-120"/>
+              </a:rPr>
+              <a:t>STEPS  +  WHAT TO EXPECT</a:t>
             </a:r>
             <a:endParaRPr lang="en-US" sz="1100" dirty="0"/>
           </a:p>
@@ -14702,7 +12718,7 @@
                 <a:ea typeface="Calibri" pitchFamily="34" charset="-122"/>
                 <a:cs typeface="Calibri" pitchFamily="34" charset="-120"/>
               </a:rPr>
-              <a:t>What a passing test looks like. Where a result commonly looks wrong but is correct, it says so.</a:t>
+              <a:t>What to click, in order, in the Cortex XSIAM console — and what a passing test looks like. Anything to paste is shown in monospace.</a:t>
             </a:r>
             <a:endParaRPr lang="en-US" sz="1100" dirty="0"/>
           </a:p>
@@ -14843,13 +12859,13 @@
             <a:r>
               <a:rPr lang="en-US" sz="1100" i="1" dirty="0">
                 <a:solidFill>
-                  <a:srgbClr val="F5A524"/>
-                </a:solidFill>
-                <a:latin typeface="Calibri" pitchFamily="34" charset="0"/>
-                <a:ea typeface="Calibri" pitchFamily="34" charset="-122"/>
-                <a:cs typeface="Calibri" pitchFamily="34" charset="-120"/>
-              </a:rPr>
-              <a:t>A test that fails on a missing prerequisite is not a product defect — check the amber panel first.</a:t>
+                  <a:srgbClr val="6E747E"/>
+                </a:solidFill>
+                <a:latin typeface="Calibri" pitchFamily="34" charset="0"/>
+                <a:ea typeface="Calibri" pitchFamily="34" charset="-122"/>
+                <a:cs typeface="Calibri" pitchFamily="34" charset="-120"/>
+              </a:rPr>
+              <a:t>Each test lists its own prerequisites — set those up first and the test runs straight through.</a:t>
             </a:r>
             <a:endParaRPr lang="en-US" sz="1100" dirty="0"/>
           </a:p>
@@ -16363,7 +14379,7 @@
                 <a:ea typeface="Calibri" pitchFamily="34" charset="-122"/>
                 <a:cs typeface="Calibri" pitchFamily="34" charset="-120"/>
               </a:rPr>
-              <a:t>Two are easy to miss. The Marketplace KOI pack must be installed first — this extension ships no integration. And the Core REST API instance: without it the Script Runner's tracker stays empty and every scan run does nothing, which looks exactly like a broken playbook.</a:t>
+              <a:t>Two to set up before anything else. The Marketplace KOI pack must be installed first — this extension ships content only, no integration. The Core REST API instance is needed for tests 8 and 9, where the Script Runner reads endpoint groups through it.</a:t>
             </a:r>
             <a:endParaRPr lang="en-US" sz="1050" dirty="0"/>
           </a:p>
@@ -17526,141 +15542,6 @@
           </a:p>
         </p:txBody>
       </p:sp>
-      <p:sp>
-        <p:nvSpPr>
-          <p:cNvPr id="31" name="Shape 29"/>
-          <p:cNvSpPr/>
-          <p:nvPr/>
-        </p:nvSpPr>
-        <p:spPr>
-          <a:xfrm>
-            <a:off x="548640" y="4782312"/>
-            <a:ext cx="11064240" cy="658368"/>
-          </a:xfrm>
-          <a:prstGeom prst="roundRect">
-            <a:avLst>
-              <a:gd name="adj" fmla="val 6944"/>
-            </a:avLst>
-          </a:prstGeom>
-          <a:solidFill>
-            <a:srgbClr val="1C2026"/>
-          </a:solidFill>
-          <a:ln w="12700">
-            <a:solidFill>
-              <a:srgbClr val="1C2026"/>
-            </a:solidFill>
-            <a:prstDash val="solid"/>
-          </a:ln>
-        </p:spPr>
-      </p:sp>
-      <p:sp>
-        <p:nvSpPr>
-          <p:cNvPr id="32" name="Shape 30"/>
-          <p:cNvSpPr/>
-          <p:nvPr/>
-        </p:nvSpPr>
-        <p:spPr>
-          <a:xfrm>
-            <a:off x="786384" y="4965192"/>
-            <a:ext cx="292608" cy="292608"/>
-          </a:xfrm>
-          <a:prstGeom prst="roundRect">
-            <a:avLst>
-              <a:gd name="adj" fmla="val 28125"/>
-            </a:avLst>
-          </a:prstGeom>
-          <a:solidFill>
-            <a:srgbClr val="F5A524"/>
-          </a:solidFill>
-          <a:ln w="12700">
-            <a:solidFill>
-              <a:srgbClr val="F5A524"/>
-            </a:solidFill>
-            <a:prstDash val="solid"/>
-          </a:ln>
-        </p:spPr>
-      </p:sp>
-      <p:sp>
-        <p:nvSpPr>
-          <p:cNvPr id="33" name="Text 31"/>
-          <p:cNvSpPr/>
-          <p:nvPr/>
-        </p:nvSpPr>
-        <p:spPr>
-          <a:xfrm>
-            <a:off x="786384" y="4965192"/>
-            <a:ext cx="292608" cy="292608"/>
-          </a:xfrm>
-          <a:prstGeom prst="rect">
-            <a:avLst/>
-          </a:prstGeom>
-          <a:noFill/>
-          <a:ln/>
-        </p:spPr>
-        <p:txBody>
-          <a:bodyPr wrap="square" lIns="0" tIns="0" rIns="0" bIns="0" rtlCol="0" anchor="ctr"/>
-          <a:lstStyle/>
-          <a:p>
-            <a:pPr algn="ctr" indent="0" marL="0">
-              <a:buNone/>
-            </a:pPr>
-            <a:r>
-              <a:rPr lang="en-US" sz="1300" b="1" dirty="0">
-                <a:solidFill>
-                  <a:srgbClr val="FFFFFF"/>
-                </a:solidFill>
-                <a:latin typeface="Calibri" pitchFamily="34" charset="0"/>
-                <a:ea typeface="Calibri" pitchFamily="34" charset="-122"/>
-                <a:cs typeface="Calibri" pitchFamily="34" charset="-120"/>
-              </a:rPr>
-              <a:t>!</a:t>
-            </a:r>
-            <a:endParaRPr lang="en-US" sz="1300" dirty="0"/>
-          </a:p>
-        </p:txBody>
-      </p:sp>
-      <p:sp>
-        <p:nvSpPr>
-          <p:cNvPr id="34" name="Text 32"/>
-          <p:cNvSpPr/>
-          <p:nvPr/>
-        </p:nvSpPr>
-        <p:spPr>
-          <a:xfrm>
-            <a:off x="1243584" y="4892040"/>
-            <a:ext cx="10058400" cy="438912"/>
-          </a:xfrm>
-          <a:prstGeom prst="rect">
-            <a:avLst/>
-          </a:prstGeom>
-          <a:noFill/>
-          <a:ln/>
-        </p:spPr>
-        <p:txBody>
-          <a:bodyPr wrap="square" lIns="0" tIns="0" rIns="0" bIns="0" rtlCol="0" anchor="t"/>
-          <a:lstStyle/>
-          <a:p>
-            <a:pPr indent="0" marL="0">
-              <a:lnSpc>
-                <a:spcPts val="1200"/>
-              </a:lnSpc>
-              <a:buNone/>
-            </a:pPr>
-            <a:r>
-              <a:rPr lang="en-US" sz="1000" dirty="0">
-                <a:solidFill>
-                  <a:srgbClr val="B4B7BD"/>
-                </a:solidFill>
-                <a:latin typeface="Calibri" pitchFamily="34" charset="0"/>
-                <a:ea typeface="Calibri" pitchFamily="34" charset="-122"/>
-                <a:cs typeface="Calibri" pitchFamily="34" charset="-120"/>
-              </a:rPr>
-              <a:t>A 403 here almost always means egress rather than a bad key — KOI restricts its sensitive endpoints by source IP. Run the instance on a Cortex engine whose address KOI accepts. A 401 means the key itself.</a:t>
-            </a:r>
-            <a:endParaRPr lang="en-US" sz="1000" dirty="0"/>
-          </a:p>
-        </p:txBody>
-      </p:sp>
     </p:spTree>
   </p:cSld>
   <p:clrMapOvr>
@@ -18980,141 +16861,6 @@
           </a:p>
         </p:txBody>
       </p:sp>
-      <p:sp>
-        <p:nvSpPr>
-          <p:cNvPr id="35" name="Shape 33"/>
-          <p:cNvSpPr/>
-          <p:nvPr/>
-        </p:nvSpPr>
-        <p:spPr>
-          <a:xfrm>
-            <a:off x="548640" y="4782312"/>
-            <a:ext cx="11064240" cy="658368"/>
-          </a:xfrm>
-          <a:prstGeom prst="roundRect">
-            <a:avLst>
-              <a:gd name="adj" fmla="val 6944"/>
-            </a:avLst>
-          </a:prstGeom>
-          <a:solidFill>
-            <a:srgbClr val="1C2026"/>
-          </a:solidFill>
-          <a:ln w="12700">
-            <a:solidFill>
-              <a:srgbClr val="1C2026"/>
-            </a:solidFill>
-            <a:prstDash val="solid"/>
-          </a:ln>
-        </p:spPr>
-      </p:sp>
-      <p:sp>
-        <p:nvSpPr>
-          <p:cNvPr id="36" name="Shape 34"/>
-          <p:cNvSpPr/>
-          <p:nvPr/>
-        </p:nvSpPr>
-        <p:spPr>
-          <a:xfrm>
-            <a:off x="786384" y="4965192"/>
-            <a:ext cx="292608" cy="292608"/>
-          </a:xfrm>
-          <a:prstGeom prst="roundRect">
-            <a:avLst>
-              <a:gd name="adj" fmla="val 28125"/>
-            </a:avLst>
-          </a:prstGeom>
-          <a:solidFill>
-            <a:srgbClr val="F5A524"/>
-          </a:solidFill>
-          <a:ln w="12700">
-            <a:solidFill>
-              <a:srgbClr val="F5A524"/>
-            </a:solidFill>
-            <a:prstDash val="solid"/>
-          </a:ln>
-        </p:spPr>
-      </p:sp>
-      <p:sp>
-        <p:nvSpPr>
-          <p:cNvPr id="37" name="Text 35"/>
-          <p:cNvSpPr/>
-          <p:nvPr/>
-        </p:nvSpPr>
-        <p:spPr>
-          <a:xfrm>
-            <a:off x="786384" y="4965192"/>
-            <a:ext cx="292608" cy="292608"/>
-          </a:xfrm>
-          <a:prstGeom prst="rect">
-            <a:avLst/>
-          </a:prstGeom>
-          <a:noFill/>
-          <a:ln/>
-        </p:spPr>
-        <p:txBody>
-          <a:bodyPr wrap="square" lIns="0" tIns="0" rIns="0" bIns="0" rtlCol="0" anchor="ctr"/>
-          <a:lstStyle/>
-          <a:p>
-            <a:pPr algn="ctr" indent="0" marL="0">
-              <a:buNone/>
-            </a:pPr>
-            <a:r>
-              <a:rPr lang="en-US" sz="1300" b="1" dirty="0">
-                <a:solidFill>
-                  <a:srgbClr val="FFFFFF"/>
-                </a:solidFill>
-                <a:latin typeface="Calibri" pitchFamily="34" charset="0"/>
-                <a:ea typeface="Calibri" pitchFamily="34" charset="-122"/>
-                <a:cs typeface="Calibri" pitchFamily="34" charset="-120"/>
-              </a:rPr>
-              <a:t>!</a:t>
-            </a:r>
-            <a:endParaRPr lang="en-US" sz="1300" dirty="0"/>
-          </a:p>
-        </p:txBody>
-      </p:sp>
-      <p:sp>
-        <p:nvSpPr>
-          <p:cNvPr id="38" name="Text 36"/>
-          <p:cNvSpPr/>
-          <p:nvPr/>
-        </p:nvSpPr>
-        <p:spPr>
-          <a:xfrm>
-            <a:off x="1243584" y="4892040"/>
-            <a:ext cx="10058400" cy="438912"/>
-          </a:xfrm>
-          <a:prstGeom prst="rect">
-            <a:avLst/>
-          </a:prstGeom>
-          <a:noFill/>
-          <a:ln/>
-        </p:spPr>
-        <p:txBody>
-          <a:bodyPr wrap="square" lIns="0" tIns="0" rIns="0" bIns="0" rtlCol="0" anchor="t"/>
-          <a:lstStyle/>
-          <a:p>
-            <a:pPr indent="0" marL="0">
-              <a:lnSpc>
-                <a:spcPts val="1200"/>
-              </a:lnSpc>
-              <a:buNone/>
-            </a:pPr>
-            <a:r>
-              <a:rPr lang="en-US" sz="1000" dirty="0">
-                <a:solidFill>
-                  <a:srgbClr val="B4B7BD"/>
-                </a:solidFill>
-                <a:latin typeface="Calibri" pitchFamily="34" charset="0"/>
-                <a:ea typeface="Calibri" pitchFamily="34" charset="-122"/>
-                <a:cs typeface="Calibri" pitchFamily="34" charset="-120"/>
-              </a:rPr>
-              <a:t>The Marketplace KOI pack ships no parsing or modeling rules. If those promoted fields are missing, this extension is not installed or has not activated yet.</a:t>
-            </a:r>
-            <a:endParaRPr lang="en-US" sz="1000" dirty="0"/>
-          </a:p>
-        </p:txBody>
-      </p:sp>
     </p:spTree>
   </p:cSld>
   <p:clrMapOvr>
@@ -20353,141 +18099,6 @@
           </a:p>
         </p:txBody>
       </p:sp>
-      <p:sp>
-        <p:nvSpPr>
-          <p:cNvPr id="33" name="Shape 31"/>
-          <p:cNvSpPr/>
-          <p:nvPr/>
-        </p:nvSpPr>
-        <p:spPr>
-          <a:xfrm>
-            <a:off x="548640" y="4969764"/>
-            <a:ext cx="11064240" cy="658368"/>
-          </a:xfrm>
-          <a:prstGeom prst="roundRect">
-            <a:avLst>
-              <a:gd name="adj" fmla="val 6944"/>
-            </a:avLst>
-          </a:prstGeom>
-          <a:solidFill>
-            <a:srgbClr val="1C2026"/>
-          </a:solidFill>
-          <a:ln w="12700">
-            <a:solidFill>
-              <a:srgbClr val="1C2026"/>
-            </a:solidFill>
-            <a:prstDash val="solid"/>
-          </a:ln>
-        </p:spPr>
-      </p:sp>
-      <p:sp>
-        <p:nvSpPr>
-          <p:cNvPr id="34" name="Shape 32"/>
-          <p:cNvSpPr/>
-          <p:nvPr/>
-        </p:nvSpPr>
-        <p:spPr>
-          <a:xfrm>
-            <a:off x="786384" y="5152644"/>
-            <a:ext cx="292608" cy="292608"/>
-          </a:xfrm>
-          <a:prstGeom prst="roundRect">
-            <a:avLst>
-              <a:gd name="adj" fmla="val 28125"/>
-            </a:avLst>
-          </a:prstGeom>
-          <a:solidFill>
-            <a:srgbClr val="F5A524"/>
-          </a:solidFill>
-          <a:ln w="12700">
-            <a:solidFill>
-              <a:srgbClr val="F5A524"/>
-            </a:solidFill>
-            <a:prstDash val="solid"/>
-          </a:ln>
-        </p:spPr>
-      </p:sp>
-      <p:sp>
-        <p:nvSpPr>
-          <p:cNvPr id="35" name="Text 33"/>
-          <p:cNvSpPr/>
-          <p:nvPr/>
-        </p:nvSpPr>
-        <p:spPr>
-          <a:xfrm>
-            <a:off x="786384" y="5152644"/>
-            <a:ext cx="292608" cy="292608"/>
-          </a:xfrm>
-          <a:prstGeom prst="rect">
-            <a:avLst/>
-          </a:prstGeom>
-          <a:noFill/>
-          <a:ln/>
-        </p:spPr>
-        <p:txBody>
-          <a:bodyPr wrap="square" lIns="0" tIns="0" rIns="0" bIns="0" rtlCol="0" anchor="ctr"/>
-          <a:lstStyle/>
-          <a:p>
-            <a:pPr algn="ctr" indent="0" marL="0">
-              <a:buNone/>
-            </a:pPr>
-            <a:r>
-              <a:rPr lang="en-US" sz="1300" b="1" dirty="0">
-                <a:solidFill>
-                  <a:srgbClr val="FFFFFF"/>
-                </a:solidFill>
-                <a:latin typeface="Calibri" pitchFamily="34" charset="0"/>
-                <a:ea typeface="Calibri" pitchFamily="34" charset="-122"/>
-                <a:cs typeface="Calibri" pitchFamily="34" charset="-120"/>
-              </a:rPr>
-              <a:t>!</a:t>
-            </a:r>
-            <a:endParaRPr lang="en-US" sz="1300" dirty="0"/>
-          </a:p>
-        </p:txBody>
-      </p:sp>
-      <p:sp>
-        <p:nvSpPr>
-          <p:cNvPr id="36" name="Text 34"/>
-          <p:cNvSpPr/>
-          <p:nvPr/>
-        </p:nvSpPr>
-        <p:spPr>
-          <a:xfrm>
-            <a:off x="1243584" y="5079492"/>
-            <a:ext cx="10058400" cy="438912"/>
-          </a:xfrm>
-          <a:prstGeom prst="rect">
-            <a:avLst/>
-          </a:prstGeom>
-          <a:noFill/>
-          <a:ln/>
-        </p:spPr>
-        <p:txBody>
-          <a:bodyPr wrap="square" lIns="0" tIns="0" rIns="0" bIns="0" rtlCol="0" anchor="t"/>
-          <a:lstStyle/>
-          <a:p>
-            <a:pPr indent="0" marL="0">
-              <a:lnSpc>
-                <a:spcPts val="1200"/>
-              </a:lnSpc>
-              <a:buNone/>
-            </a:pPr>
-            <a:r>
-              <a:rPr lang="en-US" sz="1000" dirty="0">
-                <a:solidFill>
-                  <a:srgbClr val="B4B7BD"/>
-                </a:solidFill>
-                <a:latin typeface="Calibri" pitchFamily="34" charset="0"/>
-                <a:ea typeface="Calibri" pitchFamily="34" charset="-122"/>
-                <a:cs typeface="Calibri" pitchFamily="34" charset="-120"/>
-              </a:rPr>
-              <a:t>rows greatly exceeding real_alerts is CORRECT — the Marketplace integration re-sends every still-open alert on each fetch. Only koi_notification_id identifies an alert. Every widget here de-duplicates on it first.</a:t>
-            </a:r>
-            <a:endParaRPr lang="en-US" sz="1000" dirty="0"/>
-          </a:p>
-        </p:txBody>
-      </p:sp>
     </p:spTree>
   </p:cSld>
   <p:clrMapOvr>
@@ -21888,141 +19499,6 @@
           </a:p>
         </p:txBody>
       </p:sp>
-      <p:sp>
-        <p:nvSpPr>
-          <p:cNvPr id="37" name="Shape 35"/>
-          <p:cNvSpPr/>
-          <p:nvPr/>
-        </p:nvSpPr>
-        <p:spPr>
-          <a:xfrm>
-            <a:off x="548640" y="5239512"/>
-            <a:ext cx="11064240" cy="658368"/>
-          </a:xfrm>
-          <a:prstGeom prst="roundRect">
-            <a:avLst>
-              <a:gd name="adj" fmla="val 6944"/>
-            </a:avLst>
-          </a:prstGeom>
-          <a:solidFill>
-            <a:srgbClr val="1C2026"/>
-          </a:solidFill>
-          <a:ln w="12700">
-            <a:solidFill>
-              <a:srgbClr val="1C2026"/>
-            </a:solidFill>
-            <a:prstDash val="solid"/>
-          </a:ln>
-        </p:spPr>
-      </p:sp>
-      <p:sp>
-        <p:nvSpPr>
-          <p:cNvPr id="38" name="Shape 36"/>
-          <p:cNvSpPr/>
-          <p:nvPr/>
-        </p:nvSpPr>
-        <p:spPr>
-          <a:xfrm>
-            <a:off x="786384" y="5422392"/>
-            <a:ext cx="292608" cy="292608"/>
-          </a:xfrm>
-          <a:prstGeom prst="roundRect">
-            <a:avLst>
-              <a:gd name="adj" fmla="val 28125"/>
-            </a:avLst>
-          </a:prstGeom>
-          <a:solidFill>
-            <a:srgbClr val="F5A524"/>
-          </a:solidFill>
-          <a:ln w="12700">
-            <a:solidFill>
-              <a:srgbClr val="F5A524"/>
-            </a:solidFill>
-            <a:prstDash val="solid"/>
-          </a:ln>
-        </p:spPr>
-      </p:sp>
-      <p:sp>
-        <p:nvSpPr>
-          <p:cNvPr id="39" name="Text 37"/>
-          <p:cNvSpPr/>
-          <p:nvPr/>
-        </p:nvSpPr>
-        <p:spPr>
-          <a:xfrm>
-            <a:off x="786384" y="5422392"/>
-            <a:ext cx="292608" cy="292608"/>
-          </a:xfrm>
-          <a:prstGeom prst="rect">
-            <a:avLst/>
-          </a:prstGeom>
-          <a:noFill/>
-          <a:ln/>
-        </p:spPr>
-        <p:txBody>
-          <a:bodyPr wrap="square" lIns="0" tIns="0" rIns="0" bIns="0" rtlCol="0" anchor="ctr"/>
-          <a:lstStyle/>
-          <a:p>
-            <a:pPr algn="ctr" indent="0" marL="0">
-              <a:buNone/>
-            </a:pPr>
-            <a:r>
-              <a:rPr lang="en-US" sz="1300" b="1" dirty="0">
-                <a:solidFill>
-                  <a:srgbClr val="FFFFFF"/>
-                </a:solidFill>
-                <a:latin typeface="Calibri" pitchFamily="34" charset="0"/>
-                <a:ea typeface="Calibri" pitchFamily="34" charset="-122"/>
-                <a:cs typeface="Calibri" pitchFamily="34" charset="-120"/>
-              </a:rPr>
-              <a:t>!</a:t>
-            </a:r>
-            <a:endParaRPr lang="en-US" sz="1300" dirty="0"/>
-          </a:p>
-        </p:txBody>
-      </p:sp>
-      <p:sp>
-        <p:nvSpPr>
-          <p:cNvPr id="40" name="Text 38"/>
-          <p:cNvSpPr/>
-          <p:nvPr/>
-        </p:nvSpPr>
-        <p:spPr>
-          <a:xfrm>
-            <a:off x="1243584" y="5349240"/>
-            <a:ext cx="10058400" cy="438912"/>
-          </a:xfrm>
-          <a:prstGeom prst="rect">
-            <a:avLst/>
-          </a:prstGeom>
-          <a:noFill/>
-          <a:ln/>
-        </p:spPr>
-        <p:txBody>
-          <a:bodyPr wrap="square" lIns="0" tIns="0" rIns="0" bIns="0" rtlCol="0" anchor="t"/>
-          <a:lstStyle/>
-          <a:p>
-            <a:pPr indent="0" marL="0">
-              <a:lnSpc>
-                <a:spcPts val="1200"/>
-              </a:lnSpc>
-              <a:buNone/>
-            </a:pPr>
-            <a:r>
-              <a:rPr lang="en-US" sz="1000" dirty="0">
-                <a:solidFill>
-                  <a:srgbClr val="B4B7BD"/>
-                </a:solidFill>
-                <a:latin typeface="Calibri" pitchFamily="34" charset="0"/>
-                <a:ea typeface="Calibri" pitchFamily="34" charset="-122"/>
-                <a:cs typeface="Calibri" pitchFamily="34" charset="-120"/>
-              </a:rPr>
-              <a:t>If everything comes out Suspicious, the alert carried no KOI detail for the playbook to read. Check that your correlation rule passes the KOI fields through.</a:t>
-            </a:r>
-            <a:endParaRPr lang="en-US" sz="1000" dirty="0"/>
-          </a:p>
-        </p:txBody>
-      </p:sp>
     </p:spTree>
   </p:cSld>
   <p:clrMapOvr>
@@ -23420,141 +20896,6 @@
               <a:t>With Cortex XDR present, execution evidence is added.</a:t>
             </a:r>
             <a:endParaRPr lang="en-US" sz="1150" dirty="0"/>
-          </a:p>
-        </p:txBody>
-      </p:sp>
-      <p:sp>
-        <p:nvSpPr>
-          <p:cNvPr id="37" name="Shape 35"/>
-          <p:cNvSpPr/>
-          <p:nvPr/>
-        </p:nvSpPr>
-        <p:spPr>
-          <a:xfrm>
-            <a:off x="548640" y="5614416"/>
-            <a:ext cx="11064240" cy="658368"/>
-          </a:xfrm>
-          <a:prstGeom prst="roundRect">
-            <a:avLst>
-              <a:gd name="adj" fmla="val 6944"/>
-            </a:avLst>
-          </a:prstGeom>
-          <a:solidFill>
-            <a:srgbClr val="1C2026"/>
-          </a:solidFill>
-          <a:ln w="12700">
-            <a:solidFill>
-              <a:srgbClr val="1C2026"/>
-            </a:solidFill>
-            <a:prstDash val="solid"/>
-          </a:ln>
-        </p:spPr>
-      </p:sp>
-      <p:sp>
-        <p:nvSpPr>
-          <p:cNvPr id="38" name="Shape 36"/>
-          <p:cNvSpPr/>
-          <p:nvPr/>
-        </p:nvSpPr>
-        <p:spPr>
-          <a:xfrm>
-            <a:off x="786384" y="5797296"/>
-            <a:ext cx="292608" cy="292608"/>
-          </a:xfrm>
-          <a:prstGeom prst="roundRect">
-            <a:avLst>
-              <a:gd name="adj" fmla="val 28125"/>
-            </a:avLst>
-          </a:prstGeom>
-          <a:solidFill>
-            <a:srgbClr val="F5A524"/>
-          </a:solidFill>
-          <a:ln w="12700">
-            <a:solidFill>
-              <a:srgbClr val="F5A524"/>
-            </a:solidFill>
-            <a:prstDash val="solid"/>
-          </a:ln>
-        </p:spPr>
-      </p:sp>
-      <p:sp>
-        <p:nvSpPr>
-          <p:cNvPr id="39" name="Text 37"/>
-          <p:cNvSpPr/>
-          <p:nvPr/>
-        </p:nvSpPr>
-        <p:spPr>
-          <a:xfrm>
-            <a:off x="786384" y="5797296"/>
-            <a:ext cx="292608" cy="292608"/>
-          </a:xfrm>
-          <a:prstGeom prst="rect">
-            <a:avLst/>
-          </a:prstGeom>
-          <a:noFill/>
-          <a:ln/>
-        </p:spPr>
-        <p:txBody>
-          <a:bodyPr wrap="square" lIns="0" tIns="0" rIns="0" bIns="0" rtlCol="0" anchor="ctr"/>
-          <a:lstStyle/>
-          <a:p>
-            <a:pPr algn="ctr" indent="0" marL="0">
-              <a:buNone/>
-            </a:pPr>
-            <a:r>
-              <a:rPr lang="en-US" sz="1300" b="1" dirty="0">
-                <a:solidFill>
-                  <a:srgbClr val="FFFFFF"/>
-                </a:solidFill>
-                <a:latin typeface="Calibri" pitchFamily="34" charset="0"/>
-                <a:ea typeface="Calibri" pitchFamily="34" charset="-122"/>
-                <a:cs typeface="Calibri" pitchFamily="34" charset="-120"/>
-              </a:rPr>
-              <a:t>!</a:t>
-            </a:r>
-            <a:endParaRPr lang="en-US" sz="1300" dirty="0"/>
-          </a:p>
-        </p:txBody>
-      </p:sp>
-      <p:sp>
-        <p:nvSpPr>
-          <p:cNvPr id="40" name="Text 38"/>
-          <p:cNvSpPr/>
-          <p:nvPr/>
-        </p:nvSpPr>
-        <p:spPr>
-          <a:xfrm>
-            <a:off x="1243584" y="5724144"/>
-            <a:ext cx="10058400" cy="438912"/>
-          </a:xfrm>
-          <a:prstGeom prst="rect">
-            <a:avLst/>
-          </a:prstGeom>
-          <a:noFill/>
-          <a:ln/>
-        </p:spPr>
-        <p:txBody>
-          <a:bodyPr wrap="square" lIns="0" tIns="0" rIns="0" bIns="0" rtlCol="0" anchor="t"/>
-          <a:lstStyle/>
-          <a:p>
-            <a:pPr indent="0" marL="0">
-              <a:lnSpc>
-                <a:spcPts val="1200"/>
-              </a:lnSpc>
-              <a:buNone/>
-            </a:pPr>
-            <a:r>
-              <a:rPr lang="en-US" sz="1000" dirty="0">
-                <a:solidFill>
-                  <a:srgbClr val="B4B7BD"/>
-                </a:solidFill>
-                <a:latin typeface="Calibri" pitchFamily="34" charset="0"/>
-                <a:ea typeface="Calibri" pitchFamily="34" charset="-122"/>
-                <a:cs typeface="Calibri" pitchFamily="34" charset="-120"/>
-              </a:rPr>
-              <a:t>This pack builds its device view from inventory filtered by host plus Cortex XDR data. KOI's own device record — last seen, registration, logged-on user — needs the custom integration's device commands and is not available here.</a:t>
-            </a:r>
-            <a:endParaRPr lang="en-US" sz="1000" dirty="0"/>
           </a:p>
         </p:txBody>
       </p:sp>

--- a/docs/KOI_Marketplace_Pack_Test_Guide.pptx
+++ b/docs/KOI_Marketplace_Pack_Test_Guide.pptx
@@ -6066,7 +6066,7 @@
                 <a:ea typeface="Calibri" pitchFamily="34" charset="-122"/>
                 <a:cs typeface="Calibri" pitchFamily="34" charset="-120"/>
               </a:rPr>
-              <a:t>Settings → Object Setup → Lists → New List, type JSON, named exactly Koi Script Runner.</a:t>
+              <a:t>If you installed the pack: the Koi Script Runner List is already there — open Settings → Object Setup → Lists and go to the next step.</a:t>
             </a:r>
             <a:endParaRPr lang="en-US" sz="1150" dirty="0"/>
           </a:p>
@@ -6120,7 +6120,7 @@
         <p:spPr>
           <a:xfrm>
             <a:off x="1152144" y="4279392"/>
-            <a:ext cx="5486400" cy="630936"/>
+            <a:ext cx="5486400" cy="822960"/>
           </a:xfrm>
           <a:prstGeom prst="rect">
             <a:avLst/>
@@ -6147,7 +6147,7 @@
                 <a:ea typeface="Calibri" pitchFamily="34" charset="-122"/>
                 <a:cs typeface="Calibri" pitchFamily="34" charset="-120"/>
               </a:rPr>
-              <a:t>Open Lists/README.md in the pack and copy the JSON block — it is formatted ready to paste (do NOT copy from list-Koi_Script_Runner.json; its data field is escaped).</a:t>
+              <a:t>If you uploaded selectively: upload the playbooks and automation listed under PACK CONTENT, then create the List — New List, type JSON, named exactly Koi Script Runner — and paste the block from Lists/README.md (not from list-Koi_Script_Runner.json; its data field is escaped).</a:t>
             </a:r>
             <a:endParaRPr lang="en-US" sz="1150" dirty="0"/>
           </a:p>
@@ -6161,7 +6161,7 @@
         </p:nvSpPr>
         <p:spPr>
           <a:xfrm>
-            <a:off x="859536" y="4983480"/>
+            <a:off x="859536" y="5170932"/>
             <a:ext cx="219456" cy="256032"/>
           </a:xfrm>
           <a:prstGeom prst="rect">
@@ -6200,7 +6200,7 @@
         </p:nvSpPr>
         <p:spPr>
           <a:xfrm>
-            <a:off x="1152144" y="4983480"/>
+            <a:off x="1152144" y="5170932"/>
             <a:ext cx="5486400" cy="438912"/>
           </a:xfrm>
           <a:prstGeom prst="rect">
@@ -6242,7 +6242,7 @@
         </p:nvSpPr>
         <p:spPr>
           <a:xfrm>
-            <a:off x="859536" y="5500116"/>
+            <a:off x="859536" y="5687568"/>
             <a:ext cx="219456" cy="256032"/>
           </a:xfrm>
           <a:prstGeom prst="rect">
@@ -6281,7 +6281,7 @@
         </p:nvSpPr>
         <p:spPr>
           <a:xfrm>
-            <a:off x="1152144" y="5500116"/>
+            <a:off x="1152144" y="5687568"/>
             <a:ext cx="5486400" cy="438912"/>
           </a:xfrm>
           <a:prstGeom prst="rect">
@@ -6323,7 +6323,7 @@
         </p:nvSpPr>
         <p:spPr>
           <a:xfrm>
-            <a:off x="859536" y="6016752"/>
+            <a:off x="859536" y="6204204"/>
             <a:ext cx="219456" cy="256032"/>
           </a:xfrm>
           <a:prstGeom prst="rect">
@@ -6362,7 +6362,7 @@
         </p:nvSpPr>
         <p:spPr>
           <a:xfrm>
-            <a:off x="1152144" y="6016752"/>
+            <a:off x="1152144" y="6204204"/>
             <a:ext cx="5486400" cy="438912"/>
           </a:xfrm>
           <a:prstGeom prst="rect">
@@ -12732,12 +12732,12 @@
         </p:nvSpPr>
         <p:spPr>
           <a:xfrm>
-            <a:off x="548640" y="3977640"/>
-            <a:ext cx="11064240" cy="1371600"/>
+            <a:off x="548640" y="3950208"/>
+            <a:ext cx="11064240" cy="1874520"/>
           </a:xfrm>
           <a:prstGeom prst="roundRect">
             <a:avLst>
-              <a:gd name="adj" fmla="val 3333"/>
+              <a:gd name="adj" fmla="val 2439"/>
             </a:avLst>
           </a:prstGeom>
           <a:solidFill>
@@ -12759,8 +12759,8 @@
         </p:nvSpPr>
         <p:spPr>
           <a:xfrm>
-            <a:off x="859536" y="4160520"/>
-            <a:ext cx="4572000" cy="274320"/>
+            <a:off x="859536" y="4114800"/>
+            <a:ext cx="6400800" cy="274320"/>
           </a:xfrm>
           <a:prstGeom prst="rect">
             <a:avLst/>
@@ -12784,7 +12784,7 @@
                 <a:ea typeface="Calibri" pitchFamily="34" charset="-122"/>
                 <a:cs typeface="Calibri" pitchFamily="34" charset="-120"/>
               </a:rPr>
-              <a:t>Run them in order the first time</a:t>
+              <a:t>Installed the pack, or uploading piece by piece?</a:t>
             </a:r>
             <a:endParaRPr lang="en-US" sz="1300" dirty="0"/>
           </a:p>
@@ -12798,8 +12798,8 @@
         </p:nvSpPr>
         <p:spPr>
           <a:xfrm>
-            <a:off x="859536" y="4498848"/>
-            <a:ext cx="10442448" cy="731520"/>
+            <a:off x="859536" y="4434840"/>
+            <a:ext cx="10442448" cy="548640"/>
           </a:xfrm>
           <a:prstGeom prst="rect">
             <a:avLst/>
@@ -12826,6 +12826,87 @@
                 <a:ea typeface="Calibri" pitchFamily="34" charset="-122"/>
                 <a:cs typeface="Calibri" pitchFamily="34" charset="-120"/>
               </a:rPr>
+              <a:t>Install the whole pack and every playbook, automation, rule and the Koi Script Runner List are already on the tenant — nothing to upload. If you upload selectively instead, the PACK CONTENT column on each test is your upload checklist for that test.</a:t>
+            </a:r>
+            <a:endParaRPr lang="en-US" sz="1100" dirty="0"/>
+          </a:p>
+        </p:txBody>
+      </p:sp>
+      <p:sp>
+        <p:nvSpPr>
+          <p:cNvPr id="16" name="Text 14"/>
+          <p:cNvSpPr/>
+          <p:nvPr/>
+        </p:nvSpPr>
+        <p:spPr>
+          <a:xfrm>
+            <a:off x="859536" y="5029200"/>
+            <a:ext cx="4572000" cy="274320"/>
+          </a:xfrm>
+          <a:prstGeom prst="rect">
+            <a:avLst/>
+          </a:prstGeom>
+          <a:noFill/>
+          <a:ln/>
+        </p:spPr>
+        <p:txBody>
+          <a:bodyPr wrap="square" lIns="0" tIns="0" rIns="0" bIns="0" rtlCol="0" anchor="t"/>
+          <a:lstStyle/>
+          <a:p>
+            <a:pPr indent="0" marL="0">
+              <a:buNone/>
+            </a:pPr>
+            <a:r>
+              <a:rPr lang="en-US" sz="1300" b="1" dirty="0">
+                <a:solidFill>
+                  <a:srgbClr val="FFFFFF"/>
+                </a:solidFill>
+                <a:latin typeface="Calibri" pitchFamily="34" charset="0"/>
+                <a:ea typeface="Calibri" pitchFamily="34" charset="-122"/>
+                <a:cs typeface="Calibri" pitchFamily="34" charset="-120"/>
+              </a:rPr>
+              <a:t>Run them in order the first time</a:t>
+            </a:r>
+            <a:endParaRPr lang="en-US" sz="1300" dirty="0"/>
+          </a:p>
+        </p:txBody>
+      </p:sp>
+      <p:sp>
+        <p:nvSpPr>
+          <p:cNvPr id="17" name="Text 15"/>
+          <p:cNvSpPr/>
+          <p:nvPr/>
+        </p:nvSpPr>
+        <p:spPr>
+          <a:xfrm>
+            <a:off x="859536" y="5349240"/>
+            <a:ext cx="10442448" cy="502920"/>
+          </a:xfrm>
+          <a:prstGeom prst="rect">
+            <a:avLst/>
+          </a:prstGeom>
+          <a:noFill/>
+          <a:ln/>
+        </p:spPr>
+        <p:txBody>
+          <a:bodyPr wrap="square" lIns="0" tIns="0" rIns="0" bIns="0" rtlCol="0" anchor="t"/>
+          <a:lstStyle/>
+          <a:p>
+            <a:pPr indent="0" marL="0">
+              <a:lnSpc>
+                <a:spcPts val="1300"/>
+              </a:lnSpc>
+              <a:buNone/>
+            </a:pPr>
+            <a:r>
+              <a:rPr lang="en-US" sz="1100" dirty="0">
+                <a:solidFill>
+                  <a:srgbClr val="B4B7BD"/>
+                </a:solidFill>
+                <a:latin typeface="Calibri" pitchFamily="34" charset="0"/>
+                <a:ea typeface="Calibri" pitchFamily="34" charset="-122"/>
+                <a:cs typeface="Calibri" pitchFamily="34" charset="-120"/>
+              </a:rPr>
               <a:t>Tests 1 to 3 prove data is arriving and correct. Tests 4 to 7 prove the automation. Tests 8 and 9 prove fleet script execution — the only ones needing the Core REST API integration. Test 10 is the alert layout. Nothing here needs a Cortex XDR integration: XSIAM is the XDR, and its XQL engine is built in.</a:t>
             </a:r>
             <a:endParaRPr lang="en-US" sz="1100" dirty="0"/>
@@ -12834,13 +12915,13 @@
       </p:sp>
       <p:sp>
         <p:nvSpPr>
-          <p:cNvPr id="16" name="Text 14"/>
-          <p:cNvSpPr/>
-          <p:nvPr/>
-        </p:nvSpPr>
-        <p:spPr>
-          <a:xfrm>
-            <a:off x="548640" y="5623560"/>
+          <p:cNvPr id="18" name="Text 16"/>
+          <p:cNvSpPr/>
+          <p:nvPr/>
+        </p:nvSpPr>
+        <p:spPr>
+          <a:xfrm>
+            <a:off x="548640" y="6035040"/>
             <a:ext cx="11064240" cy="274320"/>
           </a:xfrm>
           <a:prstGeom prst="rect">

--- a/docs/KOI_Marketplace_Pack_Test_Guide.pptx
+++ b/docs/KOI_Marketplace_Pack_Test_Guide.pptx
@@ -20,9 +20,10 @@
     <p:sldId id="268" r:id="rId14"/>
     <p:sldId id="269" r:id="rId15"/>
     <p:sldId id="270" r:id="rId16"/>
+    <p:sldId id="271" r:id="rId17"/>
   </p:sldIdLst>
   <p:notesMasterIdLst>
-    <p:notesMasterId r:id="rId17"/>
+    <p:notesMasterId r:id="rId18"/>
   </p:notesMasterIdLst>
   <p:sldSz cx="12192000" cy="6858000"/>
   <p:notesSz cx="6858000" cy="12192000"/>
@@ -1068,6 +1069,94 @@
             <a:fld id="{F7021451-1387-4CA6-816F-3879F97B5CBC}" type="slidenum">
               <a:rPr lang="en-US"/>
               <a:t>15</a:t>
+            </a:fld>
+            <a:endParaRPr lang="en-US"/>
+          </a:p>
+        </p:txBody>
+      </p:sp>
+    </p:spTree>
+    <p:extLst>
+      <p:ext uri="{BB962C8B-B14F-4D97-AF65-F5344CB8AC3E}">
+        <p14:creationId xmlns:p14="http://schemas.microsoft.com/office/powerpoint/2010/main" val="1024086991"/>
+      </p:ext>
+    </p:extLst>
+  </p:cSld>
+  <p:clrMapOvr>
+    <a:masterClrMapping/>
+  </p:clrMapOvr>
+</p:notes>
+</file>
+
+<file path=ppt/notesSlides/notesSlide16.xml><?xml version="1.0" encoding="utf-8"?>
+<p:notes xmlns:a="http://schemas.openxmlformats.org/drawingml/2006/main" xmlns:r="http://schemas.openxmlformats.org/officeDocument/2006/relationships" xmlns:p="http://schemas.openxmlformats.org/presentationml/2006/main">
+  <p:cSld>
+    <p:spTree>
+      <p:nvGrpSpPr>
+        <p:cNvPr id="1" name=""/>
+        <p:cNvGrpSpPr/>
+        <p:nvPr/>
+      </p:nvGrpSpPr>
+      <p:grpSpPr>
+        <a:xfrm>
+          <a:off x="0" y="0"/>
+          <a:ext cx="0" cy="0"/>
+          <a:chOff x="0" y="0"/>
+          <a:chExt cx="0" cy="0"/>
+        </a:xfrm>
+      </p:grpSpPr>
+      <p:sp>
+        <p:nvSpPr>
+          <p:cNvPr id="2" name="Slide Image Placeholder 1"/>
+          <p:cNvSpPr>
+            <a:spLocks noGrp="1" noRot="1" noChangeAspect="1"/>
+          </p:cNvSpPr>
+          <p:nvPr>
+            <p:ph type="sldImg"/>
+          </p:nvPr>
+        </p:nvSpPr>
+        <p:spPr/>
+      </p:sp>
+      <p:sp>
+        <p:nvSpPr>
+          <p:cNvPr id="3" name="Notes Placeholder 2"/>
+          <p:cNvSpPr>
+            <a:spLocks noGrp="1"/>
+          </p:cNvSpPr>
+          <p:nvPr>
+            <p:ph type="body" idx="1"/>
+          </p:nvPr>
+        </p:nvSpPr>
+        <p:spPr/>
+        <p:txBody>
+          <a:bodyPr/>
+          <a:lstStyle/>
+          <a:p>
+            <a:r>
+              <a:rPr lang="en-US" dirty="0"/>
+              <a:t/>
+            </a:r>
+            <a:endParaRPr lang="en-US" dirty="0"/>
+          </a:p>
+        </p:txBody>
+      </p:sp>
+      <p:sp>
+        <p:nvSpPr>
+          <p:cNvPr id="4" name="Slide Number Placeholder 3"/>
+          <p:cNvSpPr>
+            <a:spLocks noGrp="1"/>
+          </p:cNvSpPr>
+          <p:nvPr>
+            <p:ph type="sldNum" sz="quarter" idx="10"/>
+          </p:nvPr>
+        </p:nvSpPr>
+        <p:spPr/>
+        <p:txBody>
+          <a:bodyPr/>
+          <a:lstStyle/>
+          <a:p>
+            <a:fld id="{F7021451-1387-4CA6-816F-3879F97B5CBC}" type="slidenum">
+              <a:rPr lang="en-US"/>
+              <a:t>16</a:t>
             </a:fld>
             <a:endParaRPr lang="en-US"/>
           </a:p>
@@ -5127,7 +5216,7 @@
                 <a:ea typeface="Calibri" pitchFamily="34" charset="-122"/>
                 <a:cs typeface="Calibri" pitchFamily="34" charset="-120"/>
               </a:rPr>
-              <a:t>TEST 8</a:t>
+              <a:t>TESTS 8 AND 9 — PREPARE</a:t>
             </a:r>
             <a:endParaRPr lang="en-US" sz="1100" dirty="0"/>
           </a:p>
@@ -5166,7 +5255,7 @@
                 <a:ea typeface="Calibri" pitchFamily="34" charset="-122"/>
                 <a:cs typeface="Calibri" pitchFamily="34" charset="-120"/>
               </a:rPr>
-              <a:t>Script Runner — refresh the tracker</a:t>
+              <a:t>Script Runner: everything this use case needs</a:t>
             </a:r>
             <a:endParaRPr lang="en-US" sz="3100" dirty="0"/>
           </a:p>
@@ -5180,12 +5269,393 @@
         </p:nvSpPr>
         <p:spPr>
           <a:xfrm>
-            <a:off x="548640" y="1280160"/>
-            <a:ext cx="11064240" cy="1769364"/>
+            <a:off x="548640" y="1298448"/>
+            <a:ext cx="5943600" cy="2788920"/>
           </a:xfrm>
           <a:prstGeom prst="roundRect">
             <a:avLst>
-              <a:gd name="adj" fmla="val 2584"/>
+              <a:gd name="adj" fmla="val 1639"/>
+            </a:avLst>
+          </a:prstGeom>
+          <a:solidFill>
+            <a:srgbClr val="15171B"/>
+          </a:solidFill>
+          <a:ln w="12700">
+            <a:solidFill>
+              <a:srgbClr val="15171B"/>
+            </a:solidFill>
+            <a:prstDash val="solid"/>
+          </a:ln>
+        </p:spPr>
+      </p:sp>
+      <p:sp>
+        <p:nvSpPr>
+          <p:cNvPr id="5" name="Text 3"/>
+          <p:cNvSpPr/>
+          <p:nvPr/>
+        </p:nvSpPr>
+        <p:spPr>
+          <a:xfrm>
+            <a:off x="822960" y="1463040"/>
+            <a:ext cx="5394960" cy="237744"/>
+          </a:xfrm>
+          <a:prstGeom prst="rect">
+            <a:avLst/>
+          </a:prstGeom>
+          <a:noFill/>
+          <a:ln/>
+        </p:spPr>
+        <p:txBody>
+          <a:bodyPr wrap="square" lIns="0" tIns="0" rIns="0" bIns="0" rtlCol="0" anchor="t"/>
+          <a:lstStyle/>
+          <a:p>
+            <a:pPr indent="0" marL="0">
+              <a:buNone/>
+            </a:pPr>
+            <a:r>
+              <a:rPr lang="en-US" sz="1050" b="1" spc="100" kern="0" dirty="0">
+                <a:solidFill>
+                  <a:srgbClr val="22D3EE"/>
+                </a:solidFill>
+                <a:latin typeface="Calibri" pitchFamily="34" charset="0"/>
+                <a:ea typeface="Calibri" pitchFamily="34" charset="-122"/>
+                <a:cs typeface="Calibri" pitchFamily="34" charset="-120"/>
+              </a:rPr>
+              <a:t>PACK CONTENT — all of it</a:t>
+            </a:r>
+            <a:endParaRPr lang="en-US" sz="1050" dirty="0"/>
+          </a:p>
+        </p:txBody>
+      </p:sp>
+      <p:sp>
+        <p:nvSpPr>
+          <p:cNvPr id="6" name="Text 4"/>
+          <p:cNvSpPr/>
+          <p:nvPr/>
+        </p:nvSpPr>
+        <p:spPr>
+          <a:xfrm>
+            <a:off x="822960" y="1755648"/>
+            <a:ext cx="5394960" cy="219456"/>
+          </a:xfrm>
+          <a:prstGeom prst="rect">
+            <a:avLst/>
+          </a:prstGeom>
+          <a:noFill/>
+          <a:ln/>
+        </p:spPr>
+        <p:txBody>
+          <a:bodyPr wrap="square" lIns="0" tIns="0" rIns="0" bIns="0" rtlCol="0" anchor="t"/>
+          <a:lstStyle/>
+          <a:p>
+            <a:pPr indent="0" marL="0">
+              <a:buNone/>
+            </a:pPr>
+            <a:r>
+              <a:rPr lang="en-US" sz="1000" i="1" dirty="0">
+                <a:solidFill>
+                  <a:srgbClr val="6E747E"/>
+                </a:solidFill>
+                <a:latin typeface="Calibri" pitchFamily="34" charset="0"/>
+                <a:ea typeface="Calibri" pitchFamily="34" charset="-122"/>
+                <a:cs typeface="Calibri" pitchFamily="34" charset="-120"/>
+              </a:rPr>
+              <a:t>Five playbooks — import child before parent:</a:t>
+            </a:r>
+            <a:endParaRPr lang="en-US" sz="1000" dirty="0"/>
+          </a:p>
+        </p:txBody>
+      </p:sp>
+      <p:sp>
+        <p:nvSpPr>
+          <p:cNvPr id="7" name="Text 5"/>
+          <p:cNvSpPr/>
+          <p:nvPr/>
+        </p:nvSpPr>
+        <p:spPr>
+          <a:xfrm>
+            <a:off x="932688" y="2011680"/>
+            <a:ext cx="5303520" cy="219456"/>
+          </a:xfrm>
+          <a:prstGeom prst="rect">
+            <a:avLst/>
+          </a:prstGeom>
+          <a:noFill/>
+          <a:ln/>
+        </p:spPr>
+        <p:txBody>
+          <a:bodyPr wrap="square" lIns="0" tIns="0" rIns="0" bIns="0" rtlCol="0" anchor="t"/>
+          <a:lstStyle/>
+          <a:p>
+            <a:pPr indent="0" marL="0">
+              <a:buNone/>
+            </a:pPr>
+            <a:r>
+              <a:rPr lang="en-US" sz="1050" dirty="0">
+                <a:solidFill>
+                  <a:srgbClr val="B4B7BD"/>
+                </a:solidFill>
+                <a:latin typeface="Calibri" pitchFamily="34" charset="0"/>
+                <a:ea typeface="Calibri" pitchFamily="34" charset="-122"/>
+                <a:cs typeface="Calibri" pitchFamily="34" charset="-120"/>
+              </a:rPr>
+              <a:t>1  KOI Ext Script Runner - Execute Endpoint Script</a:t>
+            </a:r>
+            <a:endParaRPr lang="en-US" sz="1050" dirty="0"/>
+          </a:p>
+        </p:txBody>
+      </p:sp>
+      <p:sp>
+        <p:nvSpPr>
+          <p:cNvPr id="8" name="Text 6"/>
+          <p:cNvSpPr/>
+          <p:nvPr/>
+        </p:nvSpPr>
+        <p:spPr>
+          <a:xfrm>
+            <a:off x="932688" y="2235708"/>
+            <a:ext cx="5303520" cy="219456"/>
+          </a:xfrm>
+          <a:prstGeom prst="rect">
+            <a:avLst/>
+          </a:prstGeom>
+          <a:noFill/>
+          <a:ln/>
+        </p:spPr>
+        <p:txBody>
+          <a:bodyPr wrap="square" lIns="0" tIns="0" rIns="0" bIns="0" rtlCol="0" anchor="t"/>
+          <a:lstStyle/>
+          <a:p>
+            <a:pPr indent="0" marL="0">
+              <a:buNone/>
+            </a:pPr>
+            <a:r>
+              <a:rPr lang="en-US" sz="1050" dirty="0">
+                <a:solidFill>
+                  <a:srgbClr val="B4B7BD"/>
+                </a:solidFill>
+                <a:latin typeface="Calibri" pitchFamily="34" charset="0"/>
+                <a:ea typeface="Calibri" pitchFamily="34" charset="-122"/>
+                <a:cs typeface="Calibri" pitchFamily="34" charset="-120"/>
+              </a:rPr>
+              <a:t>2  KOI Ext Script Runner - Process Config Entry</a:t>
+            </a:r>
+            <a:endParaRPr lang="en-US" sz="1050" dirty="0"/>
+          </a:p>
+        </p:txBody>
+      </p:sp>
+      <p:sp>
+        <p:nvSpPr>
+          <p:cNvPr id="9" name="Text 7"/>
+          <p:cNvSpPr/>
+          <p:nvPr/>
+        </p:nvSpPr>
+        <p:spPr>
+          <a:xfrm>
+            <a:off x="932688" y="2459736"/>
+            <a:ext cx="5303520" cy="219456"/>
+          </a:xfrm>
+          <a:prstGeom prst="rect">
+            <a:avLst/>
+          </a:prstGeom>
+          <a:noFill/>
+          <a:ln/>
+        </p:spPr>
+        <p:txBody>
+          <a:bodyPr wrap="square" lIns="0" tIns="0" rIns="0" bIns="0" rtlCol="0" anchor="t"/>
+          <a:lstStyle/>
+          <a:p>
+            <a:pPr indent="0" marL="0">
+              <a:buNone/>
+            </a:pPr>
+            <a:r>
+              <a:rPr lang="en-US" sz="1050" dirty="0">
+                <a:solidFill>
+                  <a:srgbClr val="B4B7BD"/>
+                </a:solidFill>
+                <a:latin typeface="Calibri" pitchFamily="34" charset="0"/>
+                <a:ea typeface="Calibri" pitchFamily="34" charset="-122"/>
+                <a:cs typeface="Calibri" pitchFamily="34" charset="-120"/>
+              </a:rPr>
+              <a:t>3  KOI Ext Script Runner - Refresh Entry</a:t>
+            </a:r>
+            <a:endParaRPr lang="en-US" sz="1050" dirty="0"/>
+          </a:p>
+        </p:txBody>
+      </p:sp>
+      <p:sp>
+        <p:nvSpPr>
+          <p:cNvPr id="10" name="Text 8"/>
+          <p:cNvSpPr/>
+          <p:nvPr/>
+        </p:nvSpPr>
+        <p:spPr>
+          <a:xfrm>
+            <a:off x="932688" y="2683764"/>
+            <a:ext cx="5303520" cy="219456"/>
+          </a:xfrm>
+          <a:prstGeom prst="rect">
+            <a:avLst/>
+          </a:prstGeom>
+          <a:noFill/>
+          <a:ln/>
+        </p:spPr>
+        <p:txBody>
+          <a:bodyPr wrap="square" lIns="0" tIns="0" rIns="0" bIns="0" rtlCol="0" anchor="t"/>
+          <a:lstStyle/>
+          <a:p>
+            <a:pPr indent="0" marL="0">
+              <a:buNone/>
+            </a:pPr>
+            <a:r>
+              <a:rPr lang="en-US" sz="1050" dirty="0">
+                <a:solidFill>
+                  <a:srgbClr val="B4B7BD"/>
+                </a:solidFill>
+                <a:latin typeface="Calibri" pitchFamily="34" charset="0"/>
+                <a:ea typeface="Calibri" pitchFamily="34" charset="-122"/>
+                <a:cs typeface="Calibri" pitchFamily="34" charset="-120"/>
+              </a:rPr>
+              <a:t>4  KOI Ext Script Runner - Refresh Job</a:t>
+            </a:r>
+            <a:endParaRPr lang="en-US" sz="1050" dirty="0"/>
+          </a:p>
+        </p:txBody>
+      </p:sp>
+      <p:sp>
+        <p:nvSpPr>
+          <p:cNvPr id="11" name="Text 9"/>
+          <p:cNvSpPr/>
+          <p:nvPr/>
+        </p:nvSpPr>
+        <p:spPr>
+          <a:xfrm>
+            <a:off x="932688" y="2907792"/>
+            <a:ext cx="5303520" cy="219456"/>
+          </a:xfrm>
+          <a:prstGeom prst="rect">
+            <a:avLst/>
+          </a:prstGeom>
+          <a:noFill/>
+          <a:ln/>
+        </p:spPr>
+        <p:txBody>
+          <a:bodyPr wrap="square" lIns="0" tIns="0" rIns="0" bIns="0" rtlCol="0" anchor="t"/>
+          <a:lstStyle/>
+          <a:p>
+            <a:pPr indent="0" marL="0">
+              <a:buNone/>
+            </a:pPr>
+            <a:r>
+              <a:rPr lang="en-US" sz="1050" dirty="0">
+                <a:solidFill>
+                  <a:srgbClr val="B4B7BD"/>
+                </a:solidFill>
+                <a:latin typeface="Calibri" pitchFamily="34" charset="0"/>
+                <a:ea typeface="Calibri" pitchFamily="34" charset="-122"/>
+                <a:cs typeface="Calibri" pitchFamily="34" charset="-120"/>
+              </a:rPr>
+              <a:t>5  KOI Ext Script Runner - Scan Job</a:t>
+            </a:r>
+            <a:endParaRPr lang="en-US" sz="1050" dirty="0"/>
+          </a:p>
+        </p:txBody>
+      </p:sp>
+      <p:sp>
+        <p:nvSpPr>
+          <p:cNvPr id="12" name="Text 10"/>
+          <p:cNvSpPr/>
+          <p:nvPr/>
+        </p:nvSpPr>
+        <p:spPr>
+          <a:xfrm>
+            <a:off x="822960" y="3200400"/>
+            <a:ext cx="914400" cy="219456"/>
+          </a:xfrm>
+          <a:prstGeom prst="rect">
+            <a:avLst/>
+          </a:prstGeom>
+          <a:noFill/>
+          <a:ln/>
+        </p:spPr>
+        <p:txBody>
+          <a:bodyPr wrap="square" lIns="0" tIns="0" rIns="0" bIns="0" rtlCol="0" anchor="t"/>
+          <a:lstStyle/>
+          <a:p>
+            <a:pPr indent="0" marL="0">
+              <a:buNone/>
+            </a:pPr>
+            <a:r>
+              <a:rPr lang="en-US" sz="1000" i="1" dirty="0">
+                <a:solidFill>
+                  <a:srgbClr val="6E747E"/>
+                </a:solidFill>
+                <a:latin typeface="Calibri" pitchFamily="34" charset="0"/>
+                <a:ea typeface="Calibri" pitchFamily="34" charset="-122"/>
+                <a:cs typeface="Calibri" pitchFamily="34" charset="-120"/>
+              </a:rPr>
+              <a:t>Plus:</a:t>
+            </a:r>
+            <a:endParaRPr lang="en-US" sz="1000" dirty="0"/>
+          </a:p>
+        </p:txBody>
+      </p:sp>
+      <p:sp>
+        <p:nvSpPr>
+          <p:cNvPr id="13" name="Text 11"/>
+          <p:cNvSpPr/>
+          <p:nvPr/>
+        </p:nvSpPr>
+        <p:spPr>
+          <a:xfrm>
+            <a:off x="932688" y="3419856"/>
+            <a:ext cx="5303520" cy="566928"/>
+          </a:xfrm>
+          <a:prstGeom prst="rect">
+            <a:avLst/>
+          </a:prstGeom>
+          <a:noFill/>
+          <a:ln/>
+        </p:spPr>
+        <p:txBody>
+          <a:bodyPr wrap="square" lIns="0" tIns="0" rIns="0" bIns="0" rtlCol="0" anchor="t"/>
+          <a:lstStyle/>
+          <a:p>
+            <a:pPr indent="0" marL="0">
+              <a:lnSpc>
+                <a:spcPts val="1200"/>
+              </a:lnSpc>
+              <a:buNone/>
+            </a:pPr>
+            <a:r>
+              <a:rPr lang="en-US" sz="1050" dirty="0">
+                <a:solidFill>
+                  <a:srgbClr val="B4B7BD"/>
+                </a:solidFill>
+                <a:latin typeface="Calibri" pitchFamily="34" charset="0"/>
+                <a:ea typeface="Calibri" pitchFamily="34" charset="-122"/>
+                <a:cs typeface="Calibri" pitchFamily="34" charset="-120"/>
+              </a:rPr>
+              <a:t>KoiScanTracker — an automation, not a playbook. Ours, and different from the KOI deployment script opposite. For manual upload use dist/automation-KoiScanTracker.yml (one file).</a:t>
+            </a:r>
+            <a:endParaRPr lang="en-US" sz="1050" dirty="0"/>
+          </a:p>
+        </p:txBody>
+      </p:sp>
+      <p:sp>
+        <p:nvSpPr>
+          <p:cNvPr id="14" name="Shape 12"/>
+          <p:cNvSpPr/>
+          <p:nvPr/>
+        </p:nvSpPr>
+        <p:spPr>
+          <a:xfrm>
+            <a:off x="6858000" y="1298448"/>
+            <a:ext cx="4754880" cy="2788920"/>
+          </a:xfrm>
+          <a:prstGeom prst="roundRect">
+            <a:avLst>
+              <a:gd name="adj" fmla="val 1639"/>
             </a:avLst>
           </a:prstGeom>
           <a:solidFill>
@@ -5201,92 +5671,92 @@
       </p:sp>
       <p:sp>
         <p:nvSpPr>
-          <p:cNvPr id="5" name="Text 3"/>
-          <p:cNvSpPr/>
-          <p:nvPr/>
-        </p:nvSpPr>
-        <p:spPr>
-          <a:xfrm>
-            <a:off x="804672" y="1408176"/>
-            <a:ext cx="1463040" cy="201168"/>
-          </a:xfrm>
-          <a:prstGeom prst="rect">
-            <a:avLst/>
-          </a:prstGeom>
-          <a:noFill/>
-          <a:ln/>
-        </p:spPr>
-        <p:txBody>
-          <a:bodyPr wrap="square" lIns="0" tIns="0" rIns="0" bIns="0" rtlCol="0" anchor="t"/>
-          <a:lstStyle/>
-          <a:p>
-            <a:pPr indent="0" marL="0">
-              <a:buNone/>
-            </a:pPr>
-            <a:r>
-              <a:rPr lang="en-US" sz="900" b="1" spc="100" kern="0" dirty="0">
-                <a:solidFill>
-                  <a:srgbClr val="22D3EE"/>
-                </a:solidFill>
-                <a:latin typeface="Calibri" pitchFamily="34" charset="0"/>
-                <a:ea typeface="Calibri" pitchFamily="34" charset="-122"/>
-                <a:cs typeface="Calibri" pitchFamily="34" charset="-120"/>
-              </a:rPr>
-              <a:t>PACK CONTENT</a:t>
-            </a:r>
-            <a:endParaRPr lang="en-US" sz="900" dirty="0"/>
-          </a:p>
-        </p:txBody>
-      </p:sp>
-      <p:sp>
-        <p:nvSpPr>
-          <p:cNvPr id="6" name="Text 4"/>
-          <p:cNvSpPr/>
-          <p:nvPr/>
-        </p:nvSpPr>
-        <p:spPr>
-          <a:xfrm>
-            <a:off x="2139696" y="1408176"/>
-            <a:ext cx="128016" cy="201168"/>
-          </a:xfrm>
-          <a:prstGeom prst="rect">
-            <a:avLst/>
-          </a:prstGeom>
-          <a:noFill/>
-          <a:ln/>
-        </p:spPr>
-        <p:txBody>
-          <a:bodyPr wrap="square" lIns="0" tIns="0" rIns="0" bIns="0" rtlCol="0" anchor="t"/>
-          <a:lstStyle/>
-          <a:p>
-            <a:pPr indent="0" marL="0">
-              <a:buNone/>
-            </a:pPr>
-            <a:r>
-              <a:rPr lang="en-US" sz="1000" b="1" dirty="0">
-                <a:solidFill>
-                  <a:srgbClr val="22D3EE"/>
-                </a:solidFill>
-                <a:latin typeface="Calibri" pitchFamily="34" charset="0"/>
-                <a:ea typeface="Calibri" pitchFamily="34" charset="-122"/>
-                <a:cs typeface="Calibri" pitchFamily="34" charset="-120"/>
-              </a:rPr>
-              <a:t>•</a:t>
-            </a:r>
-            <a:endParaRPr lang="en-US" sz="1000" dirty="0"/>
-          </a:p>
-        </p:txBody>
-      </p:sp>
-      <p:sp>
-        <p:nvSpPr>
-          <p:cNvPr id="7" name="Text 5"/>
-          <p:cNvSpPr/>
-          <p:nvPr/>
-        </p:nvSpPr>
-        <p:spPr>
-          <a:xfrm>
-            <a:off x="2286000" y="1408176"/>
-            <a:ext cx="4343400" cy="192024"/>
+          <p:cNvPr id="15" name="Text 13"/>
+          <p:cNvSpPr/>
+          <p:nvPr/>
+        </p:nvSpPr>
+        <p:spPr>
+          <a:xfrm>
+            <a:off x="7132320" y="1463040"/>
+            <a:ext cx="4206240" cy="237744"/>
+          </a:xfrm>
+          <a:prstGeom prst="rect">
+            <a:avLst/>
+          </a:prstGeom>
+          <a:noFill/>
+          <a:ln/>
+        </p:spPr>
+        <p:txBody>
+          <a:bodyPr wrap="square" lIns="0" tIns="0" rIns="0" bIns="0" rtlCol="0" anchor="t"/>
+          <a:lstStyle/>
+          <a:p>
+            <a:pPr indent="0" marL="0">
+              <a:buNone/>
+            </a:pPr>
+            <a:r>
+              <a:rPr lang="en-US" sz="1050" b="1" spc="100" kern="0" dirty="0">
+                <a:solidFill>
+                  <a:srgbClr val="F5A524"/>
+                </a:solidFill>
+                <a:latin typeface="Calibri" pitchFamily="34" charset="0"/>
+                <a:ea typeface="Calibri" pitchFamily="34" charset="-122"/>
+                <a:cs typeface="Calibri" pitchFamily="34" charset="-120"/>
+              </a:rPr>
+              <a:t>TENANT SETUP</a:t>
+            </a:r>
+            <a:endParaRPr lang="en-US" sz="1050" dirty="0"/>
+          </a:p>
+        </p:txBody>
+      </p:sp>
+      <p:sp>
+        <p:nvSpPr>
+          <p:cNvPr id="16" name="Text 14"/>
+          <p:cNvSpPr/>
+          <p:nvPr/>
+        </p:nvSpPr>
+        <p:spPr>
+          <a:xfrm>
+            <a:off x="7168896" y="1773936"/>
+            <a:ext cx="219456" cy="256032"/>
+          </a:xfrm>
+          <a:prstGeom prst="rect">
+            <a:avLst/>
+          </a:prstGeom>
+          <a:noFill/>
+          <a:ln/>
+        </p:spPr>
+        <p:txBody>
+          <a:bodyPr wrap="square" lIns="0" tIns="0" rIns="0" bIns="0" rtlCol="0" anchor="t"/>
+          <a:lstStyle/>
+          <a:p>
+            <a:pPr indent="0" marL="0">
+              <a:buNone/>
+            </a:pPr>
+            <a:r>
+              <a:rPr lang="en-US" sz="1150" b="1" dirty="0">
+                <a:solidFill>
+                  <a:srgbClr val="3FB950"/>
+                </a:solidFill>
+                <a:latin typeface="Calibri" pitchFamily="34" charset="0"/>
+                <a:ea typeface="Calibri" pitchFamily="34" charset="-122"/>
+                <a:cs typeface="Calibri" pitchFamily="34" charset="-120"/>
+              </a:rPr>
+              <a:t>✓</a:t>
+            </a:r>
+            <a:endParaRPr lang="en-US" sz="1150" dirty="0"/>
+          </a:p>
+        </p:txBody>
+      </p:sp>
+      <p:sp>
+        <p:nvSpPr>
+          <p:cNvPr id="17" name="Text 15"/>
+          <p:cNvSpPr/>
+          <p:nvPr/>
+        </p:nvSpPr>
+        <p:spPr>
+          <a:xfrm>
+            <a:off x="7461504" y="1773936"/>
+            <a:ext cx="3840480" cy="438912"/>
           </a:xfrm>
           <a:prstGeom prst="rect">
             <a:avLst/>
@@ -5300,12 +5770,12 @@
           <a:p>
             <a:pPr indent="0" marL="0">
               <a:lnSpc>
-                <a:spcPts val="1200"/>
+                <a:spcPts val="1500"/>
               </a:lnSpc>
               <a:buNone/>
             </a:pPr>
             <a:r>
-              <a:rPr lang="en-US" sz="1000" dirty="0">
+              <a:rPr lang="en-US" sz="1150" dirty="0">
                 <a:solidFill>
                   <a:srgbClr val="B4B7BD"/>
                 </a:solidFill>
@@ -5313,61 +5783,61 @@
                 <a:ea typeface="Calibri" pitchFamily="34" charset="-122"/>
                 <a:cs typeface="Calibri" pitchFamily="34" charset="-120"/>
               </a:rPr>
-              <a:t>KOI Ext Script Runner - Refresh Job</a:t>
-            </a:r>
-            <a:endParaRPr lang="en-US" sz="1000" dirty="0"/>
-          </a:p>
-        </p:txBody>
-      </p:sp>
-      <p:sp>
-        <p:nvSpPr>
-          <p:cNvPr id="8" name="Text 6"/>
-          <p:cNvSpPr/>
-          <p:nvPr/>
-        </p:nvSpPr>
-        <p:spPr>
-          <a:xfrm>
-            <a:off x="2139696" y="1632204"/>
-            <a:ext cx="128016" cy="201168"/>
-          </a:xfrm>
-          <a:prstGeom prst="rect">
-            <a:avLst/>
-          </a:prstGeom>
-          <a:noFill/>
-          <a:ln/>
-        </p:spPr>
-        <p:txBody>
-          <a:bodyPr wrap="square" lIns="0" tIns="0" rIns="0" bIns="0" rtlCol="0" anchor="t"/>
-          <a:lstStyle/>
-          <a:p>
-            <a:pPr indent="0" marL="0">
-              <a:buNone/>
-            </a:pPr>
-            <a:r>
-              <a:rPr lang="en-US" sz="1000" b="1" dirty="0">
-                <a:solidFill>
-                  <a:srgbClr val="22D3EE"/>
-                </a:solidFill>
-                <a:latin typeface="Calibri" pitchFamily="34" charset="0"/>
-                <a:ea typeface="Calibri" pitchFamily="34" charset="-122"/>
-                <a:cs typeface="Calibri" pitchFamily="34" charset="-120"/>
-              </a:rPr>
-              <a:t>•</a:t>
-            </a:r>
-            <a:endParaRPr lang="en-US" sz="1000" dirty="0"/>
-          </a:p>
-        </p:txBody>
-      </p:sp>
-      <p:sp>
-        <p:nvSpPr>
-          <p:cNvPr id="9" name="Text 7"/>
-          <p:cNvSpPr/>
-          <p:nvPr/>
-        </p:nvSpPr>
-        <p:spPr>
-          <a:xfrm>
-            <a:off x="2286000" y="1632204"/>
-            <a:ext cx="4343400" cy="192024"/>
+              <a:t>Core REST API integration instance — the Refresh job reads endpoint groups through it.</a:t>
+            </a:r>
+            <a:endParaRPr lang="en-US" sz="1150" dirty="0"/>
+          </a:p>
+        </p:txBody>
+      </p:sp>
+      <p:sp>
+        <p:nvSpPr>
+          <p:cNvPr id="18" name="Text 16"/>
+          <p:cNvSpPr/>
+          <p:nvPr/>
+        </p:nvSpPr>
+        <p:spPr>
+          <a:xfrm>
+            <a:off x="7168896" y="2290572"/>
+            <a:ext cx="219456" cy="256032"/>
+          </a:xfrm>
+          <a:prstGeom prst="rect">
+            <a:avLst/>
+          </a:prstGeom>
+          <a:noFill/>
+          <a:ln/>
+        </p:spPr>
+        <p:txBody>
+          <a:bodyPr wrap="square" lIns="0" tIns="0" rIns="0" bIns="0" rtlCol="0" anchor="t"/>
+          <a:lstStyle/>
+          <a:p>
+            <a:pPr indent="0" marL="0">
+              <a:buNone/>
+            </a:pPr>
+            <a:r>
+              <a:rPr lang="en-US" sz="1150" b="1" dirty="0">
+                <a:solidFill>
+                  <a:srgbClr val="3FB950"/>
+                </a:solidFill>
+                <a:latin typeface="Calibri" pitchFamily="34" charset="0"/>
+                <a:ea typeface="Calibri" pitchFamily="34" charset="-122"/>
+                <a:cs typeface="Calibri" pitchFamily="34" charset="-120"/>
+              </a:rPr>
+              <a:t>✓</a:t>
+            </a:r>
+            <a:endParaRPr lang="en-US" sz="1150" dirty="0"/>
+          </a:p>
+        </p:txBody>
+      </p:sp>
+      <p:sp>
+        <p:nvSpPr>
+          <p:cNvPr id="19" name="Text 17"/>
+          <p:cNvSpPr/>
+          <p:nvPr/>
+        </p:nvSpPr>
+        <p:spPr>
+          <a:xfrm>
+            <a:off x="7461504" y="2290572"/>
+            <a:ext cx="3840480" cy="822960"/>
           </a:xfrm>
           <a:prstGeom prst="rect">
             <a:avLst/>
@@ -5381,12 +5851,12 @@
           <a:p>
             <a:pPr indent="0" marL="0">
               <a:lnSpc>
-                <a:spcPts val="1200"/>
+                <a:spcPts val="1500"/>
               </a:lnSpc>
               <a:buNone/>
             </a:pPr>
             <a:r>
-              <a:rPr lang="en-US" sz="1000" dirty="0">
+              <a:rPr lang="en-US" sz="1150" dirty="0">
                 <a:solidFill>
                   <a:srgbClr val="B4B7BD"/>
                 </a:solidFill>
@@ -5394,61 +5864,61 @@
                 <a:ea typeface="Calibri" pitchFamily="34" charset="-122"/>
                 <a:cs typeface="Calibri" pitchFamily="34" charset="-120"/>
               </a:rPr>
-              <a:t>KOI Ext Script Runner - Refresh Entry</a:t>
-            </a:r>
-            <a:endParaRPr lang="en-US" sz="1000" dirty="0"/>
-          </a:p>
-        </p:txBody>
-      </p:sp>
-      <p:sp>
-        <p:nvSpPr>
-          <p:cNvPr id="10" name="Text 8"/>
-          <p:cNvSpPr/>
-          <p:nvPr/>
-        </p:nvSpPr>
-        <p:spPr>
-          <a:xfrm>
-            <a:off x="2139696" y="1856232"/>
-            <a:ext cx="128016" cy="201168"/>
-          </a:xfrm>
-          <a:prstGeom prst="rect">
-            <a:avLst/>
-          </a:prstGeom>
-          <a:noFill/>
-          <a:ln/>
-        </p:spPr>
-        <p:txBody>
-          <a:bodyPr wrap="square" lIns="0" tIns="0" rIns="0" bIns="0" rtlCol="0" anchor="t"/>
-          <a:lstStyle/>
-          <a:p>
-            <a:pPr indent="0" marL="0">
-              <a:buNone/>
-            </a:pPr>
-            <a:r>
-              <a:rPr lang="en-US" sz="1000" b="1" dirty="0">
-                <a:solidFill>
-                  <a:srgbClr val="22D3EE"/>
-                </a:solidFill>
-                <a:latin typeface="Calibri" pitchFamily="34" charset="0"/>
-                <a:ea typeface="Calibri" pitchFamily="34" charset="-122"/>
-                <a:cs typeface="Calibri" pitchFamily="34" charset="-120"/>
-              </a:rPr>
-              <a:t>•</a:t>
-            </a:r>
-            <a:endParaRPr lang="en-US" sz="1000" dirty="0"/>
-          </a:p>
-        </p:txBody>
-      </p:sp>
-      <p:sp>
-        <p:nvSpPr>
-          <p:cNvPr id="11" name="Text 9"/>
-          <p:cNvSpPr/>
-          <p:nvPr/>
-        </p:nvSpPr>
-        <p:spPr>
-          <a:xfrm>
-            <a:off x="2286000" y="1856232"/>
-            <a:ext cx="4343400" cy="192024"/>
+              <a:t>The KOI deployment script in Action Center → Scripts Library. Download it from YOUR KOI console; it is KOI's script, not a Cortex one, and must take no parameters.</a:t>
+            </a:r>
+            <a:endParaRPr lang="en-US" sz="1150" dirty="0"/>
+          </a:p>
+        </p:txBody>
+      </p:sp>
+      <p:sp>
+        <p:nvSpPr>
+          <p:cNvPr id="20" name="Text 18"/>
+          <p:cNvSpPr/>
+          <p:nvPr/>
+        </p:nvSpPr>
+        <p:spPr>
+          <a:xfrm>
+            <a:off x="7168896" y="3182112"/>
+            <a:ext cx="219456" cy="256032"/>
+          </a:xfrm>
+          <a:prstGeom prst="rect">
+            <a:avLst/>
+          </a:prstGeom>
+          <a:noFill/>
+          <a:ln/>
+        </p:spPr>
+        <p:txBody>
+          <a:bodyPr wrap="square" lIns="0" tIns="0" rIns="0" bIns="0" rtlCol="0" anchor="t"/>
+          <a:lstStyle/>
+          <a:p>
+            <a:pPr indent="0" marL="0">
+              <a:buNone/>
+            </a:pPr>
+            <a:r>
+              <a:rPr lang="en-US" sz="1150" b="1" dirty="0">
+                <a:solidFill>
+                  <a:srgbClr val="3FB950"/>
+                </a:solidFill>
+                <a:latin typeface="Calibri" pitchFamily="34" charset="0"/>
+                <a:ea typeface="Calibri" pitchFamily="34" charset="-122"/>
+                <a:cs typeface="Calibri" pitchFamily="34" charset="-120"/>
+              </a:rPr>
+              <a:t>✓</a:t>
+            </a:r>
+            <a:endParaRPr lang="en-US" sz="1150" dirty="0"/>
+          </a:p>
+        </p:txBody>
+      </p:sp>
+      <p:sp>
+        <p:nvSpPr>
+          <p:cNvPr id="21" name="Text 19"/>
+          <p:cNvSpPr/>
+          <p:nvPr/>
+        </p:nvSpPr>
+        <p:spPr>
+          <a:xfrm>
+            <a:off x="7461504" y="3182112"/>
+            <a:ext cx="3840480" cy="438912"/>
           </a:xfrm>
           <a:prstGeom prst="rect">
             <a:avLst/>
@@ -5462,12 +5932,12 @@
           <a:p>
             <a:pPr indent="0" marL="0">
               <a:lnSpc>
-                <a:spcPts val="1200"/>
+                <a:spcPts val="1500"/>
               </a:lnSpc>
               <a:buNone/>
             </a:pPr>
             <a:r>
-              <a:rPr lang="en-US" sz="1000" dirty="0">
+              <a:rPr lang="en-US" sz="1150" dirty="0">
                 <a:solidFill>
                   <a:srgbClr val="B4B7BD"/>
                 </a:solidFill>
@@ -5475,470 +5945,26 @@
                 <a:ea typeface="Calibri" pitchFamily="34" charset="-122"/>
                 <a:cs typeface="Calibri" pitchFamily="34" charset="-120"/>
               </a:rPr>
-              <a:t>KoiScanTracker  (our automation — not the KOI script)</a:t>
-            </a:r>
-            <a:endParaRPr lang="en-US" sz="1000" dirty="0"/>
-          </a:p>
-        </p:txBody>
-      </p:sp>
-      <p:sp>
-        <p:nvSpPr>
-          <p:cNvPr id="12" name="Text 10"/>
-          <p:cNvSpPr/>
-          <p:nvPr/>
-        </p:nvSpPr>
-        <p:spPr>
-          <a:xfrm>
-            <a:off x="2139696" y="2080260"/>
-            <a:ext cx="128016" cy="201168"/>
-          </a:xfrm>
-          <a:prstGeom prst="rect">
-            <a:avLst/>
-          </a:prstGeom>
-          <a:noFill/>
-          <a:ln/>
-        </p:spPr>
-        <p:txBody>
-          <a:bodyPr wrap="square" lIns="0" tIns="0" rIns="0" bIns="0" rtlCol="0" anchor="t"/>
-          <a:lstStyle/>
-          <a:p>
-            <a:pPr indent="0" marL="0">
-              <a:buNone/>
-            </a:pPr>
-            <a:r>
-              <a:rPr lang="en-US" sz="1000" b="1" dirty="0">
-                <a:solidFill>
-                  <a:srgbClr val="22D3EE"/>
-                </a:solidFill>
-                <a:latin typeface="Calibri" pitchFamily="34" charset="0"/>
-                <a:ea typeface="Calibri" pitchFamily="34" charset="-122"/>
-                <a:cs typeface="Calibri" pitchFamily="34" charset="-120"/>
-              </a:rPr>
-              <a:t>•</a:t>
-            </a:r>
-            <a:endParaRPr lang="en-US" sz="1000" dirty="0"/>
-          </a:p>
-        </p:txBody>
-      </p:sp>
-      <p:sp>
-        <p:nvSpPr>
-          <p:cNvPr id="13" name="Text 11"/>
-          <p:cNvSpPr/>
-          <p:nvPr/>
-        </p:nvSpPr>
-        <p:spPr>
-          <a:xfrm>
-            <a:off x="2286000" y="2080260"/>
-            <a:ext cx="4343400" cy="192024"/>
-          </a:xfrm>
-          <a:prstGeom prst="rect">
-            <a:avLst/>
-          </a:prstGeom>
-          <a:noFill/>
-          <a:ln/>
-        </p:spPr>
-        <p:txBody>
-          <a:bodyPr wrap="square" lIns="0" tIns="0" rIns="0" bIns="0" rtlCol="0" anchor="t"/>
-          <a:lstStyle/>
-          <a:p>
-            <a:pPr indent="0" marL="0">
-              <a:lnSpc>
-                <a:spcPts val="1200"/>
-              </a:lnSpc>
-              <a:buNone/>
-            </a:pPr>
-            <a:r>
-              <a:rPr lang="en-US" sz="1000" dirty="0">
-                <a:solidFill>
-                  <a:srgbClr val="B4B7BD"/>
-                </a:solidFill>
-                <a:latin typeface="Calibri" pitchFamily="34" charset="0"/>
-                <a:ea typeface="Calibri" pitchFamily="34" charset="-122"/>
-                <a:cs typeface="Calibri" pitchFamily="34" charset="-120"/>
-              </a:rPr>
-              <a:t>List: Koi Script Runner</a:t>
-            </a:r>
-            <a:endParaRPr lang="en-US" sz="1000" dirty="0"/>
-          </a:p>
-        </p:txBody>
-      </p:sp>
-      <p:sp>
-        <p:nvSpPr>
-          <p:cNvPr id="14" name="Text 12"/>
-          <p:cNvSpPr/>
-          <p:nvPr/>
-        </p:nvSpPr>
-        <p:spPr>
-          <a:xfrm>
-            <a:off x="5669280" y="1408176"/>
-            <a:ext cx="1371600" cy="201168"/>
-          </a:xfrm>
-          <a:prstGeom prst="rect">
-            <a:avLst/>
-          </a:prstGeom>
-          <a:noFill/>
-          <a:ln/>
-        </p:spPr>
-        <p:txBody>
-          <a:bodyPr wrap="square" lIns="0" tIns="0" rIns="0" bIns="0" rtlCol="0" anchor="t"/>
-          <a:lstStyle/>
-          <a:p>
-            <a:pPr indent="0" marL="0">
-              <a:buNone/>
-            </a:pPr>
-            <a:r>
-              <a:rPr lang="en-US" sz="900" b="1" spc="100" kern="0" dirty="0">
-                <a:solidFill>
-                  <a:srgbClr val="F5A524"/>
-                </a:solidFill>
-                <a:latin typeface="Calibri" pitchFamily="34" charset="0"/>
-                <a:ea typeface="Calibri" pitchFamily="34" charset="-122"/>
-                <a:cs typeface="Calibri" pitchFamily="34" charset="-120"/>
-              </a:rPr>
-              <a:t>TENANT SETUP</a:t>
-            </a:r>
-            <a:endParaRPr lang="en-US" sz="900" dirty="0"/>
-          </a:p>
-        </p:txBody>
-      </p:sp>
-      <p:sp>
-        <p:nvSpPr>
-          <p:cNvPr id="15" name="Text 13"/>
-          <p:cNvSpPr/>
-          <p:nvPr/>
-        </p:nvSpPr>
-        <p:spPr>
-          <a:xfrm>
-            <a:off x="6940296" y="1408176"/>
-            <a:ext cx="128016" cy="201168"/>
-          </a:xfrm>
-          <a:prstGeom prst="rect">
-            <a:avLst/>
-          </a:prstGeom>
-          <a:noFill/>
-          <a:ln/>
-        </p:spPr>
-        <p:txBody>
-          <a:bodyPr wrap="square" lIns="0" tIns="0" rIns="0" bIns="0" rtlCol="0" anchor="t"/>
-          <a:lstStyle/>
-          <a:p>
-            <a:pPr indent="0" marL="0">
-              <a:buNone/>
-            </a:pPr>
-            <a:r>
-              <a:rPr lang="en-US" sz="1000" b="1" dirty="0">
-                <a:solidFill>
-                  <a:srgbClr val="F5A524"/>
-                </a:solidFill>
-                <a:latin typeface="Calibri" pitchFamily="34" charset="0"/>
-                <a:ea typeface="Calibri" pitchFamily="34" charset="-122"/>
-                <a:cs typeface="Calibri" pitchFamily="34" charset="-120"/>
-              </a:rPr>
-              <a:t>•</a:t>
-            </a:r>
-            <a:endParaRPr lang="en-US" sz="1000" dirty="0"/>
-          </a:p>
-        </p:txBody>
-      </p:sp>
-      <p:sp>
-        <p:nvSpPr>
-          <p:cNvPr id="16" name="Text 14"/>
-          <p:cNvSpPr/>
-          <p:nvPr/>
-        </p:nvSpPr>
-        <p:spPr>
-          <a:xfrm>
-            <a:off x="7086600" y="1408176"/>
-            <a:ext cx="4343400" cy="384048"/>
-          </a:xfrm>
-          <a:prstGeom prst="rect">
-            <a:avLst/>
-          </a:prstGeom>
-          <a:noFill/>
-          <a:ln/>
-        </p:spPr>
-        <p:txBody>
-          <a:bodyPr wrap="square" lIns="0" tIns="0" rIns="0" bIns="0" rtlCol="0" anchor="t"/>
-          <a:lstStyle/>
-          <a:p>
-            <a:pPr indent="0" marL="0">
-              <a:lnSpc>
-                <a:spcPts val="1200"/>
-              </a:lnSpc>
-              <a:buNone/>
-            </a:pPr>
-            <a:r>
-              <a:rPr lang="en-US" sz="1000" dirty="0">
-                <a:solidFill>
-                  <a:srgbClr val="B4B7BD"/>
-                </a:solidFill>
-                <a:latin typeface="Calibri" pitchFamily="34" charset="0"/>
-                <a:ea typeface="Calibri" pitchFamily="34" charset="-122"/>
-                <a:cs typeface="Calibri" pitchFamily="34" charset="-120"/>
-              </a:rPr>
-              <a:t>Core REST API integration instance configured  ← the one people miss</a:t>
-            </a:r>
-            <a:endParaRPr lang="en-US" sz="1000" dirty="0"/>
-          </a:p>
-        </p:txBody>
-      </p:sp>
-      <p:sp>
-        <p:nvSpPr>
-          <p:cNvPr id="17" name="Text 15"/>
-          <p:cNvSpPr/>
-          <p:nvPr/>
-        </p:nvSpPr>
-        <p:spPr>
-          <a:xfrm>
-            <a:off x="6940296" y="1819656"/>
-            <a:ext cx="128016" cy="201168"/>
-          </a:xfrm>
-          <a:prstGeom prst="rect">
-            <a:avLst/>
-          </a:prstGeom>
-          <a:noFill/>
-          <a:ln/>
-        </p:spPr>
-        <p:txBody>
-          <a:bodyPr wrap="square" lIns="0" tIns="0" rIns="0" bIns="0" rtlCol="0" anchor="t"/>
-          <a:lstStyle/>
-          <a:p>
-            <a:pPr indent="0" marL="0">
-              <a:buNone/>
-            </a:pPr>
-            <a:r>
-              <a:rPr lang="en-US" sz="1000" b="1" dirty="0">
-                <a:solidFill>
-                  <a:srgbClr val="F5A524"/>
-                </a:solidFill>
-                <a:latin typeface="Calibri" pitchFamily="34" charset="0"/>
-                <a:ea typeface="Calibri" pitchFamily="34" charset="-122"/>
-                <a:cs typeface="Calibri" pitchFamily="34" charset="-120"/>
-              </a:rPr>
-              <a:t>•</a:t>
-            </a:r>
-            <a:endParaRPr lang="en-US" sz="1000" dirty="0"/>
-          </a:p>
-        </p:txBody>
-      </p:sp>
-      <p:sp>
-        <p:nvSpPr>
-          <p:cNvPr id="18" name="Text 16"/>
-          <p:cNvSpPr/>
-          <p:nvPr/>
-        </p:nvSpPr>
-        <p:spPr>
-          <a:xfrm>
-            <a:off x="7086600" y="1819656"/>
-            <a:ext cx="4343400" cy="576072"/>
-          </a:xfrm>
-          <a:prstGeom prst="rect">
-            <a:avLst/>
-          </a:prstGeom>
-          <a:noFill/>
-          <a:ln/>
-        </p:spPr>
-        <p:txBody>
-          <a:bodyPr wrap="square" lIns="0" tIns="0" rIns="0" bIns="0" rtlCol="0" anchor="t"/>
-          <a:lstStyle/>
-          <a:p>
-            <a:pPr indent="0" marL="0">
-              <a:lnSpc>
-                <a:spcPts val="1200"/>
-              </a:lnSpc>
-              <a:buNone/>
-            </a:pPr>
-            <a:r>
-              <a:rPr lang="en-US" sz="1000" dirty="0">
-                <a:solidFill>
-                  <a:srgbClr val="B4B7BD"/>
-                </a:solidFill>
-                <a:latin typeface="Calibri" pitchFamily="34" charset="0"/>
-                <a:ea typeface="Calibri" pitchFamily="34" charset="-122"/>
-                <a:cs typeface="Calibri" pitchFamily="34" charset="-120"/>
-              </a:rPr>
-              <a:t>The KOI deployment script — download it from YOUR KOI console, then upload it to Action Center → Scripts Library. This is KOI's script, not a Cortex one. It must take no parameters</a:t>
-            </a:r>
-            <a:endParaRPr lang="en-US" sz="1000" dirty="0"/>
-          </a:p>
-        </p:txBody>
-      </p:sp>
-      <p:sp>
-        <p:nvSpPr>
-          <p:cNvPr id="19" name="Text 17"/>
-          <p:cNvSpPr/>
-          <p:nvPr/>
-        </p:nvSpPr>
-        <p:spPr>
-          <a:xfrm>
-            <a:off x="6940296" y="2418588"/>
-            <a:ext cx="128016" cy="201168"/>
-          </a:xfrm>
-          <a:prstGeom prst="rect">
-            <a:avLst/>
-          </a:prstGeom>
-          <a:noFill/>
-          <a:ln/>
-        </p:spPr>
-        <p:txBody>
-          <a:bodyPr wrap="square" lIns="0" tIns="0" rIns="0" bIns="0" rtlCol="0" anchor="t"/>
-          <a:lstStyle/>
-          <a:p>
-            <a:pPr indent="0" marL="0">
-              <a:buNone/>
-            </a:pPr>
-            <a:r>
-              <a:rPr lang="en-US" sz="1000" b="1" dirty="0">
-                <a:solidFill>
-                  <a:srgbClr val="F5A524"/>
-                </a:solidFill>
-                <a:latin typeface="Calibri" pitchFamily="34" charset="0"/>
-                <a:ea typeface="Calibri" pitchFamily="34" charset="-122"/>
-                <a:cs typeface="Calibri" pitchFamily="34" charset="-120"/>
-              </a:rPr>
-              <a:t>•</a:t>
-            </a:r>
-            <a:endParaRPr lang="en-US" sz="1000" dirty="0"/>
-          </a:p>
-        </p:txBody>
-      </p:sp>
-      <p:sp>
-        <p:nvSpPr>
-          <p:cNvPr id="20" name="Text 18"/>
-          <p:cNvSpPr/>
-          <p:nvPr/>
-        </p:nvSpPr>
-        <p:spPr>
-          <a:xfrm>
-            <a:off x="7086600" y="2418588"/>
-            <a:ext cx="4343400" cy="192024"/>
-          </a:xfrm>
-          <a:prstGeom prst="rect">
-            <a:avLst/>
-          </a:prstGeom>
-          <a:noFill/>
-          <a:ln/>
-        </p:spPr>
-        <p:txBody>
-          <a:bodyPr wrap="square" lIns="0" tIns="0" rIns="0" bIns="0" rtlCol="0" anchor="t"/>
-          <a:lstStyle/>
-          <a:p>
-            <a:pPr indent="0" marL="0">
-              <a:lnSpc>
-                <a:spcPts val="1200"/>
-              </a:lnSpc>
-              <a:buNone/>
-            </a:pPr>
-            <a:r>
-              <a:rPr lang="en-US" sz="1000" dirty="0">
-                <a:solidFill>
-                  <a:srgbClr val="B4B7BD"/>
-                </a:solidFill>
-                <a:latin typeface="Calibri" pitchFamily="34" charset="0"/>
-                <a:ea typeface="Calibri" pitchFamily="34" charset="-122"/>
-                <a:cs typeface="Calibri" pitchFamily="34" charset="-120"/>
-              </a:rPr>
-              <a:t>An endpoint group — tag the agents, then use a dynamic group</a:t>
-            </a:r>
-            <a:endParaRPr lang="en-US" sz="1000" dirty="0"/>
-          </a:p>
-        </p:txBody>
-      </p:sp>
-      <p:sp>
-        <p:nvSpPr>
-          <p:cNvPr id="21" name="Text 19"/>
-          <p:cNvSpPr/>
-          <p:nvPr/>
-        </p:nvSpPr>
-        <p:spPr>
-          <a:xfrm>
-            <a:off x="6940296" y="2642616"/>
-            <a:ext cx="128016" cy="201168"/>
-          </a:xfrm>
-          <a:prstGeom prst="rect">
-            <a:avLst/>
-          </a:prstGeom>
-          <a:noFill/>
-          <a:ln/>
-        </p:spPr>
-        <p:txBody>
-          <a:bodyPr wrap="square" lIns="0" tIns="0" rIns="0" bIns="0" rtlCol="0" anchor="t"/>
-          <a:lstStyle/>
-          <a:p>
-            <a:pPr indent="0" marL="0">
-              <a:buNone/>
-            </a:pPr>
-            <a:r>
-              <a:rPr lang="en-US" sz="1000" b="1" dirty="0">
-                <a:solidFill>
-                  <a:srgbClr val="F5A524"/>
-                </a:solidFill>
-                <a:latin typeface="Calibri" pitchFamily="34" charset="0"/>
-                <a:ea typeface="Calibri" pitchFamily="34" charset="-122"/>
-                <a:cs typeface="Calibri" pitchFamily="34" charset="-120"/>
-              </a:rPr>
-              <a:t>•</a:t>
-            </a:r>
-            <a:endParaRPr lang="en-US" sz="1000" dirty="0"/>
-          </a:p>
-        </p:txBody>
-      </p:sp>
-      <p:sp>
-        <p:nvSpPr>
-          <p:cNvPr id="22" name="Text 20"/>
-          <p:cNvSpPr/>
-          <p:nvPr/>
-        </p:nvSpPr>
-        <p:spPr>
-          <a:xfrm>
-            <a:off x="7086600" y="2642616"/>
-            <a:ext cx="4343400" cy="192024"/>
-          </a:xfrm>
-          <a:prstGeom prst="rect">
-            <a:avLst/>
-          </a:prstGeom>
-          <a:noFill/>
-          <a:ln/>
-        </p:spPr>
-        <p:txBody>
-          <a:bodyPr wrap="square" lIns="0" tIns="0" rIns="0" bIns="0" rtlCol="0" anchor="t"/>
-          <a:lstStyle/>
-          <a:p>
-            <a:pPr indent="0" marL="0">
-              <a:lnSpc>
-                <a:spcPts val="1200"/>
-              </a:lnSpc>
-              <a:buNone/>
-            </a:pPr>
-            <a:r>
-              <a:rPr lang="en-US" sz="1000" dirty="0">
-                <a:solidFill>
-                  <a:srgbClr val="B4B7BD"/>
-                </a:solidFill>
-                <a:latin typeface="Calibri" pitchFamily="34" charset="0"/>
-                <a:ea typeface="Calibri" pitchFamily="34" charset="-122"/>
-                <a:cs typeface="Calibri" pitchFamily="34" charset="-120"/>
-              </a:rPr>
-              <a:t>The Koi Script Runner List created (step 1)</a:t>
-            </a:r>
-            <a:endParaRPr lang="en-US" sz="1000" dirty="0"/>
-          </a:p>
-        </p:txBody>
-      </p:sp>
-      <p:sp>
-        <p:nvSpPr>
-          <p:cNvPr id="23" name="Shape 21"/>
-          <p:cNvSpPr/>
-          <p:nvPr/>
-        </p:nvSpPr>
-        <p:spPr>
-          <a:xfrm>
-            <a:off x="548640" y="3232404"/>
-            <a:ext cx="6400800" cy="3351276"/>
+              <a:t>An endpoint group — tag the agents, then build a dynamic group on that tag.</a:t>
+            </a:r>
+            <a:endParaRPr lang="en-US" sz="1150" dirty="0"/>
+          </a:p>
+        </p:txBody>
+      </p:sp>
+      <p:sp>
+        <p:nvSpPr>
+          <p:cNvPr id="22" name="Shape 20"/>
+          <p:cNvSpPr/>
+          <p:nvPr/>
+        </p:nvSpPr>
+        <p:spPr>
+          <a:xfrm>
+            <a:off x="548640" y="4187952"/>
+            <a:ext cx="11064240" cy="2395728"/>
           </a:xfrm>
           <a:prstGeom prst="roundRect">
             <a:avLst>
-              <a:gd name="adj" fmla="val 1364"/>
+              <a:gd name="adj" fmla="val 1908"/>
             </a:avLst>
           </a:prstGeom>
           <a:solidFill>
@@ -5954,30 +5980,69 @@
       </p:sp>
       <p:sp>
         <p:nvSpPr>
+          <p:cNvPr id="23" name="Text 21"/>
+          <p:cNvSpPr/>
+          <p:nvPr/>
+        </p:nvSpPr>
+        <p:spPr>
+          <a:xfrm>
+            <a:off x="859536" y="4389120"/>
+            <a:ext cx="5486400" cy="256032"/>
+          </a:xfrm>
+          <a:prstGeom prst="rect">
+            <a:avLst/>
+          </a:prstGeom>
+          <a:noFill/>
+          <a:ln/>
+        </p:spPr>
+        <p:txBody>
+          <a:bodyPr wrap="square" lIns="0" tIns="0" rIns="0" bIns="0" rtlCol="0" anchor="t"/>
+          <a:lstStyle/>
+          <a:p>
+            <a:pPr indent="0" marL="0">
+              <a:buNone/>
+            </a:pPr>
+            <a:r>
+              <a:rPr lang="en-US" sz="1200" b="1" spc="100" kern="0" dirty="0">
+                <a:solidFill>
+                  <a:srgbClr val="E8551F"/>
+                </a:solidFill>
+                <a:latin typeface="Calibri" pitchFamily="34" charset="0"/>
+                <a:ea typeface="Calibri" pitchFamily="34" charset="-122"/>
+                <a:cs typeface="Calibri" pitchFamily="34" charset="-120"/>
+              </a:rPr>
+              <a:t>Do this once, before tests 8 and 9</a:t>
+            </a:r>
+            <a:endParaRPr lang="en-US" sz="1200" dirty="0"/>
+          </a:p>
+        </p:txBody>
+      </p:sp>
+      <p:sp>
+        <p:nvSpPr>
           <p:cNvPr id="24" name="Text 22"/>
           <p:cNvSpPr/>
           <p:nvPr/>
         </p:nvSpPr>
         <p:spPr>
           <a:xfrm>
-            <a:off x="859536" y="3415284"/>
-            <a:ext cx="2743200" cy="256032"/>
-          </a:xfrm>
-          <a:prstGeom prst="rect">
-            <a:avLst/>
-          </a:prstGeom>
-          <a:noFill/>
-          <a:ln/>
-        </p:spPr>
-        <p:txBody>
-          <a:bodyPr wrap="square" lIns="0" tIns="0" rIns="0" bIns="0" rtlCol="0" anchor="t"/>
-          <a:lstStyle/>
-          <a:p>
-            <a:pPr indent="0" marL="0">
-              <a:buNone/>
-            </a:pPr>
-            <a:r>
-              <a:rPr lang="en-US" sz="1200" b="1" spc="100" kern="0" dirty="0">
+            <a:off x="859536" y="4736592"/>
+            <a:ext cx="219456" cy="256032"/>
+          </a:xfrm>
+          <a:prstGeom prst="rect">
+            <a:avLst/>
+          </a:prstGeom>
+          <a:noFill/>
+          <a:ln/>
+        </p:spPr>
+        <p:txBody>
+          <a:bodyPr wrap="square" lIns="0" tIns="0" rIns="0" bIns="0" rtlCol="0" anchor="t"/>
+          <a:lstStyle/>
+          <a:p>
+            <a:pPr indent="0" marL="0">
+              <a:buNone/>
+            </a:pPr>
+            <a:r>
+              <a:rPr lang="en-US" sz="1150" b="1" dirty="0">
                 <a:solidFill>
                   <a:srgbClr val="E8551F"/>
                 </a:solidFill>
@@ -5985,9 +6050,9 @@
                 <a:ea typeface="Calibri" pitchFamily="34" charset="-122"/>
                 <a:cs typeface="Calibri" pitchFamily="34" charset="-120"/>
               </a:rPr>
-              <a:t>Steps</a:t>
-            </a:r>
-            <a:endParaRPr lang="en-US" sz="1200" dirty="0"/>
+              <a:t>1</a:t>
+            </a:r>
+            <a:endParaRPr lang="en-US" sz="1150" dirty="0"/>
           </a:p>
         </p:txBody>
       </p:sp>
@@ -5999,47 +6064,8 @@
         </p:nvSpPr>
         <p:spPr>
           <a:xfrm>
-            <a:off x="859536" y="3762756"/>
-            <a:ext cx="219456" cy="256032"/>
-          </a:xfrm>
-          <a:prstGeom prst="rect">
-            <a:avLst/>
-          </a:prstGeom>
-          <a:noFill/>
-          <a:ln/>
-        </p:spPr>
-        <p:txBody>
-          <a:bodyPr wrap="square" lIns="0" tIns="0" rIns="0" bIns="0" rtlCol="0" anchor="t"/>
-          <a:lstStyle/>
-          <a:p>
-            <a:pPr indent="0" marL="0">
-              <a:buNone/>
-            </a:pPr>
-            <a:r>
-              <a:rPr lang="en-US" sz="1150" b="1" dirty="0">
-                <a:solidFill>
-                  <a:srgbClr val="E8551F"/>
-                </a:solidFill>
-                <a:latin typeface="Calibri" pitchFamily="34" charset="0"/>
-                <a:ea typeface="Calibri" pitchFamily="34" charset="-122"/>
-                <a:cs typeface="Calibri" pitchFamily="34" charset="-120"/>
-              </a:rPr>
-              <a:t>1</a:t>
-            </a:r>
-            <a:endParaRPr lang="en-US" sz="1150" dirty="0"/>
-          </a:p>
-        </p:txBody>
-      </p:sp>
-      <p:sp>
-        <p:nvSpPr>
-          <p:cNvPr id="26" name="Text 24"/>
-          <p:cNvSpPr/>
-          <p:nvPr/>
-        </p:nvSpPr>
-        <p:spPr>
-          <a:xfrm>
-            <a:off x="1152144" y="3762756"/>
-            <a:ext cx="5486400" cy="438912"/>
+            <a:off x="1152144" y="4736592"/>
+            <a:ext cx="10149840" cy="246888"/>
           </a:xfrm>
           <a:prstGeom prst="rect">
             <a:avLst/>
@@ -6066,7 +6092,7 @@
                 <a:ea typeface="Calibri" pitchFamily="34" charset="-122"/>
                 <a:cs typeface="Calibri" pitchFamily="34" charset="-120"/>
               </a:rPr>
-              <a:t>If you installed the pack: the Koi Script Runner List is already there — open Settings → Object Setup → Lists and go to the next step.</a:t>
+              <a:t>Installed the whole pack? All of the above is already on the tenant — go straight to test 8.</a:t>
             </a:r>
             <a:endParaRPr lang="en-US" sz="1150" dirty="0"/>
           </a:p>
@@ -6074,53 +6100,53 @@
       </p:sp>
       <p:sp>
         <p:nvSpPr>
+          <p:cNvPr id="26" name="Text 24"/>
+          <p:cNvSpPr/>
+          <p:nvPr/>
+        </p:nvSpPr>
+        <p:spPr>
+          <a:xfrm>
+            <a:off x="859536" y="5065776"/>
+            <a:ext cx="219456" cy="256032"/>
+          </a:xfrm>
+          <a:prstGeom prst="rect">
+            <a:avLst/>
+          </a:prstGeom>
+          <a:noFill/>
+          <a:ln/>
+        </p:spPr>
+        <p:txBody>
+          <a:bodyPr wrap="square" lIns="0" tIns="0" rIns="0" bIns="0" rtlCol="0" anchor="t"/>
+          <a:lstStyle/>
+          <a:p>
+            <a:pPr indent="0" marL="0">
+              <a:buNone/>
+            </a:pPr>
+            <a:r>
+              <a:rPr lang="en-US" sz="1150" b="1" dirty="0">
+                <a:solidFill>
+                  <a:srgbClr val="E8551F"/>
+                </a:solidFill>
+                <a:latin typeface="Calibri" pitchFamily="34" charset="0"/>
+                <a:ea typeface="Calibri" pitchFamily="34" charset="-122"/>
+                <a:cs typeface="Calibri" pitchFamily="34" charset="-120"/>
+              </a:rPr>
+              <a:t>2</a:t>
+            </a:r>
+            <a:endParaRPr lang="en-US" sz="1150" dirty="0"/>
+          </a:p>
+        </p:txBody>
+      </p:sp>
+      <p:sp>
+        <p:nvSpPr>
           <p:cNvPr id="27" name="Text 25"/>
           <p:cNvSpPr/>
           <p:nvPr/>
         </p:nvSpPr>
         <p:spPr>
           <a:xfrm>
-            <a:off x="859536" y="4279392"/>
-            <a:ext cx="219456" cy="256032"/>
-          </a:xfrm>
-          <a:prstGeom prst="rect">
-            <a:avLst/>
-          </a:prstGeom>
-          <a:noFill/>
-          <a:ln/>
-        </p:spPr>
-        <p:txBody>
-          <a:bodyPr wrap="square" lIns="0" tIns="0" rIns="0" bIns="0" rtlCol="0" anchor="t"/>
-          <a:lstStyle/>
-          <a:p>
-            <a:pPr indent="0" marL="0">
-              <a:buNone/>
-            </a:pPr>
-            <a:r>
-              <a:rPr lang="en-US" sz="1150" b="1" dirty="0">
-                <a:solidFill>
-                  <a:srgbClr val="E8551F"/>
-                </a:solidFill>
-                <a:latin typeface="Calibri" pitchFamily="34" charset="0"/>
-                <a:ea typeface="Calibri" pitchFamily="34" charset="-122"/>
-                <a:cs typeface="Calibri" pitchFamily="34" charset="-120"/>
-              </a:rPr>
-              <a:t>2</a:t>
-            </a:r>
-            <a:endParaRPr lang="en-US" sz="1150" dirty="0"/>
-          </a:p>
-        </p:txBody>
-      </p:sp>
-      <p:sp>
-        <p:nvSpPr>
-          <p:cNvPr id="28" name="Text 26"/>
-          <p:cNvSpPr/>
-          <p:nvPr/>
-        </p:nvSpPr>
-        <p:spPr>
-          <a:xfrm>
-            <a:off x="1152144" y="4279392"/>
-            <a:ext cx="5486400" cy="822960"/>
+            <a:off x="1152144" y="5065776"/>
+            <a:ext cx="10149840" cy="246888"/>
           </a:xfrm>
           <a:prstGeom prst="rect">
             <a:avLst/>
@@ -6147,7 +6173,7 @@
                 <a:ea typeface="Calibri" pitchFamily="34" charset="-122"/>
                 <a:cs typeface="Calibri" pitchFamily="34" charset="-120"/>
               </a:rPr>
-              <a:t>If you uploaded selectively: upload the playbooks and automation listed under PACK CONTENT, then create the List — New List, type JSON, named exactly Koi Script Runner — and paste the block from Lists/README.md (not from list-Koi_Script_Runner.json; its data field is escaped).</a:t>
+              <a:t>Uploading selectively? Automation → Playbooks → Import for the five playbooks, in the order listed.</a:t>
             </a:r>
             <a:endParaRPr lang="en-US" sz="1150" dirty="0"/>
           </a:p>
@@ -6155,53 +6181,53 @@
       </p:sp>
       <p:sp>
         <p:nvSpPr>
+          <p:cNvPr id="28" name="Text 26"/>
+          <p:cNvSpPr/>
+          <p:nvPr/>
+        </p:nvSpPr>
+        <p:spPr>
+          <a:xfrm>
+            <a:off x="859536" y="5394960"/>
+            <a:ext cx="219456" cy="256032"/>
+          </a:xfrm>
+          <a:prstGeom prst="rect">
+            <a:avLst/>
+          </a:prstGeom>
+          <a:noFill/>
+          <a:ln/>
+        </p:spPr>
+        <p:txBody>
+          <a:bodyPr wrap="square" lIns="0" tIns="0" rIns="0" bIns="0" rtlCol="0" anchor="t"/>
+          <a:lstStyle/>
+          <a:p>
+            <a:pPr indent="0" marL="0">
+              <a:buNone/>
+            </a:pPr>
+            <a:r>
+              <a:rPr lang="en-US" sz="1150" b="1" dirty="0">
+                <a:solidFill>
+                  <a:srgbClr val="E8551F"/>
+                </a:solidFill>
+                <a:latin typeface="Calibri" pitchFamily="34" charset="0"/>
+                <a:ea typeface="Calibri" pitchFamily="34" charset="-122"/>
+                <a:cs typeface="Calibri" pitchFamily="34" charset="-120"/>
+              </a:rPr>
+              <a:t>3</a:t>
+            </a:r>
+            <a:endParaRPr lang="en-US" sz="1150" dirty="0"/>
+          </a:p>
+        </p:txBody>
+      </p:sp>
+      <p:sp>
+        <p:nvSpPr>
           <p:cNvPr id="29" name="Text 27"/>
           <p:cNvSpPr/>
           <p:nvPr/>
         </p:nvSpPr>
         <p:spPr>
           <a:xfrm>
-            <a:off x="859536" y="5170932"/>
-            <a:ext cx="219456" cy="256032"/>
-          </a:xfrm>
-          <a:prstGeom prst="rect">
-            <a:avLst/>
-          </a:prstGeom>
-          <a:noFill/>
-          <a:ln/>
-        </p:spPr>
-        <p:txBody>
-          <a:bodyPr wrap="square" lIns="0" tIns="0" rIns="0" bIns="0" rtlCol="0" anchor="t"/>
-          <a:lstStyle/>
-          <a:p>
-            <a:pPr indent="0" marL="0">
-              <a:buNone/>
-            </a:pPr>
-            <a:r>
-              <a:rPr lang="en-US" sz="1150" b="1" dirty="0">
-                <a:solidFill>
-                  <a:srgbClr val="E8551F"/>
-                </a:solidFill>
-                <a:latin typeface="Calibri" pitchFamily="34" charset="0"/>
-                <a:ea typeface="Calibri" pitchFamily="34" charset="-122"/>
-                <a:cs typeface="Calibri" pitchFamily="34" charset="-120"/>
-              </a:rPr>
-              <a:t>3</a:t>
-            </a:r>
-            <a:endParaRPr lang="en-US" sz="1150" dirty="0"/>
-          </a:p>
-        </p:txBody>
-      </p:sp>
-      <p:sp>
-        <p:nvSpPr>
-          <p:cNvPr id="30" name="Text 28"/>
-          <p:cNvSpPr/>
-          <p:nvPr/>
-        </p:nvSpPr>
-        <p:spPr>
-          <a:xfrm>
-            <a:off x="1152144" y="5170932"/>
-            <a:ext cx="5486400" cy="438912"/>
+            <a:off x="1152144" y="5394960"/>
+            <a:ext cx="10149840" cy="438912"/>
           </a:xfrm>
           <a:prstGeom prst="rect">
             <a:avLst/>
@@ -6228,7 +6254,7 @@
                 <a:ea typeface="Calibri" pitchFamily="34" charset="-122"/>
                 <a:cs typeface="Calibri" pitchFamily="34" charset="-120"/>
               </a:rPr>
-              <a:t>Edit two things only: endpoint_groups (your group) and script.name (the KOI script exactly as it appears in Action Center). One entry per OS.</a:t>
+              <a:t>Automation → Scripts → Import for KoiScanTracker — upload dist/automation-KoiScanTracker.yml. One file, code already inside; do not upload the two files under Scripts/.</a:t>
             </a:r>
             <a:endParaRPr lang="en-US" sz="1150" dirty="0"/>
           </a:p>
@@ -6236,53 +6262,53 @@
       </p:sp>
       <p:sp>
         <p:nvSpPr>
+          <p:cNvPr id="30" name="Text 28"/>
+          <p:cNvSpPr/>
+          <p:nvPr/>
+        </p:nvSpPr>
+        <p:spPr>
+          <a:xfrm>
+            <a:off x="859536" y="5911596"/>
+            <a:ext cx="219456" cy="256032"/>
+          </a:xfrm>
+          <a:prstGeom prst="rect">
+            <a:avLst/>
+          </a:prstGeom>
+          <a:noFill/>
+          <a:ln/>
+        </p:spPr>
+        <p:txBody>
+          <a:bodyPr wrap="square" lIns="0" tIns="0" rIns="0" bIns="0" rtlCol="0" anchor="t"/>
+          <a:lstStyle/>
+          <a:p>
+            <a:pPr indent="0" marL="0">
+              <a:buNone/>
+            </a:pPr>
+            <a:r>
+              <a:rPr lang="en-US" sz="1150" b="1" dirty="0">
+                <a:solidFill>
+                  <a:srgbClr val="E8551F"/>
+                </a:solidFill>
+                <a:latin typeface="Calibri" pitchFamily="34" charset="0"/>
+                <a:ea typeface="Calibri" pitchFamily="34" charset="-122"/>
+                <a:cs typeface="Calibri" pitchFamily="34" charset="-120"/>
+              </a:rPr>
+              <a:t>4</a:t>
+            </a:r>
+            <a:endParaRPr lang="en-US" sz="1150" dirty="0"/>
+          </a:p>
+        </p:txBody>
+      </p:sp>
+      <p:sp>
+        <p:nvSpPr>
           <p:cNvPr id="31" name="Text 29"/>
           <p:cNvSpPr/>
           <p:nvPr/>
         </p:nvSpPr>
         <p:spPr>
           <a:xfrm>
-            <a:off x="859536" y="5687568"/>
-            <a:ext cx="219456" cy="256032"/>
-          </a:xfrm>
-          <a:prstGeom prst="rect">
-            <a:avLst/>
-          </a:prstGeom>
-          <a:noFill/>
-          <a:ln/>
-        </p:spPr>
-        <p:txBody>
-          <a:bodyPr wrap="square" lIns="0" tIns="0" rIns="0" bIns="0" rtlCol="0" anchor="t"/>
-          <a:lstStyle/>
-          <a:p>
-            <a:pPr indent="0" marL="0">
-              <a:buNone/>
-            </a:pPr>
-            <a:r>
-              <a:rPr lang="en-US" sz="1150" b="1" dirty="0">
-                <a:solidFill>
-                  <a:srgbClr val="E8551F"/>
-                </a:solidFill>
-                <a:latin typeface="Calibri" pitchFamily="34" charset="0"/>
-                <a:ea typeface="Calibri" pitchFamily="34" charset="-122"/>
-                <a:cs typeface="Calibri" pitchFamily="34" charset="-120"/>
-              </a:rPr>
-              <a:t>4</a:t>
-            </a:r>
-            <a:endParaRPr lang="en-US" sz="1150" dirty="0"/>
-          </a:p>
-        </p:txBody>
-      </p:sp>
-      <p:sp>
-        <p:nvSpPr>
-          <p:cNvPr id="32" name="Text 30"/>
-          <p:cNvSpPr/>
-          <p:nvPr/>
-        </p:nvSpPr>
-        <p:spPr>
-          <a:xfrm>
-            <a:off x="1152144" y="5687568"/>
-            <a:ext cx="5486400" cy="438912"/>
+            <a:off x="1152144" y="5911596"/>
+            <a:ext cx="10149840" cy="246888"/>
           </a:xfrm>
           <a:prstGeom prst="rect">
             <a:avLst/>
@@ -6309,7 +6335,7 @@
                 <a:ea typeface="Calibri" pitchFamily="34" charset="-122"/>
                 <a:cs typeface="Calibri" pitchFamily="34" charset="-120"/>
               </a:rPr>
-              <a:t>Everything else — tracker_list, rescan_interval_hours, max_endpoints — already has working defaults.</a:t>
+              <a:t>Settings → Object Setup → Lists → New List, type JSON, named exactly Koi Script Runner. Paste the block from Lists/README.md.</a:t>
             </a:r>
             <a:endParaRPr lang="en-US" sz="1150" dirty="0"/>
           </a:p>
@@ -6317,53 +6343,53 @@
       </p:sp>
       <p:sp>
         <p:nvSpPr>
+          <p:cNvPr id="32" name="Text 30"/>
+          <p:cNvSpPr/>
+          <p:nvPr/>
+        </p:nvSpPr>
+        <p:spPr>
+          <a:xfrm>
+            <a:off x="859536" y="6240780"/>
+            <a:ext cx="219456" cy="256032"/>
+          </a:xfrm>
+          <a:prstGeom prst="rect">
+            <a:avLst/>
+          </a:prstGeom>
+          <a:noFill/>
+          <a:ln/>
+        </p:spPr>
+        <p:txBody>
+          <a:bodyPr wrap="square" lIns="0" tIns="0" rIns="0" bIns="0" rtlCol="0" anchor="t"/>
+          <a:lstStyle/>
+          <a:p>
+            <a:pPr indent="0" marL="0">
+              <a:buNone/>
+            </a:pPr>
+            <a:r>
+              <a:rPr lang="en-US" sz="1150" b="1" dirty="0">
+                <a:solidFill>
+                  <a:srgbClr val="E8551F"/>
+                </a:solidFill>
+                <a:latin typeface="Calibri" pitchFamily="34" charset="0"/>
+                <a:ea typeface="Calibri" pitchFamily="34" charset="-122"/>
+                <a:cs typeface="Calibri" pitchFamily="34" charset="-120"/>
+              </a:rPr>
+              <a:t>5</a:t>
+            </a:r>
+            <a:endParaRPr lang="en-US" sz="1150" dirty="0"/>
+          </a:p>
+        </p:txBody>
+      </p:sp>
+      <p:sp>
+        <p:nvSpPr>
           <p:cNvPr id="33" name="Text 31"/>
           <p:cNvSpPr/>
           <p:nvPr/>
         </p:nvSpPr>
         <p:spPr>
           <a:xfrm>
-            <a:off x="859536" y="6204204"/>
-            <a:ext cx="219456" cy="256032"/>
-          </a:xfrm>
-          <a:prstGeom prst="rect">
-            <a:avLst/>
-          </a:prstGeom>
-          <a:noFill/>
-          <a:ln/>
-        </p:spPr>
-        <p:txBody>
-          <a:bodyPr wrap="square" lIns="0" tIns="0" rIns="0" bIns="0" rtlCol="0" anchor="t"/>
-          <a:lstStyle/>
-          <a:p>
-            <a:pPr indent="0" marL="0">
-              <a:buNone/>
-            </a:pPr>
-            <a:r>
-              <a:rPr lang="en-US" sz="1150" b="1" dirty="0">
-                <a:solidFill>
-                  <a:srgbClr val="E8551F"/>
-                </a:solidFill>
-                <a:latin typeface="Calibri" pitchFamily="34" charset="0"/>
-                <a:ea typeface="Calibri" pitchFamily="34" charset="-122"/>
-                <a:cs typeface="Calibri" pitchFamily="34" charset="-120"/>
-              </a:rPr>
-              <a:t>5</a:t>
-            </a:r>
-            <a:endParaRPr lang="en-US" sz="1150" dirty="0"/>
-          </a:p>
-        </p:txBody>
-      </p:sp>
-      <p:sp>
-        <p:nvSpPr>
-          <p:cNvPr id="34" name="Text 32"/>
-          <p:cNvSpPr/>
-          <p:nvPr/>
-        </p:nvSpPr>
-        <p:spPr>
-          <a:xfrm>
-            <a:off x="1152144" y="6204204"/>
-            <a:ext cx="5486400" cy="438912"/>
+            <a:off x="1152144" y="6240780"/>
+            <a:ext cx="10149840" cy="246888"/>
           </a:xfrm>
           <a:prstGeom prst="rect">
             <a:avLst/>
@@ -6390,316 +6416,7 @@
                 <a:ea typeface="Calibri" pitchFamily="34" charset="-122"/>
                 <a:cs typeface="Calibri" pitchFamily="34" charset="-120"/>
               </a:rPr>
-              <a:t>Automation → Jobs → New Job, time-triggered, playbook KOI Ext Script Runner - Refresh Job. Enable it, then Run now.</a:t>
-            </a:r>
-            <a:endParaRPr lang="en-US" sz="1150" dirty="0"/>
-          </a:p>
-        </p:txBody>
-      </p:sp>
-      <p:sp>
-        <p:nvSpPr>
-          <p:cNvPr id="35" name="Shape 33"/>
-          <p:cNvSpPr/>
-          <p:nvPr/>
-        </p:nvSpPr>
-        <p:spPr>
-          <a:xfrm>
-            <a:off x="7315200" y="3232404"/>
-            <a:ext cx="4297680" cy="3351276"/>
-          </a:xfrm>
-          <a:prstGeom prst="roundRect">
-            <a:avLst>
-              <a:gd name="adj" fmla="val 1364"/>
-            </a:avLst>
-          </a:prstGeom>
-          <a:solidFill>
-            <a:srgbClr val="1C2026"/>
-          </a:solidFill>
-          <a:ln w="12700">
-            <a:solidFill>
-              <a:srgbClr val="1C2026"/>
-            </a:solidFill>
-            <a:prstDash val="solid"/>
-          </a:ln>
-        </p:spPr>
-      </p:sp>
-      <p:sp>
-        <p:nvSpPr>
-          <p:cNvPr id="36" name="Text 34"/>
-          <p:cNvSpPr/>
-          <p:nvPr/>
-        </p:nvSpPr>
-        <p:spPr>
-          <a:xfrm>
-            <a:off x="7626096" y="3415284"/>
-            <a:ext cx="3108960" cy="256032"/>
-          </a:xfrm>
-          <a:prstGeom prst="rect">
-            <a:avLst/>
-          </a:prstGeom>
-          <a:noFill/>
-          <a:ln/>
-        </p:spPr>
-        <p:txBody>
-          <a:bodyPr wrap="square" lIns="0" tIns="0" rIns="0" bIns="0" rtlCol="0" anchor="t"/>
-          <a:lstStyle/>
-          <a:p>
-            <a:pPr indent="0" marL="0">
-              <a:buNone/>
-            </a:pPr>
-            <a:r>
-              <a:rPr lang="en-US" sz="1200" b="1" spc="100" kern="0" dirty="0">
-                <a:solidFill>
-                  <a:srgbClr val="3FB950"/>
-                </a:solidFill>
-                <a:latin typeface="Calibri" pitchFamily="34" charset="0"/>
-                <a:ea typeface="Calibri" pitchFamily="34" charset="-122"/>
-                <a:cs typeface="Calibri" pitchFamily="34" charset="-120"/>
-              </a:rPr>
-              <a:t>What to expect</a:t>
-            </a:r>
-            <a:endParaRPr lang="en-US" sz="1200" dirty="0"/>
-          </a:p>
-        </p:txBody>
-      </p:sp>
-      <p:sp>
-        <p:nvSpPr>
-          <p:cNvPr id="37" name="Text 35"/>
-          <p:cNvSpPr/>
-          <p:nvPr/>
-        </p:nvSpPr>
-        <p:spPr>
-          <a:xfrm>
-            <a:off x="7626096" y="3762756"/>
-            <a:ext cx="219456" cy="256032"/>
-          </a:xfrm>
-          <a:prstGeom prst="rect">
-            <a:avLst/>
-          </a:prstGeom>
-          <a:noFill/>
-          <a:ln/>
-        </p:spPr>
-        <p:txBody>
-          <a:bodyPr wrap="square" lIns="0" tIns="0" rIns="0" bIns="0" rtlCol="0" anchor="t"/>
-          <a:lstStyle/>
-          <a:p>
-            <a:pPr indent="0" marL="0">
-              <a:buNone/>
-            </a:pPr>
-            <a:r>
-              <a:rPr lang="en-US" sz="1150" b="1" dirty="0">
-                <a:solidFill>
-                  <a:srgbClr val="3FB950"/>
-                </a:solidFill>
-                <a:latin typeface="Calibri" pitchFamily="34" charset="0"/>
-                <a:ea typeface="Calibri" pitchFamily="34" charset="-122"/>
-                <a:cs typeface="Calibri" pitchFamily="34" charset="-120"/>
-              </a:rPr>
-              <a:t>✓</a:t>
-            </a:r>
-            <a:endParaRPr lang="en-US" sz="1150" dirty="0"/>
-          </a:p>
-        </p:txBody>
-      </p:sp>
-      <p:sp>
-        <p:nvSpPr>
-          <p:cNvPr id="38" name="Text 36"/>
-          <p:cNvSpPr/>
-          <p:nvPr/>
-        </p:nvSpPr>
-        <p:spPr>
-          <a:xfrm>
-            <a:off x="7918704" y="3762756"/>
-            <a:ext cx="3383280" cy="438912"/>
-          </a:xfrm>
-          <a:prstGeom prst="rect">
-            <a:avLst/>
-          </a:prstGeom>
-          <a:noFill/>
-          <a:ln/>
-        </p:spPr>
-        <p:txBody>
-          <a:bodyPr wrap="square" lIns="0" tIns="0" rIns="0" bIns="0" rtlCol="0" anchor="t"/>
-          <a:lstStyle/>
-          <a:p>
-            <a:pPr indent="0" marL="0">
-              <a:lnSpc>
-                <a:spcPts val="1500"/>
-              </a:lnSpc>
-              <a:buNone/>
-            </a:pPr>
-            <a:r>
-              <a:rPr lang="en-US" sz="1150" dirty="0">
-                <a:solidFill>
-                  <a:srgbClr val="B4B7BD"/>
-                </a:solidFill>
-                <a:latin typeface="Calibri" pitchFamily="34" charset="0"/>
-                <a:ea typeface="Calibri" pitchFamily="34" charset="-122"/>
-                <a:cs typeface="Calibri" pitchFamily="34" charset="-120"/>
-              </a:rPr>
-              <a:t>A tracker List appears under Lists, named as in your entry.</a:t>
-            </a:r>
-            <a:endParaRPr lang="en-US" sz="1150" dirty="0"/>
-          </a:p>
-        </p:txBody>
-      </p:sp>
-      <p:sp>
-        <p:nvSpPr>
-          <p:cNvPr id="39" name="Text 37"/>
-          <p:cNvSpPr/>
-          <p:nvPr/>
-        </p:nvSpPr>
-        <p:spPr>
-          <a:xfrm>
-            <a:off x="7626096" y="4279392"/>
-            <a:ext cx="219456" cy="256032"/>
-          </a:xfrm>
-          <a:prstGeom prst="rect">
-            <a:avLst/>
-          </a:prstGeom>
-          <a:noFill/>
-          <a:ln/>
-        </p:spPr>
-        <p:txBody>
-          <a:bodyPr wrap="square" lIns="0" tIns="0" rIns="0" bIns="0" rtlCol="0" anchor="t"/>
-          <a:lstStyle/>
-          <a:p>
-            <a:pPr indent="0" marL="0">
-              <a:buNone/>
-            </a:pPr>
-            <a:r>
-              <a:rPr lang="en-US" sz="1150" b="1" dirty="0">
-                <a:solidFill>
-                  <a:srgbClr val="3FB950"/>
-                </a:solidFill>
-                <a:latin typeface="Calibri" pitchFamily="34" charset="0"/>
-                <a:ea typeface="Calibri" pitchFamily="34" charset="-122"/>
-                <a:cs typeface="Calibri" pitchFamily="34" charset="-120"/>
-              </a:rPr>
-              <a:t>✓</a:t>
-            </a:r>
-            <a:endParaRPr lang="en-US" sz="1150" dirty="0"/>
-          </a:p>
-        </p:txBody>
-      </p:sp>
-      <p:sp>
-        <p:nvSpPr>
-          <p:cNvPr id="40" name="Text 38"/>
-          <p:cNvSpPr/>
-          <p:nvPr/>
-        </p:nvSpPr>
-        <p:spPr>
-          <a:xfrm>
-            <a:off x="7918704" y="4279392"/>
-            <a:ext cx="3383280" cy="438912"/>
-          </a:xfrm>
-          <a:prstGeom prst="rect">
-            <a:avLst/>
-          </a:prstGeom>
-          <a:noFill/>
-          <a:ln/>
-        </p:spPr>
-        <p:txBody>
-          <a:bodyPr wrap="square" lIns="0" tIns="0" rIns="0" bIns="0" rtlCol="0" anchor="t"/>
-          <a:lstStyle/>
-          <a:p>
-            <a:pPr indent="0" marL="0">
-              <a:lnSpc>
-                <a:spcPts val="1500"/>
-              </a:lnSpc>
-              <a:buNone/>
-            </a:pPr>
-            <a:r>
-              <a:rPr lang="en-US" sz="1150" dirty="0">
-                <a:solidFill>
-                  <a:srgbClr val="B4B7BD"/>
-                </a:solidFill>
-                <a:latin typeface="Calibri" pitchFamily="34" charset="0"/>
-                <a:ea typeface="Calibri" pitchFamily="34" charset="-122"/>
-                <a:cs typeface="Calibri" pitchFamily="34" charset="-120"/>
-              </a:rPr>
-              <a:t>It fills with one row per endpoint: an id and a last-scan value.</a:t>
-            </a:r>
-            <a:endParaRPr lang="en-US" sz="1150" dirty="0"/>
-          </a:p>
-        </p:txBody>
-      </p:sp>
-      <p:sp>
-        <p:nvSpPr>
-          <p:cNvPr id="41" name="Text 39"/>
-          <p:cNvSpPr/>
-          <p:nvPr/>
-        </p:nvSpPr>
-        <p:spPr>
-          <a:xfrm>
-            <a:off x="7626096" y="4796028"/>
-            <a:ext cx="219456" cy="256032"/>
-          </a:xfrm>
-          <a:prstGeom prst="rect">
-            <a:avLst/>
-          </a:prstGeom>
-          <a:noFill/>
-          <a:ln/>
-        </p:spPr>
-        <p:txBody>
-          <a:bodyPr wrap="square" lIns="0" tIns="0" rIns="0" bIns="0" rtlCol="0" anchor="t"/>
-          <a:lstStyle/>
-          <a:p>
-            <a:pPr indent="0" marL="0">
-              <a:buNone/>
-            </a:pPr>
-            <a:r>
-              <a:rPr lang="en-US" sz="1150" b="1" dirty="0">
-                <a:solidFill>
-                  <a:srgbClr val="3FB950"/>
-                </a:solidFill>
-                <a:latin typeface="Calibri" pitchFamily="34" charset="0"/>
-                <a:ea typeface="Calibri" pitchFamily="34" charset="-122"/>
-                <a:cs typeface="Calibri" pitchFamily="34" charset="-120"/>
-              </a:rPr>
-              <a:t>✓</a:t>
-            </a:r>
-            <a:endParaRPr lang="en-US" sz="1150" dirty="0"/>
-          </a:p>
-        </p:txBody>
-      </p:sp>
-      <p:sp>
-        <p:nvSpPr>
-          <p:cNvPr id="42" name="Text 40"/>
-          <p:cNvSpPr/>
-          <p:nvPr/>
-        </p:nvSpPr>
-        <p:spPr>
-          <a:xfrm>
-            <a:off x="7918704" y="4796028"/>
-            <a:ext cx="3383280" cy="438912"/>
-          </a:xfrm>
-          <a:prstGeom prst="rect">
-            <a:avLst/>
-          </a:prstGeom>
-          <a:noFill/>
-          <a:ln/>
-        </p:spPr>
-        <p:txBody>
-          <a:bodyPr wrap="square" lIns="0" tIns="0" rIns="0" bIns="0" rtlCol="0" anchor="t"/>
-          <a:lstStyle/>
-          <a:p>
-            <a:pPr indent="0" marL="0">
-              <a:lnSpc>
-                <a:spcPts val="1500"/>
-              </a:lnSpc>
-              <a:buNone/>
-            </a:pPr>
-            <a:r>
-              <a:rPr lang="en-US" sz="1150" dirty="0">
-                <a:solidFill>
-                  <a:srgbClr val="B4B7BD"/>
-                </a:solidFill>
-                <a:latin typeface="Calibri" pitchFamily="34" charset="0"/>
-                <a:ea typeface="Calibri" pitchFamily="34" charset="-122"/>
-                <a:cs typeface="Calibri" pitchFamily="34" charset="-120"/>
-              </a:rPr>
-              <a:t>Re-running adds new endpoints without disturbing existing rows.</a:t>
+              <a:t>Edit two things in that List: endpoint_groups and script.name. One entry per OS; the rest has working defaults.</a:t>
             </a:r>
             <a:endParaRPr lang="en-US" sz="1150" dirty="0"/>
           </a:p>
@@ -6770,7 +6487,7 @@
                 <a:ea typeface="Calibri" pitchFamily="34" charset="-122"/>
                 <a:cs typeface="Calibri" pitchFamily="34" charset="-120"/>
               </a:rPr>
-              <a:t>TEST 9</a:t>
+              <a:t>TEST 8</a:t>
             </a:r>
             <a:endParaRPr lang="en-US" sz="1100" dirty="0"/>
           </a:p>
@@ -6809,7 +6526,7 @@
                 <a:ea typeface="Calibri" pitchFamily="34" charset="-122"/>
                 <a:cs typeface="Calibri" pitchFamily="34" charset="-120"/>
               </a:rPr>
-              <a:t>Script Runner — scan due endpoints</a:t>
+              <a:t>Script Runner — refresh the tracker</a:t>
             </a:r>
             <a:endParaRPr lang="en-US" sz="3100" dirty="0"/>
           </a:p>
@@ -6956,7 +6673,7 @@
                 <a:ea typeface="Calibri" pitchFamily="34" charset="-122"/>
                 <a:cs typeface="Calibri" pitchFamily="34" charset="-120"/>
               </a:rPr>
-              <a:t>KOI Ext Script Runner - Scan Job</a:t>
+              <a:t>KOI Ext Script Runner - Refresh Job</a:t>
             </a:r>
             <a:endParaRPr lang="en-US" sz="1000" dirty="0"/>
           </a:p>
@@ -7037,7 +6754,7 @@
                 <a:ea typeface="Calibri" pitchFamily="34" charset="-122"/>
                 <a:cs typeface="Calibri" pitchFamily="34" charset="-120"/>
               </a:rPr>
-              <a:t>KOI Ext Script Runner - Process Config Entry</a:t>
+              <a:t>KOI Ext Script Runner - Refresh Entry</a:t>
             </a:r>
             <a:endParaRPr lang="en-US" sz="1000" dirty="0"/>
           </a:p>
@@ -7118,7 +6835,7 @@
                 <a:ea typeface="Calibri" pitchFamily="34" charset="-122"/>
                 <a:cs typeface="Calibri" pitchFamily="34" charset="-120"/>
               </a:rPr>
-              <a:t>KOI Ext Script Runner - Execute Endpoint Script</a:t>
+              <a:t>KoiScanTracker  (automation)</a:t>
             </a:r>
             <a:endParaRPr lang="en-US" sz="1000" dirty="0"/>
           </a:p>
@@ -7199,7 +6916,7 @@
                 <a:ea typeface="Calibri" pitchFamily="34" charset="-122"/>
                 <a:cs typeface="Calibri" pitchFamily="34" charset="-120"/>
               </a:rPr>
-              <a:t>KoiScanTracker  (our automation)</a:t>
+              <a:t>List: Koi Script Runner</a:t>
             </a:r>
             <a:endParaRPr lang="en-US" sz="1000" dirty="0"/>
           </a:p>
@@ -7319,7 +7036,7 @@
                 <a:ea typeface="Calibri" pitchFamily="34" charset="-122"/>
                 <a:cs typeface="Calibri" pitchFamily="34" charset="-120"/>
               </a:rPr>
-              <a:t>Test 8 passing — the tracker List has rows</a:t>
+              <a:t>Everything on the previous slide is in place</a:t>
             </a:r>
             <a:endParaRPr lang="en-US" sz="1000" dirty="0"/>
           </a:p>
@@ -7327,99 +7044,18 @@
       </p:sp>
       <p:sp>
         <p:nvSpPr>
-          <p:cNvPr id="17" name="Text 15"/>
-          <p:cNvSpPr/>
-          <p:nvPr/>
-        </p:nvSpPr>
-        <p:spPr>
-          <a:xfrm>
-            <a:off x="6940296" y="1632204"/>
-            <a:ext cx="128016" cy="201168"/>
-          </a:xfrm>
-          <a:prstGeom prst="rect">
-            <a:avLst/>
-          </a:prstGeom>
-          <a:noFill/>
-          <a:ln/>
-        </p:spPr>
-        <p:txBody>
-          <a:bodyPr wrap="square" lIns="0" tIns="0" rIns="0" bIns="0" rtlCol="0" anchor="t"/>
-          <a:lstStyle/>
-          <a:p>
-            <a:pPr indent="0" marL="0">
-              <a:buNone/>
-            </a:pPr>
-            <a:r>
-              <a:rPr lang="en-US" sz="1000" b="1" dirty="0">
-                <a:solidFill>
-                  <a:srgbClr val="F5A524"/>
-                </a:solidFill>
-                <a:latin typeface="Calibri" pitchFamily="34" charset="0"/>
-                <a:ea typeface="Calibri" pitchFamily="34" charset="-122"/>
-                <a:cs typeface="Calibri" pitchFamily="34" charset="-120"/>
-              </a:rPr>
-              <a:t>•</a:t>
-            </a:r>
-            <a:endParaRPr lang="en-US" sz="1000" dirty="0"/>
-          </a:p>
-        </p:txBody>
-      </p:sp>
-      <p:sp>
-        <p:nvSpPr>
-          <p:cNvPr id="18" name="Text 16"/>
-          <p:cNvSpPr/>
-          <p:nvPr/>
-        </p:nvSpPr>
-        <p:spPr>
-          <a:xfrm>
-            <a:off x="7086600" y="1632204"/>
-            <a:ext cx="4343400" cy="384048"/>
-          </a:xfrm>
-          <a:prstGeom prst="rect">
-            <a:avLst/>
-          </a:prstGeom>
-          <a:noFill/>
-          <a:ln/>
-        </p:spPr>
-        <p:txBody>
-          <a:bodyPr wrap="square" lIns="0" tIns="0" rIns="0" bIns="0" rtlCol="0" anchor="t"/>
-          <a:lstStyle/>
-          <a:p>
-            <a:pPr indent="0" marL="0">
-              <a:lnSpc>
-                <a:spcPts val="1200"/>
-              </a:lnSpc>
-              <a:buNone/>
-            </a:pPr>
-            <a:r>
-              <a:rPr lang="en-US" sz="1000" dirty="0">
-                <a:solidFill>
-                  <a:srgbClr val="B4B7BD"/>
-                </a:solidFill>
-                <a:latin typeface="Calibri" pitchFamily="34" charset="0"/>
-                <a:ea typeface="Calibri" pitchFamily="34" charset="-122"/>
-                <a:cs typeface="Calibri" pitchFamily="34" charset="-120"/>
-              </a:rPr>
-              <a:t>Connected agents in the group, matching the entry's endpoint_os</a:t>
-            </a:r>
-            <a:endParaRPr lang="en-US" sz="1000" dirty="0"/>
-          </a:p>
-        </p:txBody>
-      </p:sp>
-      <p:sp>
-        <p:nvSpPr>
-          <p:cNvPr id="19" name="Shape 17"/>
+          <p:cNvPr id="17" name="Shape 15"/>
           <p:cNvSpPr/>
           <p:nvPr/>
         </p:nvSpPr>
         <p:spPr>
           <a:xfrm>
             <a:off x="548640" y="2670048"/>
-            <a:ext cx="6400800" cy="3557016"/>
+            <a:ext cx="6400800" cy="2336292"/>
           </a:xfrm>
           <a:prstGeom prst="roundRect">
             <a:avLst>
-              <a:gd name="adj" fmla="val 1285"/>
+              <a:gd name="adj" fmla="val 1957"/>
             </a:avLst>
           </a:prstGeom>
           <a:solidFill>
@@ -7435,7 +7071,7 @@
       </p:sp>
       <p:sp>
         <p:nvSpPr>
-          <p:cNvPr id="20" name="Text 18"/>
+          <p:cNvPr id="18" name="Text 16"/>
           <p:cNvSpPr/>
           <p:nvPr/>
         </p:nvSpPr>
@@ -7474,7 +7110,7 @@
       </p:sp>
       <p:sp>
         <p:nvSpPr>
-          <p:cNvPr id="21" name="Text 19"/>
+          <p:cNvPr id="19" name="Text 17"/>
           <p:cNvSpPr/>
           <p:nvPr/>
         </p:nvSpPr>
@@ -7513,7 +7149,7 @@
       </p:sp>
       <p:sp>
         <p:nvSpPr>
-          <p:cNvPr id="22" name="Text 20"/>
+          <p:cNvPr id="20" name="Text 18"/>
           <p:cNvSpPr/>
           <p:nvPr/>
         </p:nvSpPr>
@@ -7547,7 +7183,7 @@
                 <a:ea typeface="Calibri" pitchFamily="34" charset="-122"/>
                 <a:cs typeface="Calibri" pitchFamily="34" charset="-120"/>
               </a:rPr>
-              <a:t>Automation → Jobs → New Job → time-triggered → playbook KOI Ext Script Runner - Scan Job.</a:t>
+              <a:t>Automation → Jobs → New Job, time-triggered, playbook KOI Ext Script Runner - Refresh Job.</a:t>
             </a:r>
             <a:endParaRPr lang="en-US" sz="1150" dirty="0"/>
           </a:p>
@@ -7555,7 +7191,7 @@
       </p:sp>
       <p:sp>
         <p:nvSpPr>
-          <p:cNvPr id="23" name="Text 21"/>
+          <p:cNvPr id="21" name="Text 19"/>
           <p:cNvSpPr/>
           <p:nvPr/>
         </p:nvSpPr>
@@ -7594,7 +7230,7 @@
       </p:sp>
       <p:sp>
         <p:nvSpPr>
-          <p:cNvPr id="24" name="Text 22"/>
+          <p:cNvPr id="22" name="Text 20"/>
           <p:cNvSpPr/>
           <p:nvPr/>
         </p:nvSpPr>
@@ -7628,7 +7264,7 @@
                 <a:ea typeface="Calibri" pitchFamily="34" charset="-122"/>
                 <a:cs typeface="Calibri" pitchFamily="34" charset="-120"/>
               </a:rPr>
-              <a:t>Enable the Job, then Run now.</a:t>
+              <a:t>Enable the Job, then use Run now.</a:t>
             </a:r>
             <a:endParaRPr lang="en-US" sz="1150" dirty="0"/>
           </a:p>
@@ -7636,180 +7272,18 @@
       </p:sp>
       <p:sp>
         <p:nvSpPr>
-          <p:cNvPr id="25" name="Text 23"/>
-          <p:cNvSpPr/>
-          <p:nvPr/>
-        </p:nvSpPr>
-        <p:spPr>
-          <a:xfrm>
-            <a:off x="859536" y="4046220"/>
-            <a:ext cx="219456" cy="256032"/>
-          </a:xfrm>
-          <a:prstGeom prst="rect">
-            <a:avLst/>
-          </a:prstGeom>
-          <a:noFill/>
-          <a:ln/>
-        </p:spPr>
-        <p:txBody>
-          <a:bodyPr wrap="square" lIns="0" tIns="0" rIns="0" bIns="0" rtlCol="0" anchor="t"/>
-          <a:lstStyle/>
-          <a:p>
-            <a:pPr indent="0" marL="0">
-              <a:buNone/>
-            </a:pPr>
-            <a:r>
-              <a:rPr lang="en-US" sz="1150" b="1" dirty="0">
-                <a:solidFill>
-                  <a:srgbClr val="E8551F"/>
-                </a:solidFill>
-                <a:latin typeface="Calibri" pitchFamily="34" charset="0"/>
-                <a:ea typeface="Calibri" pitchFamily="34" charset="-122"/>
-                <a:cs typeface="Calibri" pitchFamily="34" charset="-120"/>
-              </a:rPr>
-              <a:t>3</a:t>
-            </a:r>
-            <a:endParaRPr lang="en-US" sz="1150" dirty="0"/>
-          </a:p>
-        </p:txBody>
-      </p:sp>
-      <p:sp>
-        <p:nvSpPr>
-          <p:cNvPr id="26" name="Text 24"/>
-          <p:cNvSpPr/>
-          <p:nvPr/>
-        </p:nvSpPr>
-        <p:spPr>
-          <a:xfrm>
-            <a:off x="1152144" y="4046220"/>
-            <a:ext cx="5486400" cy="246888"/>
-          </a:xfrm>
-          <a:prstGeom prst="rect">
-            <a:avLst/>
-          </a:prstGeom>
-          <a:noFill/>
-          <a:ln/>
-        </p:spPr>
-        <p:txBody>
-          <a:bodyPr wrap="square" lIns="0" tIns="0" rIns="0" bIns="0" rtlCol="0" anchor="t"/>
-          <a:lstStyle/>
-          <a:p>
-            <a:pPr indent="0" marL="0">
-              <a:lnSpc>
-                <a:spcPts val="1500"/>
-              </a:lnSpc>
-              <a:buNone/>
-            </a:pPr>
-            <a:r>
-              <a:rPr lang="en-US" sz="1150" dirty="0">
-                <a:solidFill>
-                  <a:srgbClr val="B4B7BD"/>
-                </a:solidFill>
-                <a:latin typeface="Calibri" pitchFamily="34" charset="0"/>
-                <a:ea typeface="Calibri" pitchFamily="34" charset="-122"/>
-                <a:cs typeface="Calibri" pitchFamily="34" charset="-120"/>
-              </a:rPr>
-              <a:t>Open the run, then check Action Center.</a:t>
-            </a:r>
-            <a:endParaRPr lang="en-US" sz="1150" dirty="0"/>
-          </a:p>
-        </p:txBody>
-      </p:sp>
-      <p:sp>
-        <p:nvSpPr>
-          <p:cNvPr id="27" name="Text 25"/>
-          <p:cNvSpPr/>
-          <p:nvPr/>
-        </p:nvSpPr>
-        <p:spPr>
-          <a:xfrm>
-            <a:off x="859536" y="4375404"/>
-            <a:ext cx="219456" cy="256032"/>
-          </a:xfrm>
-          <a:prstGeom prst="rect">
-            <a:avLst/>
-          </a:prstGeom>
-          <a:noFill/>
-          <a:ln/>
-        </p:spPr>
-        <p:txBody>
-          <a:bodyPr wrap="square" lIns="0" tIns="0" rIns="0" bIns="0" rtlCol="0" anchor="t"/>
-          <a:lstStyle/>
-          <a:p>
-            <a:pPr indent="0" marL="0">
-              <a:buNone/>
-            </a:pPr>
-            <a:r>
-              <a:rPr lang="en-US" sz="1150" b="1" dirty="0">
-                <a:solidFill>
-                  <a:srgbClr val="E8551F"/>
-                </a:solidFill>
-                <a:latin typeface="Calibri" pitchFamily="34" charset="0"/>
-                <a:ea typeface="Calibri" pitchFamily="34" charset="-122"/>
-                <a:cs typeface="Calibri" pitchFamily="34" charset="-120"/>
-              </a:rPr>
-              <a:t>4</a:t>
-            </a:r>
-            <a:endParaRPr lang="en-US" sz="1150" dirty="0"/>
-          </a:p>
-        </p:txBody>
-      </p:sp>
-      <p:sp>
-        <p:nvSpPr>
-          <p:cNvPr id="28" name="Text 26"/>
-          <p:cNvSpPr/>
-          <p:nvPr/>
-        </p:nvSpPr>
-        <p:spPr>
-          <a:xfrm>
-            <a:off x="1152144" y="4375404"/>
-            <a:ext cx="5486400" cy="246888"/>
-          </a:xfrm>
-          <a:prstGeom prst="rect">
-            <a:avLst/>
-          </a:prstGeom>
-          <a:noFill/>
-          <a:ln/>
-        </p:spPr>
-        <p:txBody>
-          <a:bodyPr wrap="square" lIns="0" tIns="0" rIns="0" bIns="0" rtlCol="0" anchor="t"/>
-          <a:lstStyle/>
-          <a:p>
-            <a:pPr indent="0" marL="0">
-              <a:lnSpc>
-                <a:spcPts val="1500"/>
-              </a:lnSpc>
-              <a:buNone/>
-            </a:pPr>
-            <a:r>
-              <a:rPr lang="en-US" sz="1150" dirty="0">
-                <a:solidFill>
-                  <a:srgbClr val="B4B7BD"/>
-                </a:solidFill>
-                <a:latin typeface="Calibri" pitchFamily="34" charset="0"/>
-                <a:ea typeface="Calibri" pitchFamily="34" charset="-122"/>
-                <a:cs typeface="Calibri" pitchFamily="34" charset="-120"/>
-              </a:rPr>
-              <a:t>Run it a second time immediately.</a:t>
-            </a:r>
-            <a:endParaRPr lang="en-US" sz="1150" dirty="0"/>
-          </a:p>
-        </p:txBody>
-      </p:sp>
-      <p:sp>
-        <p:nvSpPr>
-          <p:cNvPr id="29" name="Shape 27"/>
+          <p:cNvPr id="23" name="Shape 21"/>
           <p:cNvSpPr/>
           <p:nvPr/>
         </p:nvSpPr>
         <p:spPr>
           <a:xfrm>
             <a:off x="7315200" y="2670048"/>
-            <a:ext cx="4297680" cy="3557016"/>
+            <a:ext cx="4297680" cy="2336292"/>
           </a:xfrm>
           <a:prstGeom prst="roundRect">
             <a:avLst>
-              <a:gd name="adj" fmla="val 1285"/>
+              <a:gd name="adj" fmla="val 1957"/>
             </a:avLst>
           </a:prstGeom>
           <a:solidFill>
@@ -7825,7 +7299,7 @@
       </p:sp>
       <p:sp>
         <p:nvSpPr>
-          <p:cNvPr id="30" name="Text 28"/>
+          <p:cNvPr id="24" name="Text 22"/>
           <p:cNvSpPr/>
           <p:nvPr/>
         </p:nvSpPr>
@@ -7864,7 +7338,7 @@
       </p:sp>
       <p:sp>
         <p:nvSpPr>
-          <p:cNvPr id="31" name="Text 29"/>
+          <p:cNvPr id="25" name="Text 23"/>
           <p:cNvSpPr/>
           <p:nvPr/>
         </p:nvSpPr>
@@ -7903,7 +7377,7 @@
       </p:sp>
       <p:sp>
         <p:nvSpPr>
-          <p:cNvPr id="32" name="Text 30"/>
+          <p:cNvPr id="26" name="Text 24"/>
           <p:cNvSpPr/>
           <p:nvPr/>
         </p:nvSpPr>
@@ -7937,7 +7411,7 @@
                 <a:ea typeface="Calibri" pitchFamily="34" charset="-122"/>
                 <a:cs typeface="Calibri" pitchFamily="34" charset="-120"/>
               </a:rPr>
-              <a:t>The script is dispatched to due, connected endpoints.</a:t>
+              <a:t>A tracker List appears under Lists, named as in your entry.</a:t>
             </a:r>
             <a:endParaRPr lang="en-US" sz="1150" dirty="0"/>
           </a:p>
@@ -7945,7 +7419,7 @@
       </p:sp>
       <p:sp>
         <p:nvSpPr>
-          <p:cNvPr id="33" name="Text 31"/>
+          <p:cNvPr id="27" name="Text 25"/>
           <p:cNvSpPr/>
           <p:nvPr/>
         </p:nvSpPr>
@@ -7984,7 +7458,7 @@
       </p:sp>
       <p:sp>
         <p:nvSpPr>
-          <p:cNvPr id="34" name="Text 32"/>
+          <p:cNvPr id="28" name="Text 26"/>
           <p:cNvSpPr/>
           <p:nvPr/>
         </p:nvSpPr>
@@ -8018,7 +7492,7 @@
                 <a:ea typeface="Calibri" pitchFamily="34" charset="-122"/>
                 <a:cs typeface="Calibri" pitchFamily="34" charset="-120"/>
               </a:rPr>
-              <a:t>Those endpoints get a last-scan timestamp in the tracker.</a:t>
+              <a:t>It fills with one row per endpoint: an id and a last-scan value.</a:t>
             </a:r>
             <a:endParaRPr lang="en-US" sz="1150" dirty="0"/>
           </a:p>
@@ -8026,7 +7500,7 @@
       </p:sp>
       <p:sp>
         <p:nvSpPr>
-          <p:cNvPr id="35" name="Text 33"/>
+          <p:cNvPr id="29" name="Text 27"/>
           <p:cNvSpPr/>
           <p:nvPr/>
         </p:nvSpPr>
@@ -8065,7 +7539,7 @@
       </p:sp>
       <p:sp>
         <p:nvSpPr>
-          <p:cNvPr id="36" name="Text 34"/>
+          <p:cNvPr id="30" name="Text 28"/>
           <p:cNvSpPr/>
           <p:nvPr/>
         </p:nvSpPr>
@@ -8099,169 +7573,7 @@
                 <a:ea typeface="Calibri" pitchFamily="34" charset="-122"/>
                 <a:cs typeface="Calibri" pitchFamily="34" charset="-120"/>
               </a:rPr>
-              <a:t>Offline and wrong-OS endpoints stay due and retry later.</a:t>
-            </a:r>
-            <a:endParaRPr lang="en-US" sz="1150" dirty="0"/>
-          </a:p>
-        </p:txBody>
-      </p:sp>
-      <p:sp>
-        <p:nvSpPr>
-          <p:cNvPr id="37" name="Text 35"/>
-          <p:cNvSpPr/>
-          <p:nvPr/>
-        </p:nvSpPr>
-        <p:spPr>
-          <a:xfrm>
-            <a:off x="7626096" y="4750308"/>
-            <a:ext cx="219456" cy="256032"/>
-          </a:xfrm>
-          <a:prstGeom prst="rect">
-            <a:avLst/>
-          </a:prstGeom>
-          <a:noFill/>
-          <a:ln/>
-        </p:spPr>
-        <p:txBody>
-          <a:bodyPr wrap="square" lIns="0" tIns="0" rIns="0" bIns="0" rtlCol="0" anchor="t"/>
-          <a:lstStyle/>
-          <a:p>
-            <a:pPr indent="0" marL="0">
-              <a:buNone/>
-            </a:pPr>
-            <a:r>
-              <a:rPr lang="en-US" sz="1150" b="1" dirty="0">
-                <a:solidFill>
-                  <a:srgbClr val="3FB950"/>
-                </a:solidFill>
-                <a:latin typeface="Calibri" pitchFamily="34" charset="0"/>
-                <a:ea typeface="Calibri" pitchFamily="34" charset="-122"/>
-                <a:cs typeface="Calibri" pitchFamily="34" charset="-120"/>
-              </a:rPr>
-              <a:t>✓</a:t>
-            </a:r>
-            <a:endParaRPr lang="en-US" sz="1150" dirty="0"/>
-          </a:p>
-        </p:txBody>
-      </p:sp>
-      <p:sp>
-        <p:nvSpPr>
-          <p:cNvPr id="38" name="Text 36"/>
-          <p:cNvSpPr/>
-          <p:nvPr/>
-        </p:nvSpPr>
-        <p:spPr>
-          <a:xfrm>
-            <a:off x="7918704" y="4750308"/>
-            <a:ext cx="3383280" cy="438912"/>
-          </a:xfrm>
-          <a:prstGeom prst="rect">
-            <a:avLst/>
-          </a:prstGeom>
-          <a:noFill/>
-          <a:ln/>
-        </p:spPr>
-        <p:txBody>
-          <a:bodyPr wrap="square" lIns="0" tIns="0" rIns="0" bIns="0" rtlCol="0" anchor="t"/>
-          <a:lstStyle/>
-          <a:p>
-            <a:pPr indent="0" marL="0">
-              <a:lnSpc>
-                <a:spcPts val="1500"/>
-              </a:lnSpc>
-              <a:buNone/>
-            </a:pPr>
-            <a:r>
-              <a:rPr lang="en-US" sz="1150" dirty="0">
-                <a:solidFill>
-                  <a:srgbClr val="B4B7BD"/>
-                </a:solidFill>
-                <a:latin typeface="Calibri" pitchFamily="34" charset="0"/>
-                <a:ea typeface="Calibri" pitchFamily="34" charset="-122"/>
-                <a:cs typeface="Calibri" pitchFamily="34" charset="-120"/>
-              </a:rPr>
-              <a:t>The second run does nothing — all inside the rescan interval.</a:t>
-            </a:r>
-            <a:endParaRPr lang="en-US" sz="1150" dirty="0"/>
-          </a:p>
-        </p:txBody>
-      </p:sp>
-      <p:sp>
-        <p:nvSpPr>
-          <p:cNvPr id="39" name="Text 37"/>
-          <p:cNvSpPr/>
-          <p:nvPr/>
-        </p:nvSpPr>
-        <p:spPr>
-          <a:xfrm>
-            <a:off x="7626096" y="5266944"/>
-            <a:ext cx="219456" cy="256032"/>
-          </a:xfrm>
-          <a:prstGeom prst="rect">
-            <a:avLst/>
-          </a:prstGeom>
-          <a:noFill/>
-          <a:ln/>
-        </p:spPr>
-        <p:txBody>
-          <a:bodyPr wrap="square" lIns="0" tIns="0" rIns="0" bIns="0" rtlCol="0" anchor="t"/>
-          <a:lstStyle/>
-          <a:p>
-            <a:pPr indent="0" marL="0">
-              <a:buNone/>
-            </a:pPr>
-            <a:r>
-              <a:rPr lang="en-US" sz="1150" b="1" dirty="0">
-                <a:solidFill>
-                  <a:srgbClr val="3FB950"/>
-                </a:solidFill>
-                <a:latin typeface="Calibri" pitchFamily="34" charset="0"/>
-                <a:ea typeface="Calibri" pitchFamily="34" charset="-122"/>
-                <a:cs typeface="Calibri" pitchFamily="34" charset="-120"/>
-              </a:rPr>
-              <a:t>✓</a:t>
-            </a:r>
-            <a:endParaRPr lang="en-US" sz="1150" dirty="0"/>
-          </a:p>
-        </p:txBody>
-      </p:sp>
-      <p:sp>
-        <p:nvSpPr>
-          <p:cNvPr id="40" name="Text 38"/>
-          <p:cNvSpPr/>
-          <p:nvPr/>
-        </p:nvSpPr>
-        <p:spPr>
-          <a:xfrm>
-            <a:off x="7918704" y="5266944"/>
-            <a:ext cx="3383280" cy="630936"/>
-          </a:xfrm>
-          <a:prstGeom prst="rect">
-            <a:avLst/>
-          </a:prstGeom>
-          <a:noFill/>
-          <a:ln/>
-        </p:spPr>
-        <p:txBody>
-          <a:bodyPr wrap="square" lIns="0" tIns="0" rIns="0" bIns="0" rtlCol="0" anchor="t"/>
-          <a:lstStyle/>
-          <a:p>
-            <a:pPr indent="0" marL="0">
-              <a:lnSpc>
-                <a:spcPts val="1500"/>
-              </a:lnSpc>
-              <a:buNone/>
-            </a:pPr>
-            <a:r>
-              <a:rPr lang="en-US" sz="1150" dirty="0">
-                <a:solidFill>
-                  <a:srgbClr val="B4B7BD"/>
-                </a:solidFill>
-                <a:latin typeface="Calibri" pitchFamily="34" charset="0"/>
-                <a:ea typeface="Calibri" pitchFamily="34" charset="-122"/>
-                <a:cs typeface="Calibri" pitchFamily="34" charset="-120"/>
-              </a:rPr>
-              <a:t>A SKIPPED entry means nothing was due; a STILL RUNNING entry means Action Center is finishing on its own. Both are normal and send no email.</a:t>
+              <a:t>Re-running adds new endpoints without disturbing existing rows.</a:t>
             </a:r>
             <a:endParaRPr lang="en-US" sz="1150" dirty="0"/>
           </a:p>
@@ -8332,7 +7644,7 @@
                 <a:ea typeface="Calibri" pitchFamily="34" charset="-122"/>
                 <a:cs typeface="Calibri" pitchFamily="34" charset="-120"/>
               </a:rPr>
-              <a:t>TEST 10</a:t>
+              <a:t>TEST 9</a:t>
             </a:r>
             <a:endParaRPr lang="en-US" sz="1100" dirty="0"/>
           </a:p>
@@ -8371,7 +7683,7 @@
                 <a:ea typeface="Calibri" pitchFamily="34" charset="-122"/>
                 <a:cs typeface="Calibri" pitchFamily="34" charset="-120"/>
               </a:rPr>
-              <a:t>Alert fields and layout</a:t>
+              <a:t>Script Runner — scan due endpoints</a:t>
             </a:r>
             <a:endParaRPr lang="en-US" sz="3100" dirty="0"/>
           </a:p>
@@ -8386,11 +7698,11 @@
         <p:spPr>
           <a:xfrm>
             <a:off x="548640" y="1280160"/>
-            <a:ext cx="11064240" cy="982980"/>
+            <a:ext cx="11064240" cy="1207008"/>
           </a:xfrm>
           <a:prstGeom prst="roundRect">
             <a:avLst>
-              <a:gd name="adj" fmla="val 4651"/>
+              <a:gd name="adj" fmla="val 3788"/>
             </a:avLst>
           </a:prstGeom>
           <a:solidFill>
@@ -8518,7 +7830,7 @@
                 <a:ea typeface="Calibri" pitchFamily="34" charset="-122"/>
                 <a:cs typeface="Calibri" pitchFamily="34" charset="-120"/>
               </a:rPr>
-              <a:t>19 KOI incident fields</a:t>
+              <a:t>KOI Ext Script Runner - Scan Job</a:t>
             </a:r>
             <a:endParaRPr lang="en-US" sz="1000" dirty="0"/>
           </a:p>
@@ -8599,7 +7911,7 @@
                 <a:ea typeface="Calibri" pitchFamily="34" charset="-122"/>
                 <a:cs typeface="Calibri" pitchFamily="34" charset="-120"/>
               </a:rPr>
-              <a:t>KOI Supply Chain Alert incident type</a:t>
+              <a:t>KOI Ext Script Runner - Process Config Entry</a:t>
             </a:r>
             <a:endParaRPr lang="en-US" sz="1000" dirty="0"/>
           </a:p>
@@ -8680,7 +7992,7 @@
                 <a:ea typeface="Calibri" pitchFamily="34" charset="-122"/>
                 <a:cs typeface="Calibri" pitchFamily="34" charset="-120"/>
               </a:rPr>
-              <a:t>its layout</a:t>
+              <a:t>KOI Ext Script Runner - Execute Endpoint Script</a:t>
             </a:r>
             <a:endParaRPr lang="en-US" sz="1000" dirty="0"/>
           </a:p>
@@ -8694,34 +8006,34 @@
         </p:nvSpPr>
         <p:spPr>
           <a:xfrm>
-            <a:off x="5669280" y="1408176"/>
-            <a:ext cx="1371600" cy="201168"/>
-          </a:xfrm>
-          <a:prstGeom prst="rect">
-            <a:avLst/>
-          </a:prstGeom>
-          <a:noFill/>
-          <a:ln/>
-        </p:spPr>
-        <p:txBody>
-          <a:bodyPr wrap="square" lIns="0" tIns="0" rIns="0" bIns="0" rtlCol="0" anchor="t"/>
-          <a:lstStyle/>
-          <a:p>
-            <a:pPr indent="0" marL="0">
-              <a:buNone/>
-            </a:pPr>
-            <a:r>
-              <a:rPr lang="en-US" sz="900" b="1" spc="100" kern="0" dirty="0">
-                <a:solidFill>
-                  <a:srgbClr val="F5A524"/>
-                </a:solidFill>
-                <a:latin typeface="Calibri" pitchFamily="34" charset="0"/>
-                <a:ea typeface="Calibri" pitchFamily="34" charset="-122"/>
-                <a:cs typeface="Calibri" pitchFamily="34" charset="-120"/>
-              </a:rPr>
-              <a:t>TENANT SETUP</a:t>
-            </a:r>
-            <a:endParaRPr lang="en-US" sz="900" dirty="0"/>
+            <a:off x="2139696" y="2080260"/>
+            <a:ext cx="128016" cy="201168"/>
+          </a:xfrm>
+          <a:prstGeom prst="rect">
+            <a:avLst/>
+          </a:prstGeom>
+          <a:noFill/>
+          <a:ln/>
+        </p:spPr>
+        <p:txBody>
+          <a:bodyPr wrap="square" lIns="0" tIns="0" rIns="0" bIns="0" rtlCol="0" anchor="t"/>
+          <a:lstStyle/>
+          <a:p>
+            <a:pPr indent="0" marL="0">
+              <a:buNone/>
+            </a:pPr>
+            <a:r>
+              <a:rPr lang="en-US" sz="1000" b="1" dirty="0">
+                <a:solidFill>
+                  <a:srgbClr val="22D3EE"/>
+                </a:solidFill>
+                <a:latin typeface="Calibri" pitchFamily="34" charset="0"/>
+                <a:ea typeface="Calibri" pitchFamily="34" charset="-122"/>
+                <a:cs typeface="Calibri" pitchFamily="34" charset="-120"/>
+              </a:rPr>
+              <a:t>•</a:t>
+            </a:r>
+            <a:endParaRPr lang="en-US" sz="1000" dirty="0"/>
           </a:p>
         </p:txBody>
       </p:sp>
@@ -8733,46 +8045,7 @@
         </p:nvSpPr>
         <p:spPr>
           <a:xfrm>
-            <a:off x="6940296" y="1408176"/>
-            <a:ext cx="128016" cy="201168"/>
-          </a:xfrm>
-          <a:prstGeom prst="rect">
-            <a:avLst/>
-          </a:prstGeom>
-          <a:noFill/>
-          <a:ln/>
-        </p:spPr>
-        <p:txBody>
-          <a:bodyPr wrap="square" lIns="0" tIns="0" rIns="0" bIns="0" rtlCol="0" anchor="t"/>
-          <a:lstStyle/>
-          <a:p>
-            <a:pPr indent="0" marL="0">
-              <a:buNone/>
-            </a:pPr>
-            <a:r>
-              <a:rPr lang="en-US" sz="1000" b="1" dirty="0">
-                <a:solidFill>
-                  <a:srgbClr val="F5A524"/>
-                </a:solidFill>
-                <a:latin typeface="Calibri" pitchFamily="34" charset="0"/>
-                <a:ea typeface="Calibri" pitchFamily="34" charset="-122"/>
-                <a:cs typeface="Calibri" pitchFamily="34" charset="-120"/>
-              </a:rPr>
-              <a:t>•</a:t>
-            </a:r>
-            <a:endParaRPr lang="en-US" sz="1000" dirty="0"/>
-          </a:p>
-        </p:txBody>
-      </p:sp>
-      <p:sp>
-        <p:nvSpPr>
-          <p:cNvPr id="14" name="Text 12"/>
-          <p:cNvSpPr/>
-          <p:nvPr/>
-        </p:nvSpPr>
-        <p:spPr>
-          <a:xfrm>
-            <a:off x="7086600" y="1408176"/>
+            <a:off x="2286000" y="2080260"/>
             <a:ext cx="4343400" cy="192024"/>
           </a:xfrm>
           <a:prstGeom prst="rect">
@@ -8800,7 +8073,7 @@
                 <a:ea typeface="Calibri" pitchFamily="34" charset="-122"/>
                 <a:cs typeface="Calibri" pitchFamily="34" charset="-120"/>
               </a:rPr>
-              <a:t>Test 4 passing — triage has run on an alert</a:t>
+              <a:t>KoiScanTracker  (our automation)</a:t>
             </a:r>
             <a:endParaRPr lang="en-US" sz="1000" dirty="0"/>
           </a:p>
@@ -8808,13 +8081,52 @@
       </p:sp>
       <p:sp>
         <p:nvSpPr>
+          <p:cNvPr id="14" name="Text 12"/>
+          <p:cNvSpPr/>
+          <p:nvPr/>
+        </p:nvSpPr>
+        <p:spPr>
+          <a:xfrm>
+            <a:off x="5669280" y="1408176"/>
+            <a:ext cx="1371600" cy="201168"/>
+          </a:xfrm>
+          <a:prstGeom prst="rect">
+            <a:avLst/>
+          </a:prstGeom>
+          <a:noFill/>
+          <a:ln/>
+        </p:spPr>
+        <p:txBody>
+          <a:bodyPr wrap="square" lIns="0" tIns="0" rIns="0" bIns="0" rtlCol="0" anchor="t"/>
+          <a:lstStyle/>
+          <a:p>
+            <a:pPr indent="0" marL="0">
+              <a:buNone/>
+            </a:pPr>
+            <a:r>
+              <a:rPr lang="en-US" sz="900" b="1" spc="100" kern="0" dirty="0">
+                <a:solidFill>
+                  <a:srgbClr val="F5A524"/>
+                </a:solidFill>
+                <a:latin typeface="Calibri" pitchFamily="34" charset="0"/>
+                <a:ea typeface="Calibri" pitchFamily="34" charset="-122"/>
+                <a:cs typeface="Calibri" pitchFamily="34" charset="-120"/>
+              </a:rPr>
+              <a:t>TENANT SETUP</a:t>
+            </a:r>
+            <a:endParaRPr lang="en-US" sz="900" dirty="0"/>
+          </a:p>
+        </p:txBody>
+      </p:sp>
+      <p:sp>
+        <p:nvSpPr>
           <p:cNvPr id="15" name="Text 13"/>
           <p:cNvSpPr/>
           <p:nvPr/>
         </p:nvSpPr>
         <p:spPr>
           <a:xfrm>
-            <a:off x="6940296" y="1632204"/>
+            <a:off x="6940296" y="1408176"/>
             <a:ext cx="128016" cy="201168"/>
           </a:xfrm>
           <a:prstGeom prst="rect">
@@ -8853,7 +8165,7 @@
         </p:nvSpPr>
         <p:spPr>
           <a:xfrm>
-            <a:off x="7086600" y="1632204"/>
+            <a:off x="7086600" y="1408176"/>
             <a:ext cx="4343400" cy="192024"/>
           </a:xfrm>
           <a:prstGeom prst="rect">
@@ -8881,7 +8193,7 @@
                 <a:ea typeface="Calibri" pitchFamily="34" charset="-122"/>
                 <a:cs typeface="Calibri" pitchFamily="34" charset="-120"/>
               </a:rPr>
-              <a:t>The incident type and layout installed with this pack</a:t>
+              <a:t>Test 8 passing — the tracker List has rows</a:t>
             </a:r>
             <a:endParaRPr lang="en-US" sz="1000" dirty="0"/>
           </a:p>
@@ -8889,18 +8201,99 @@
       </p:sp>
       <p:sp>
         <p:nvSpPr>
-          <p:cNvPr id="17" name="Shape 15"/>
-          <p:cNvSpPr/>
-          <p:nvPr/>
-        </p:nvSpPr>
-        <p:spPr>
-          <a:xfrm>
-            <a:off x="548640" y="2446020"/>
-            <a:ext cx="6400800" cy="2336292"/>
+          <p:cNvPr id="17" name="Text 15"/>
+          <p:cNvSpPr/>
+          <p:nvPr/>
+        </p:nvSpPr>
+        <p:spPr>
+          <a:xfrm>
+            <a:off x="6940296" y="1632204"/>
+            <a:ext cx="128016" cy="201168"/>
+          </a:xfrm>
+          <a:prstGeom prst="rect">
+            <a:avLst/>
+          </a:prstGeom>
+          <a:noFill/>
+          <a:ln/>
+        </p:spPr>
+        <p:txBody>
+          <a:bodyPr wrap="square" lIns="0" tIns="0" rIns="0" bIns="0" rtlCol="0" anchor="t"/>
+          <a:lstStyle/>
+          <a:p>
+            <a:pPr indent="0" marL="0">
+              <a:buNone/>
+            </a:pPr>
+            <a:r>
+              <a:rPr lang="en-US" sz="1000" b="1" dirty="0">
+                <a:solidFill>
+                  <a:srgbClr val="F5A524"/>
+                </a:solidFill>
+                <a:latin typeface="Calibri" pitchFamily="34" charset="0"/>
+                <a:ea typeface="Calibri" pitchFamily="34" charset="-122"/>
+                <a:cs typeface="Calibri" pitchFamily="34" charset="-120"/>
+              </a:rPr>
+              <a:t>•</a:t>
+            </a:r>
+            <a:endParaRPr lang="en-US" sz="1000" dirty="0"/>
+          </a:p>
+        </p:txBody>
+      </p:sp>
+      <p:sp>
+        <p:nvSpPr>
+          <p:cNvPr id="18" name="Text 16"/>
+          <p:cNvSpPr/>
+          <p:nvPr/>
+        </p:nvSpPr>
+        <p:spPr>
+          <a:xfrm>
+            <a:off x="7086600" y="1632204"/>
+            <a:ext cx="4343400" cy="384048"/>
+          </a:xfrm>
+          <a:prstGeom prst="rect">
+            <a:avLst/>
+          </a:prstGeom>
+          <a:noFill/>
+          <a:ln/>
+        </p:spPr>
+        <p:txBody>
+          <a:bodyPr wrap="square" lIns="0" tIns="0" rIns="0" bIns="0" rtlCol="0" anchor="t"/>
+          <a:lstStyle/>
+          <a:p>
+            <a:pPr indent="0" marL="0">
+              <a:lnSpc>
+                <a:spcPts val="1200"/>
+              </a:lnSpc>
+              <a:buNone/>
+            </a:pPr>
+            <a:r>
+              <a:rPr lang="en-US" sz="1000" dirty="0">
+                <a:solidFill>
+                  <a:srgbClr val="B4B7BD"/>
+                </a:solidFill>
+                <a:latin typeface="Calibri" pitchFamily="34" charset="0"/>
+                <a:ea typeface="Calibri" pitchFamily="34" charset="-122"/>
+                <a:cs typeface="Calibri" pitchFamily="34" charset="-120"/>
+              </a:rPr>
+              <a:t>Connected agents in the group, matching the entry's endpoint_os</a:t>
+            </a:r>
+            <a:endParaRPr lang="en-US" sz="1000" dirty="0"/>
+          </a:p>
+        </p:txBody>
+      </p:sp>
+      <p:sp>
+        <p:nvSpPr>
+          <p:cNvPr id="19" name="Shape 17"/>
+          <p:cNvSpPr/>
+          <p:nvPr/>
+        </p:nvSpPr>
+        <p:spPr>
+          <a:xfrm>
+            <a:off x="548640" y="2670048"/>
+            <a:ext cx="6400800" cy="3557016"/>
           </a:xfrm>
           <a:prstGeom prst="roundRect">
             <a:avLst>
-              <a:gd name="adj" fmla="val 1957"/>
+              <a:gd name="adj" fmla="val 1285"/>
             </a:avLst>
           </a:prstGeom>
           <a:solidFill>
@@ -8916,13 +8309,13 @@
       </p:sp>
       <p:sp>
         <p:nvSpPr>
-          <p:cNvPr id="18" name="Text 16"/>
-          <p:cNvSpPr/>
-          <p:nvPr/>
-        </p:nvSpPr>
-        <p:spPr>
-          <a:xfrm>
-            <a:off x="859536" y="2628900"/>
+          <p:cNvPr id="20" name="Text 18"/>
+          <p:cNvSpPr/>
+          <p:nvPr/>
+        </p:nvSpPr>
+        <p:spPr>
+          <a:xfrm>
+            <a:off x="859536" y="2852928"/>
             <a:ext cx="2743200" cy="256032"/>
           </a:xfrm>
           <a:prstGeom prst="rect">
@@ -8955,13 +8348,13 @@
       </p:sp>
       <p:sp>
         <p:nvSpPr>
-          <p:cNvPr id="19" name="Text 17"/>
-          <p:cNvSpPr/>
-          <p:nvPr/>
-        </p:nvSpPr>
-        <p:spPr>
-          <a:xfrm>
-            <a:off x="859536" y="2976372"/>
+          <p:cNvPr id="21" name="Text 19"/>
+          <p:cNvSpPr/>
+          <p:nvPr/>
+        </p:nvSpPr>
+        <p:spPr>
+          <a:xfrm>
+            <a:off x="859536" y="3200400"/>
             <a:ext cx="219456" cy="256032"/>
           </a:xfrm>
           <a:prstGeom prst="rect">
@@ -8994,14 +8387,14 @@
       </p:sp>
       <p:sp>
         <p:nvSpPr>
-          <p:cNvPr id="20" name="Text 18"/>
-          <p:cNvSpPr/>
-          <p:nvPr/>
-        </p:nvSpPr>
-        <p:spPr>
-          <a:xfrm>
-            <a:off x="1152144" y="2976372"/>
-            <a:ext cx="5486400" cy="246888"/>
+          <p:cNvPr id="22" name="Text 20"/>
+          <p:cNvSpPr/>
+          <p:nvPr/>
+        </p:nvSpPr>
+        <p:spPr>
+          <a:xfrm>
+            <a:off x="1152144" y="3200400"/>
+            <a:ext cx="5486400" cy="438912"/>
           </a:xfrm>
           <a:prstGeom prst="rect">
             <a:avLst/>
@@ -9028,7 +8421,7 @@
                 <a:ea typeface="Calibri" pitchFamily="34" charset="-122"/>
                 <a:cs typeface="Calibri" pitchFamily="34" charset="-120"/>
               </a:rPr>
-              <a:t>Open an alert that triage has processed.</a:t>
+              <a:t>Automation → Jobs → New Job → time-triggered → playbook KOI Ext Script Runner - Scan Job.</a:t>
             </a:r>
             <a:endParaRPr lang="en-US" sz="1150" dirty="0"/>
           </a:p>
@@ -9036,13 +8429,13 @@
       </p:sp>
       <p:sp>
         <p:nvSpPr>
-          <p:cNvPr id="21" name="Text 19"/>
-          <p:cNvSpPr/>
-          <p:nvPr/>
-        </p:nvSpPr>
-        <p:spPr>
-          <a:xfrm>
-            <a:off x="859536" y="3305556"/>
+          <p:cNvPr id="23" name="Text 21"/>
+          <p:cNvSpPr/>
+          <p:nvPr/>
+        </p:nvSpPr>
+        <p:spPr>
+          <a:xfrm>
+            <a:off x="859536" y="3717036"/>
             <a:ext cx="219456" cy="256032"/>
           </a:xfrm>
           <a:prstGeom prst="rect">
@@ -9075,13 +8468,13 @@
       </p:sp>
       <p:sp>
         <p:nvSpPr>
-          <p:cNvPr id="22" name="Text 20"/>
-          <p:cNvSpPr/>
-          <p:nvPr/>
-        </p:nvSpPr>
-        <p:spPr>
-          <a:xfrm>
-            <a:off x="1152144" y="3305556"/>
+          <p:cNvPr id="24" name="Text 22"/>
+          <p:cNvSpPr/>
+          <p:nvPr/>
+        </p:nvSpPr>
+        <p:spPr>
+          <a:xfrm>
+            <a:off x="1152144" y="3717036"/>
             <a:ext cx="5486400" cy="246888"/>
           </a:xfrm>
           <a:prstGeom prst="rect">
@@ -9109,7 +8502,7 @@
                 <a:ea typeface="Calibri" pitchFamily="34" charset="-122"/>
                 <a:cs typeface="Calibri" pitchFamily="34" charset="-120"/>
               </a:rPr>
-              <a:t>Check its type is KOI Supply Chain Alert.</a:t>
+              <a:t>Enable the Job, then Run now.</a:t>
             </a:r>
             <a:endParaRPr lang="en-US" sz="1150" dirty="0"/>
           </a:p>
@@ -9117,13 +8510,13 @@
       </p:sp>
       <p:sp>
         <p:nvSpPr>
-          <p:cNvPr id="23" name="Text 21"/>
-          <p:cNvSpPr/>
-          <p:nvPr/>
-        </p:nvSpPr>
-        <p:spPr>
-          <a:xfrm>
-            <a:off x="859536" y="3634740"/>
+          <p:cNvPr id="25" name="Text 23"/>
+          <p:cNvSpPr/>
+          <p:nvPr/>
+        </p:nvSpPr>
+        <p:spPr>
+          <a:xfrm>
+            <a:off x="859536" y="4046220"/>
             <a:ext cx="219456" cy="256032"/>
           </a:xfrm>
           <a:prstGeom prst="rect">
@@ -9156,13 +8549,13 @@
       </p:sp>
       <p:sp>
         <p:nvSpPr>
-          <p:cNvPr id="24" name="Text 22"/>
-          <p:cNvSpPr/>
-          <p:nvPr/>
-        </p:nvSpPr>
-        <p:spPr>
-          <a:xfrm>
-            <a:off x="1152144" y="3634740"/>
+          <p:cNvPr id="26" name="Text 24"/>
+          <p:cNvSpPr/>
+          <p:nvPr/>
+        </p:nvSpPr>
+        <p:spPr>
+          <a:xfrm>
+            <a:off x="1152144" y="4046220"/>
             <a:ext cx="5486400" cy="246888"/>
           </a:xfrm>
           <a:prstGeom prst="rect">
@@ -9190,7 +8583,7 @@
                 <a:ea typeface="Calibri" pitchFamily="34" charset="-122"/>
                 <a:cs typeface="Calibri" pitchFamily="34" charset="-120"/>
               </a:rPr>
-              <a:t>Read the KOI Alert tab.</a:t>
+              <a:t>Open the run, then check Action Center.</a:t>
             </a:r>
             <a:endParaRPr lang="en-US" sz="1150" dirty="0"/>
           </a:p>
@@ -9198,18 +8591,99 @@
       </p:sp>
       <p:sp>
         <p:nvSpPr>
-          <p:cNvPr id="25" name="Shape 23"/>
-          <p:cNvSpPr/>
-          <p:nvPr/>
-        </p:nvSpPr>
-        <p:spPr>
-          <a:xfrm>
-            <a:off x="7315200" y="2446020"/>
-            <a:ext cx="4297680" cy="2336292"/>
+          <p:cNvPr id="27" name="Text 25"/>
+          <p:cNvSpPr/>
+          <p:nvPr/>
+        </p:nvSpPr>
+        <p:spPr>
+          <a:xfrm>
+            <a:off x="859536" y="4375404"/>
+            <a:ext cx="219456" cy="256032"/>
+          </a:xfrm>
+          <a:prstGeom prst="rect">
+            <a:avLst/>
+          </a:prstGeom>
+          <a:noFill/>
+          <a:ln/>
+        </p:spPr>
+        <p:txBody>
+          <a:bodyPr wrap="square" lIns="0" tIns="0" rIns="0" bIns="0" rtlCol="0" anchor="t"/>
+          <a:lstStyle/>
+          <a:p>
+            <a:pPr indent="0" marL="0">
+              <a:buNone/>
+            </a:pPr>
+            <a:r>
+              <a:rPr lang="en-US" sz="1150" b="1" dirty="0">
+                <a:solidFill>
+                  <a:srgbClr val="E8551F"/>
+                </a:solidFill>
+                <a:latin typeface="Calibri" pitchFamily="34" charset="0"/>
+                <a:ea typeface="Calibri" pitchFamily="34" charset="-122"/>
+                <a:cs typeface="Calibri" pitchFamily="34" charset="-120"/>
+              </a:rPr>
+              <a:t>4</a:t>
+            </a:r>
+            <a:endParaRPr lang="en-US" sz="1150" dirty="0"/>
+          </a:p>
+        </p:txBody>
+      </p:sp>
+      <p:sp>
+        <p:nvSpPr>
+          <p:cNvPr id="28" name="Text 26"/>
+          <p:cNvSpPr/>
+          <p:nvPr/>
+        </p:nvSpPr>
+        <p:spPr>
+          <a:xfrm>
+            <a:off x="1152144" y="4375404"/>
+            <a:ext cx="5486400" cy="246888"/>
+          </a:xfrm>
+          <a:prstGeom prst="rect">
+            <a:avLst/>
+          </a:prstGeom>
+          <a:noFill/>
+          <a:ln/>
+        </p:spPr>
+        <p:txBody>
+          <a:bodyPr wrap="square" lIns="0" tIns="0" rIns="0" bIns="0" rtlCol="0" anchor="t"/>
+          <a:lstStyle/>
+          <a:p>
+            <a:pPr indent="0" marL="0">
+              <a:lnSpc>
+                <a:spcPts val="1500"/>
+              </a:lnSpc>
+              <a:buNone/>
+            </a:pPr>
+            <a:r>
+              <a:rPr lang="en-US" sz="1150" dirty="0">
+                <a:solidFill>
+                  <a:srgbClr val="B4B7BD"/>
+                </a:solidFill>
+                <a:latin typeface="Calibri" pitchFamily="34" charset="0"/>
+                <a:ea typeface="Calibri" pitchFamily="34" charset="-122"/>
+                <a:cs typeface="Calibri" pitchFamily="34" charset="-120"/>
+              </a:rPr>
+              <a:t>Run it a second time immediately.</a:t>
+            </a:r>
+            <a:endParaRPr lang="en-US" sz="1150" dirty="0"/>
+          </a:p>
+        </p:txBody>
+      </p:sp>
+      <p:sp>
+        <p:nvSpPr>
+          <p:cNvPr id="29" name="Shape 27"/>
+          <p:cNvSpPr/>
+          <p:nvPr/>
+        </p:nvSpPr>
+        <p:spPr>
+          <a:xfrm>
+            <a:off x="7315200" y="2670048"/>
+            <a:ext cx="4297680" cy="3557016"/>
           </a:xfrm>
           <a:prstGeom prst="roundRect">
             <a:avLst>
-              <a:gd name="adj" fmla="val 1957"/>
+              <a:gd name="adj" fmla="val 1285"/>
             </a:avLst>
           </a:prstGeom>
           <a:solidFill>
@@ -9225,13 +8699,13 @@
       </p:sp>
       <p:sp>
         <p:nvSpPr>
-          <p:cNvPr id="26" name="Text 24"/>
-          <p:cNvSpPr/>
-          <p:nvPr/>
-        </p:nvSpPr>
-        <p:spPr>
-          <a:xfrm>
-            <a:off x="7626096" y="2628900"/>
+          <p:cNvPr id="30" name="Text 28"/>
+          <p:cNvSpPr/>
+          <p:nvPr/>
+        </p:nvSpPr>
+        <p:spPr>
+          <a:xfrm>
+            <a:off x="7626096" y="2852928"/>
             <a:ext cx="3108960" cy="256032"/>
           </a:xfrm>
           <a:prstGeom prst="rect">
@@ -9264,13 +8738,13 @@
       </p:sp>
       <p:sp>
         <p:nvSpPr>
-          <p:cNvPr id="27" name="Text 25"/>
-          <p:cNvSpPr/>
-          <p:nvPr/>
-        </p:nvSpPr>
-        <p:spPr>
-          <a:xfrm>
-            <a:off x="7626096" y="2976372"/>
+          <p:cNvPr id="31" name="Text 29"/>
+          <p:cNvSpPr/>
+          <p:nvPr/>
+        </p:nvSpPr>
+        <p:spPr>
+          <a:xfrm>
+            <a:off x="7626096" y="3200400"/>
             <a:ext cx="219456" cy="256032"/>
           </a:xfrm>
           <a:prstGeom prst="rect">
@@ -9303,13 +8777,13 @@
       </p:sp>
       <p:sp>
         <p:nvSpPr>
-          <p:cNvPr id="28" name="Text 26"/>
-          <p:cNvSpPr/>
-          <p:nvPr/>
-        </p:nvSpPr>
-        <p:spPr>
-          <a:xfrm>
-            <a:off x="7918704" y="2976372"/>
+          <p:cNvPr id="32" name="Text 30"/>
+          <p:cNvSpPr/>
+          <p:nvPr/>
+        </p:nvSpPr>
+        <p:spPr>
+          <a:xfrm>
+            <a:off x="7918704" y="3200400"/>
             <a:ext cx="3383280" cy="438912"/>
           </a:xfrm>
           <a:prstGeom prst="rect">
@@ -9337,7 +8811,7 @@
                 <a:ea typeface="Calibri" pitchFamily="34" charset="-122"/>
                 <a:cs typeface="Calibri" pitchFamily="34" charset="-120"/>
               </a:rPr>
-              <a:t>19 KOI fields are populated on the alert itself.</a:t>
+              <a:t>The script is dispatched to due, connected endpoints.</a:t>
             </a:r>
             <a:endParaRPr lang="en-US" sz="1150" dirty="0"/>
           </a:p>
@@ -9345,13 +8819,13 @@
       </p:sp>
       <p:sp>
         <p:nvSpPr>
-          <p:cNvPr id="29" name="Text 27"/>
-          <p:cNvSpPr/>
-          <p:nvPr/>
-        </p:nvSpPr>
-        <p:spPr>
-          <a:xfrm>
-            <a:off x="7626096" y="3493008"/>
+          <p:cNvPr id="33" name="Text 31"/>
+          <p:cNvSpPr/>
+          <p:nvPr/>
+        </p:nvSpPr>
+        <p:spPr>
+          <a:xfrm>
+            <a:off x="7626096" y="3717036"/>
             <a:ext cx="219456" cy="256032"/>
           </a:xfrm>
           <a:prstGeom prst="rect">
@@ -9384,13 +8858,13 @@
       </p:sp>
       <p:sp>
         <p:nvSpPr>
-          <p:cNvPr id="30" name="Text 28"/>
-          <p:cNvSpPr/>
-          <p:nvPr/>
-        </p:nvSpPr>
-        <p:spPr>
-          <a:xfrm>
-            <a:off x="7918704" y="3493008"/>
+          <p:cNvPr id="34" name="Text 32"/>
+          <p:cNvSpPr/>
+          <p:nvPr/>
+        </p:nvSpPr>
+        <p:spPr>
+          <a:xfrm>
+            <a:off x="7918704" y="3717036"/>
             <a:ext cx="3383280" cy="438912"/>
           </a:xfrm>
           <a:prstGeom prst="rect">
@@ -9418,7 +8892,7 @@
                 <a:ea typeface="Calibri" pitchFamily="34" charset="-122"/>
                 <a:cs typeface="Calibri" pitchFamily="34" charset="-120"/>
               </a:rPr>
-              <a:t>They are grouped: item, risk and verdict, affected host, governance, summary.</a:t>
+              <a:t>Those endpoints get a last-scan timestamp in the tracker.</a:t>
             </a:r>
             <a:endParaRPr lang="en-US" sz="1150" dirty="0"/>
           </a:p>
@@ -9426,13 +8900,13 @@
       </p:sp>
       <p:sp>
         <p:nvSpPr>
-          <p:cNvPr id="31" name="Text 29"/>
-          <p:cNvSpPr/>
-          <p:nvPr/>
-        </p:nvSpPr>
-        <p:spPr>
-          <a:xfrm>
-            <a:off x="7626096" y="4009644"/>
+          <p:cNvPr id="35" name="Text 33"/>
+          <p:cNvSpPr/>
+          <p:nvPr/>
+        </p:nvSpPr>
+        <p:spPr>
+          <a:xfrm>
+            <a:off x="7626096" y="4233672"/>
             <a:ext cx="219456" cy="256032"/>
           </a:xfrm>
           <a:prstGeom prst="rect">
@@ -9465,13 +8939,13 @@
       </p:sp>
       <p:sp>
         <p:nvSpPr>
-          <p:cNvPr id="32" name="Text 30"/>
-          <p:cNvSpPr/>
-          <p:nvPr/>
-        </p:nvSpPr>
-        <p:spPr>
-          <a:xfrm>
-            <a:off x="7918704" y="4009644"/>
+          <p:cNvPr id="36" name="Text 34"/>
+          <p:cNvSpPr/>
+          <p:nvPr/>
+        </p:nvSpPr>
+        <p:spPr>
+          <a:xfrm>
+            <a:off x="7918704" y="4233672"/>
             <a:ext cx="3383280" cy="438912"/>
           </a:xfrm>
           <a:prstGeom prst="rect">
@@ -9499,7 +8973,169 @@
                 <a:ea typeface="Calibri" pitchFamily="34" charset="-122"/>
                 <a:cs typeface="Calibri" pitchFamily="34" charset="-120"/>
               </a:rPr>
-              <a:t>An analyst sees the picture without opening the War Room.</a:t>
+              <a:t>Offline and wrong-OS endpoints stay due and retry later.</a:t>
+            </a:r>
+            <a:endParaRPr lang="en-US" sz="1150" dirty="0"/>
+          </a:p>
+        </p:txBody>
+      </p:sp>
+      <p:sp>
+        <p:nvSpPr>
+          <p:cNvPr id="37" name="Text 35"/>
+          <p:cNvSpPr/>
+          <p:nvPr/>
+        </p:nvSpPr>
+        <p:spPr>
+          <a:xfrm>
+            <a:off x="7626096" y="4750308"/>
+            <a:ext cx="219456" cy="256032"/>
+          </a:xfrm>
+          <a:prstGeom prst="rect">
+            <a:avLst/>
+          </a:prstGeom>
+          <a:noFill/>
+          <a:ln/>
+        </p:spPr>
+        <p:txBody>
+          <a:bodyPr wrap="square" lIns="0" tIns="0" rIns="0" bIns="0" rtlCol="0" anchor="t"/>
+          <a:lstStyle/>
+          <a:p>
+            <a:pPr indent="0" marL="0">
+              <a:buNone/>
+            </a:pPr>
+            <a:r>
+              <a:rPr lang="en-US" sz="1150" b="1" dirty="0">
+                <a:solidFill>
+                  <a:srgbClr val="3FB950"/>
+                </a:solidFill>
+                <a:latin typeface="Calibri" pitchFamily="34" charset="0"/>
+                <a:ea typeface="Calibri" pitchFamily="34" charset="-122"/>
+                <a:cs typeface="Calibri" pitchFamily="34" charset="-120"/>
+              </a:rPr>
+              <a:t>✓</a:t>
+            </a:r>
+            <a:endParaRPr lang="en-US" sz="1150" dirty="0"/>
+          </a:p>
+        </p:txBody>
+      </p:sp>
+      <p:sp>
+        <p:nvSpPr>
+          <p:cNvPr id="38" name="Text 36"/>
+          <p:cNvSpPr/>
+          <p:nvPr/>
+        </p:nvSpPr>
+        <p:spPr>
+          <a:xfrm>
+            <a:off x="7918704" y="4750308"/>
+            <a:ext cx="3383280" cy="438912"/>
+          </a:xfrm>
+          <a:prstGeom prst="rect">
+            <a:avLst/>
+          </a:prstGeom>
+          <a:noFill/>
+          <a:ln/>
+        </p:spPr>
+        <p:txBody>
+          <a:bodyPr wrap="square" lIns="0" tIns="0" rIns="0" bIns="0" rtlCol="0" anchor="t"/>
+          <a:lstStyle/>
+          <a:p>
+            <a:pPr indent="0" marL="0">
+              <a:lnSpc>
+                <a:spcPts val="1500"/>
+              </a:lnSpc>
+              <a:buNone/>
+            </a:pPr>
+            <a:r>
+              <a:rPr lang="en-US" sz="1150" dirty="0">
+                <a:solidFill>
+                  <a:srgbClr val="B4B7BD"/>
+                </a:solidFill>
+                <a:latin typeface="Calibri" pitchFamily="34" charset="0"/>
+                <a:ea typeface="Calibri" pitchFamily="34" charset="-122"/>
+                <a:cs typeface="Calibri" pitchFamily="34" charset="-120"/>
+              </a:rPr>
+              <a:t>The second run does nothing — all inside the rescan interval.</a:t>
+            </a:r>
+            <a:endParaRPr lang="en-US" sz="1150" dirty="0"/>
+          </a:p>
+        </p:txBody>
+      </p:sp>
+      <p:sp>
+        <p:nvSpPr>
+          <p:cNvPr id="39" name="Text 37"/>
+          <p:cNvSpPr/>
+          <p:nvPr/>
+        </p:nvSpPr>
+        <p:spPr>
+          <a:xfrm>
+            <a:off x="7626096" y="5266944"/>
+            <a:ext cx="219456" cy="256032"/>
+          </a:xfrm>
+          <a:prstGeom prst="rect">
+            <a:avLst/>
+          </a:prstGeom>
+          <a:noFill/>
+          <a:ln/>
+        </p:spPr>
+        <p:txBody>
+          <a:bodyPr wrap="square" lIns="0" tIns="0" rIns="0" bIns="0" rtlCol="0" anchor="t"/>
+          <a:lstStyle/>
+          <a:p>
+            <a:pPr indent="0" marL="0">
+              <a:buNone/>
+            </a:pPr>
+            <a:r>
+              <a:rPr lang="en-US" sz="1150" b="1" dirty="0">
+                <a:solidFill>
+                  <a:srgbClr val="3FB950"/>
+                </a:solidFill>
+                <a:latin typeface="Calibri" pitchFamily="34" charset="0"/>
+                <a:ea typeface="Calibri" pitchFamily="34" charset="-122"/>
+                <a:cs typeface="Calibri" pitchFamily="34" charset="-120"/>
+              </a:rPr>
+              <a:t>✓</a:t>
+            </a:r>
+            <a:endParaRPr lang="en-US" sz="1150" dirty="0"/>
+          </a:p>
+        </p:txBody>
+      </p:sp>
+      <p:sp>
+        <p:nvSpPr>
+          <p:cNvPr id="40" name="Text 38"/>
+          <p:cNvSpPr/>
+          <p:nvPr/>
+        </p:nvSpPr>
+        <p:spPr>
+          <a:xfrm>
+            <a:off x="7918704" y="5266944"/>
+            <a:ext cx="3383280" cy="630936"/>
+          </a:xfrm>
+          <a:prstGeom prst="rect">
+            <a:avLst/>
+          </a:prstGeom>
+          <a:noFill/>
+          <a:ln/>
+        </p:spPr>
+        <p:txBody>
+          <a:bodyPr wrap="square" lIns="0" tIns="0" rIns="0" bIns="0" rtlCol="0" anchor="t"/>
+          <a:lstStyle/>
+          <a:p>
+            <a:pPr indent="0" marL="0">
+              <a:lnSpc>
+                <a:spcPts val="1500"/>
+              </a:lnSpc>
+              <a:buNone/>
+            </a:pPr>
+            <a:r>
+              <a:rPr lang="en-US" sz="1150" dirty="0">
+                <a:solidFill>
+                  <a:srgbClr val="B4B7BD"/>
+                </a:solidFill>
+                <a:latin typeface="Calibri" pitchFamily="34" charset="0"/>
+                <a:ea typeface="Calibri" pitchFamily="34" charset="-122"/>
+                <a:cs typeface="Calibri" pitchFamily="34" charset="-120"/>
+              </a:rPr>
+              <a:t>A SKIPPED entry means nothing was due; a STILL RUNNING entry means Action Center is finishing on its own. Both are normal and send no email.</a:t>
             </a:r>
             <a:endParaRPr lang="en-US" sz="1150" dirty="0"/>
           </a:p>
@@ -9516,6 +9152,1244 @@
 <file path=ppt/slides/slide15.xml><?xml version="1.0" encoding="utf-8"?>
 <p:sld xmlns:a="http://schemas.openxmlformats.org/drawingml/2006/main" xmlns:r="http://schemas.openxmlformats.org/officeDocument/2006/relationships" xmlns:p="http://schemas.openxmlformats.org/presentationml/2006/main">
   <p:cSld name="Slide 15">
+    <p:bg>
+      <p:bgPr>
+        <a:solidFill>
+          <a:srgbClr val="000000"/>
+        </a:solidFill>
+      </p:bgPr>
+    </p:bg>
+    <p:spTree>
+      <p:nvGrpSpPr>
+        <p:cNvPr id="1" name=""/>
+        <p:cNvGrpSpPr/>
+        <p:nvPr/>
+      </p:nvGrpSpPr>
+      <p:grpSpPr>
+        <a:xfrm>
+          <a:off x="0" y="0"/>
+          <a:ext cx="0" cy="0"/>
+          <a:chOff x="0" y="0"/>
+          <a:chExt cx="0" cy="0"/>
+        </a:xfrm>
+      </p:grpSpPr>
+      <p:sp>
+        <p:nvSpPr>
+          <p:cNvPr id="2" name="Text 0"/>
+          <p:cNvSpPr/>
+          <p:nvPr/>
+        </p:nvSpPr>
+        <p:spPr>
+          <a:xfrm>
+            <a:off x="548640" y="384048"/>
+            <a:ext cx="11064240" cy="237744"/>
+          </a:xfrm>
+          <a:prstGeom prst="rect">
+            <a:avLst/>
+          </a:prstGeom>
+          <a:noFill/>
+          <a:ln/>
+        </p:spPr>
+        <p:txBody>
+          <a:bodyPr wrap="square" lIns="0" tIns="0" rIns="0" bIns="0" rtlCol="0" anchor="t"/>
+          <a:lstStyle/>
+          <a:p>
+            <a:pPr indent="0" marL="0">
+              <a:buNone/>
+            </a:pPr>
+            <a:r>
+              <a:rPr lang="en-US" sz="1100" b="1" spc="200" kern="0" dirty="0">
+                <a:solidFill>
+                  <a:srgbClr val="E8551F"/>
+                </a:solidFill>
+                <a:latin typeface="Calibri" pitchFamily="34" charset="0"/>
+                <a:ea typeface="Calibri" pitchFamily="34" charset="-122"/>
+                <a:cs typeface="Calibri" pitchFamily="34" charset="-120"/>
+              </a:rPr>
+              <a:t>TEST 10</a:t>
+            </a:r>
+            <a:endParaRPr lang="en-US" sz="1100" dirty="0"/>
+          </a:p>
+        </p:txBody>
+      </p:sp>
+      <p:sp>
+        <p:nvSpPr>
+          <p:cNvPr id="3" name="Text 1"/>
+          <p:cNvSpPr/>
+          <p:nvPr/>
+        </p:nvSpPr>
+        <p:spPr>
+          <a:xfrm>
+            <a:off x="548640" y="640080"/>
+            <a:ext cx="11064240" cy="640080"/>
+          </a:xfrm>
+          <a:prstGeom prst="rect">
+            <a:avLst/>
+          </a:prstGeom>
+          <a:noFill/>
+          <a:ln/>
+        </p:spPr>
+        <p:txBody>
+          <a:bodyPr wrap="square" lIns="0" tIns="0" rIns="0" bIns="0" rtlCol="0" anchor="t"/>
+          <a:lstStyle/>
+          <a:p>
+            <a:pPr indent="0" marL="0">
+              <a:buNone/>
+            </a:pPr>
+            <a:r>
+              <a:rPr lang="en-US" sz="3100" b="1" dirty="0">
+                <a:solidFill>
+                  <a:srgbClr val="FFFFFF"/>
+                </a:solidFill>
+                <a:latin typeface="Calibri" pitchFamily="34" charset="0"/>
+                <a:ea typeface="Calibri" pitchFamily="34" charset="-122"/>
+                <a:cs typeface="Calibri" pitchFamily="34" charset="-120"/>
+              </a:rPr>
+              <a:t>Alert fields and layout</a:t>
+            </a:r>
+            <a:endParaRPr lang="en-US" sz="3100" dirty="0"/>
+          </a:p>
+        </p:txBody>
+      </p:sp>
+      <p:sp>
+        <p:nvSpPr>
+          <p:cNvPr id="4" name="Shape 2"/>
+          <p:cNvSpPr/>
+          <p:nvPr/>
+        </p:nvSpPr>
+        <p:spPr>
+          <a:xfrm>
+            <a:off x="548640" y="1280160"/>
+            <a:ext cx="11064240" cy="982980"/>
+          </a:xfrm>
+          <a:prstGeom prst="roundRect">
+            <a:avLst>
+              <a:gd name="adj" fmla="val 4651"/>
+            </a:avLst>
+          </a:prstGeom>
+          <a:solidFill>
+            <a:srgbClr val="1C2026"/>
+          </a:solidFill>
+          <a:ln w="12700">
+            <a:solidFill>
+              <a:srgbClr val="1C2026"/>
+            </a:solidFill>
+            <a:prstDash val="solid"/>
+          </a:ln>
+        </p:spPr>
+      </p:sp>
+      <p:sp>
+        <p:nvSpPr>
+          <p:cNvPr id="5" name="Text 3"/>
+          <p:cNvSpPr/>
+          <p:nvPr/>
+        </p:nvSpPr>
+        <p:spPr>
+          <a:xfrm>
+            <a:off x="804672" y="1408176"/>
+            <a:ext cx="1463040" cy="201168"/>
+          </a:xfrm>
+          <a:prstGeom prst="rect">
+            <a:avLst/>
+          </a:prstGeom>
+          <a:noFill/>
+          <a:ln/>
+        </p:spPr>
+        <p:txBody>
+          <a:bodyPr wrap="square" lIns="0" tIns="0" rIns="0" bIns="0" rtlCol="0" anchor="t"/>
+          <a:lstStyle/>
+          <a:p>
+            <a:pPr indent="0" marL="0">
+              <a:buNone/>
+            </a:pPr>
+            <a:r>
+              <a:rPr lang="en-US" sz="900" b="1" spc="100" kern="0" dirty="0">
+                <a:solidFill>
+                  <a:srgbClr val="22D3EE"/>
+                </a:solidFill>
+                <a:latin typeface="Calibri" pitchFamily="34" charset="0"/>
+                <a:ea typeface="Calibri" pitchFamily="34" charset="-122"/>
+                <a:cs typeface="Calibri" pitchFamily="34" charset="-120"/>
+              </a:rPr>
+              <a:t>PACK CONTENT</a:t>
+            </a:r>
+            <a:endParaRPr lang="en-US" sz="900" dirty="0"/>
+          </a:p>
+        </p:txBody>
+      </p:sp>
+      <p:sp>
+        <p:nvSpPr>
+          <p:cNvPr id="6" name="Text 4"/>
+          <p:cNvSpPr/>
+          <p:nvPr/>
+        </p:nvSpPr>
+        <p:spPr>
+          <a:xfrm>
+            <a:off x="2139696" y="1408176"/>
+            <a:ext cx="128016" cy="201168"/>
+          </a:xfrm>
+          <a:prstGeom prst="rect">
+            <a:avLst/>
+          </a:prstGeom>
+          <a:noFill/>
+          <a:ln/>
+        </p:spPr>
+        <p:txBody>
+          <a:bodyPr wrap="square" lIns="0" tIns="0" rIns="0" bIns="0" rtlCol="0" anchor="t"/>
+          <a:lstStyle/>
+          <a:p>
+            <a:pPr indent="0" marL="0">
+              <a:buNone/>
+            </a:pPr>
+            <a:r>
+              <a:rPr lang="en-US" sz="1000" b="1" dirty="0">
+                <a:solidFill>
+                  <a:srgbClr val="22D3EE"/>
+                </a:solidFill>
+                <a:latin typeface="Calibri" pitchFamily="34" charset="0"/>
+                <a:ea typeface="Calibri" pitchFamily="34" charset="-122"/>
+                <a:cs typeface="Calibri" pitchFamily="34" charset="-120"/>
+              </a:rPr>
+              <a:t>•</a:t>
+            </a:r>
+            <a:endParaRPr lang="en-US" sz="1000" dirty="0"/>
+          </a:p>
+        </p:txBody>
+      </p:sp>
+      <p:sp>
+        <p:nvSpPr>
+          <p:cNvPr id="7" name="Text 5"/>
+          <p:cNvSpPr/>
+          <p:nvPr/>
+        </p:nvSpPr>
+        <p:spPr>
+          <a:xfrm>
+            <a:off x="2286000" y="1408176"/>
+            <a:ext cx="4343400" cy="192024"/>
+          </a:xfrm>
+          <a:prstGeom prst="rect">
+            <a:avLst/>
+          </a:prstGeom>
+          <a:noFill/>
+          <a:ln/>
+        </p:spPr>
+        <p:txBody>
+          <a:bodyPr wrap="square" lIns="0" tIns="0" rIns="0" bIns="0" rtlCol="0" anchor="t"/>
+          <a:lstStyle/>
+          <a:p>
+            <a:pPr indent="0" marL="0">
+              <a:lnSpc>
+                <a:spcPts val="1200"/>
+              </a:lnSpc>
+              <a:buNone/>
+            </a:pPr>
+            <a:r>
+              <a:rPr lang="en-US" sz="1000" dirty="0">
+                <a:solidFill>
+                  <a:srgbClr val="B4B7BD"/>
+                </a:solidFill>
+                <a:latin typeface="Calibri" pitchFamily="34" charset="0"/>
+                <a:ea typeface="Calibri" pitchFamily="34" charset="-122"/>
+                <a:cs typeface="Calibri" pitchFamily="34" charset="-120"/>
+              </a:rPr>
+              <a:t>19 KOI incident fields</a:t>
+            </a:r>
+            <a:endParaRPr lang="en-US" sz="1000" dirty="0"/>
+          </a:p>
+        </p:txBody>
+      </p:sp>
+      <p:sp>
+        <p:nvSpPr>
+          <p:cNvPr id="8" name="Text 6"/>
+          <p:cNvSpPr/>
+          <p:nvPr/>
+        </p:nvSpPr>
+        <p:spPr>
+          <a:xfrm>
+            <a:off x="2139696" y="1632204"/>
+            <a:ext cx="128016" cy="201168"/>
+          </a:xfrm>
+          <a:prstGeom prst="rect">
+            <a:avLst/>
+          </a:prstGeom>
+          <a:noFill/>
+          <a:ln/>
+        </p:spPr>
+        <p:txBody>
+          <a:bodyPr wrap="square" lIns="0" tIns="0" rIns="0" bIns="0" rtlCol="0" anchor="t"/>
+          <a:lstStyle/>
+          <a:p>
+            <a:pPr indent="0" marL="0">
+              <a:buNone/>
+            </a:pPr>
+            <a:r>
+              <a:rPr lang="en-US" sz="1000" b="1" dirty="0">
+                <a:solidFill>
+                  <a:srgbClr val="22D3EE"/>
+                </a:solidFill>
+                <a:latin typeface="Calibri" pitchFamily="34" charset="0"/>
+                <a:ea typeface="Calibri" pitchFamily="34" charset="-122"/>
+                <a:cs typeface="Calibri" pitchFamily="34" charset="-120"/>
+              </a:rPr>
+              <a:t>•</a:t>
+            </a:r>
+            <a:endParaRPr lang="en-US" sz="1000" dirty="0"/>
+          </a:p>
+        </p:txBody>
+      </p:sp>
+      <p:sp>
+        <p:nvSpPr>
+          <p:cNvPr id="9" name="Text 7"/>
+          <p:cNvSpPr/>
+          <p:nvPr/>
+        </p:nvSpPr>
+        <p:spPr>
+          <a:xfrm>
+            <a:off x="2286000" y="1632204"/>
+            <a:ext cx="4343400" cy="192024"/>
+          </a:xfrm>
+          <a:prstGeom prst="rect">
+            <a:avLst/>
+          </a:prstGeom>
+          <a:noFill/>
+          <a:ln/>
+        </p:spPr>
+        <p:txBody>
+          <a:bodyPr wrap="square" lIns="0" tIns="0" rIns="0" bIns="0" rtlCol="0" anchor="t"/>
+          <a:lstStyle/>
+          <a:p>
+            <a:pPr indent="0" marL="0">
+              <a:lnSpc>
+                <a:spcPts val="1200"/>
+              </a:lnSpc>
+              <a:buNone/>
+            </a:pPr>
+            <a:r>
+              <a:rPr lang="en-US" sz="1000" dirty="0">
+                <a:solidFill>
+                  <a:srgbClr val="B4B7BD"/>
+                </a:solidFill>
+                <a:latin typeface="Calibri" pitchFamily="34" charset="0"/>
+                <a:ea typeface="Calibri" pitchFamily="34" charset="-122"/>
+                <a:cs typeface="Calibri" pitchFamily="34" charset="-120"/>
+              </a:rPr>
+              <a:t>KOI Supply Chain Alert incident type</a:t>
+            </a:r>
+            <a:endParaRPr lang="en-US" sz="1000" dirty="0"/>
+          </a:p>
+        </p:txBody>
+      </p:sp>
+      <p:sp>
+        <p:nvSpPr>
+          <p:cNvPr id="10" name="Text 8"/>
+          <p:cNvSpPr/>
+          <p:nvPr/>
+        </p:nvSpPr>
+        <p:spPr>
+          <a:xfrm>
+            <a:off x="2139696" y="1856232"/>
+            <a:ext cx="128016" cy="201168"/>
+          </a:xfrm>
+          <a:prstGeom prst="rect">
+            <a:avLst/>
+          </a:prstGeom>
+          <a:noFill/>
+          <a:ln/>
+        </p:spPr>
+        <p:txBody>
+          <a:bodyPr wrap="square" lIns="0" tIns="0" rIns="0" bIns="0" rtlCol="0" anchor="t"/>
+          <a:lstStyle/>
+          <a:p>
+            <a:pPr indent="0" marL="0">
+              <a:buNone/>
+            </a:pPr>
+            <a:r>
+              <a:rPr lang="en-US" sz="1000" b="1" dirty="0">
+                <a:solidFill>
+                  <a:srgbClr val="22D3EE"/>
+                </a:solidFill>
+                <a:latin typeface="Calibri" pitchFamily="34" charset="0"/>
+                <a:ea typeface="Calibri" pitchFamily="34" charset="-122"/>
+                <a:cs typeface="Calibri" pitchFamily="34" charset="-120"/>
+              </a:rPr>
+              <a:t>•</a:t>
+            </a:r>
+            <a:endParaRPr lang="en-US" sz="1000" dirty="0"/>
+          </a:p>
+        </p:txBody>
+      </p:sp>
+      <p:sp>
+        <p:nvSpPr>
+          <p:cNvPr id="11" name="Text 9"/>
+          <p:cNvSpPr/>
+          <p:nvPr/>
+        </p:nvSpPr>
+        <p:spPr>
+          <a:xfrm>
+            <a:off x="2286000" y="1856232"/>
+            <a:ext cx="4343400" cy="192024"/>
+          </a:xfrm>
+          <a:prstGeom prst="rect">
+            <a:avLst/>
+          </a:prstGeom>
+          <a:noFill/>
+          <a:ln/>
+        </p:spPr>
+        <p:txBody>
+          <a:bodyPr wrap="square" lIns="0" tIns="0" rIns="0" bIns="0" rtlCol="0" anchor="t"/>
+          <a:lstStyle/>
+          <a:p>
+            <a:pPr indent="0" marL="0">
+              <a:lnSpc>
+                <a:spcPts val="1200"/>
+              </a:lnSpc>
+              <a:buNone/>
+            </a:pPr>
+            <a:r>
+              <a:rPr lang="en-US" sz="1000" dirty="0">
+                <a:solidFill>
+                  <a:srgbClr val="B4B7BD"/>
+                </a:solidFill>
+                <a:latin typeface="Calibri" pitchFamily="34" charset="0"/>
+                <a:ea typeface="Calibri" pitchFamily="34" charset="-122"/>
+                <a:cs typeface="Calibri" pitchFamily="34" charset="-120"/>
+              </a:rPr>
+              <a:t>its layout</a:t>
+            </a:r>
+            <a:endParaRPr lang="en-US" sz="1000" dirty="0"/>
+          </a:p>
+        </p:txBody>
+      </p:sp>
+      <p:sp>
+        <p:nvSpPr>
+          <p:cNvPr id="12" name="Text 10"/>
+          <p:cNvSpPr/>
+          <p:nvPr/>
+        </p:nvSpPr>
+        <p:spPr>
+          <a:xfrm>
+            <a:off x="5669280" y="1408176"/>
+            <a:ext cx="1371600" cy="201168"/>
+          </a:xfrm>
+          <a:prstGeom prst="rect">
+            <a:avLst/>
+          </a:prstGeom>
+          <a:noFill/>
+          <a:ln/>
+        </p:spPr>
+        <p:txBody>
+          <a:bodyPr wrap="square" lIns="0" tIns="0" rIns="0" bIns="0" rtlCol="0" anchor="t"/>
+          <a:lstStyle/>
+          <a:p>
+            <a:pPr indent="0" marL="0">
+              <a:buNone/>
+            </a:pPr>
+            <a:r>
+              <a:rPr lang="en-US" sz="900" b="1" spc="100" kern="0" dirty="0">
+                <a:solidFill>
+                  <a:srgbClr val="F5A524"/>
+                </a:solidFill>
+                <a:latin typeface="Calibri" pitchFamily="34" charset="0"/>
+                <a:ea typeface="Calibri" pitchFamily="34" charset="-122"/>
+                <a:cs typeface="Calibri" pitchFamily="34" charset="-120"/>
+              </a:rPr>
+              <a:t>TENANT SETUP</a:t>
+            </a:r>
+            <a:endParaRPr lang="en-US" sz="900" dirty="0"/>
+          </a:p>
+        </p:txBody>
+      </p:sp>
+      <p:sp>
+        <p:nvSpPr>
+          <p:cNvPr id="13" name="Text 11"/>
+          <p:cNvSpPr/>
+          <p:nvPr/>
+        </p:nvSpPr>
+        <p:spPr>
+          <a:xfrm>
+            <a:off x="6940296" y="1408176"/>
+            <a:ext cx="128016" cy="201168"/>
+          </a:xfrm>
+          <a:prstGeom prst="rect">
+            <a:avLst/>
+          </a:prstGeom>
+          <a:noFill/>
+          <a:ln/>
+        </p:spPr>
+        <p:txBody>
+          <a:bodyPr wrap="square" lIns="0" tIns="0" rIns="0" bIns="0" rtlCol="0" anchor="t"/>
+          <a:lstStyle/>
+          <a:p>
+            <a:pPr indent="0" marL="0">
+              <a:buNone/>
+            </a:pPr>
+            <a:r>
+              <a:rPr lang="en-US" sz="1000" b="1" dirty="0">
+                <a:solidFill>
+                  <a:srgbClr val="F5A524"/>
+                </a:solidFill>
+                <a:latin typeface="Calibri" pitchFamily="34" charset="0"/>
+                <a:ea typeface="Calibri" pitchFamily="34" charset="-122"/>
+                <a:cs typeface="Calibri" pitchFamily="34" charset="-120"/>
+              </a:rPr>
+              <a:t>•</a:t>
+            </a:r>
+            <a:endParaRPr lang="en-US" sz="1000" dirty="0"/>
+          </a:p>
+        </p:txBody>
+      </p:sp>
+      <p:sp>
+        <p:nvSpPr>
+          <p:cNvPr id="14" name="Text 12"/>
+          <p:cNvSpPr/>
+          <p:nvPr/>
+        </p:nvSpPr>
+        <p:spPr>
+          <a:xfrm>
+            <a:off x="7086600" y="1408176"/>
+            <a:ext cx="4343400" cy="192024"/>
+          </a:xfrm>
+          <a:prstGeom prst="rect">
+            <a:avLst/>
+          </a:prstGeom>
+          <a:noFill/>
+          <a:ln/>
+        </p:spPr>
+        <p:txBody>
+          <a:bodyPr wrap="square" lIns="0" tIns="0" rIns="0" bIns="0" rtlCol="0" anchor="t"/>
+          <a:lstStyle/>
+          <a:p>
+            <a:pPr indent="0" marL="0">
+              <a:lnSpc>
+                <a:spcPts val="1200"/>
+              </a:lnSpc>
+              <a:buNone/>
+            </a:pPr>
+            <a:r>
+              <a:rPr lang="en-US" sz="1000" dirty="0">
+                <a:solidFill>
+                  <a:srgbClr val="B4B7BD"/>
+                </a:solidFill>
+                <a:latin typeface="Calibri" pitchFamily="34" charset="0"/>
+                <a:ea typeface="Calibri" pitchFamily="34" charset="-122"/>
+                <a:cs typeface="Calibri" pitchFamily="34" charset="-120"/>
+              </a:rPr>
+              <a:t>Test 4 passing — triage has run on an alert</a:t>
+            </a:r>
+            <a:endParaRPr lang="en-US" sz="1000" dirty="0"/>
+          </a:p>
+        </p:txBody>
+      </p:sp>
+      <p:sp>
+        <p:nvSpPr>
+          <p:cNvPr id="15" name="Text 13"/>
+          <p:cNvSpPr/>
+          <p:nvPr/>
+        </p:nvSpPr>
+        <p:spPr>
+          <a:xfrm>
+            <a:off x="6940296" y="1632204"/>
+            <a:ext cx="128016" cy="201168"/>
+          </a:xfrm>
+          <a:prstGeom prst="rect">
+            <a:avLst/>
+          </a:prstGeom>
+          <a:noFill/>
+          <a:ln/>
+        </p:spPr>
+        <p:txBody>
+          <a:bodyPr wrap="square" lIns="0" tIns="0" rIns="0" bIns="0" rtlCol="0" anchor="t"/>
+          <a:lstStyle/>
+          <a:p>
+            <a:pPr indent="0" marL="0">
+              <a:buNone/>
+            </a:pPr>
+            <a:r>
+              <a:rPr lang="en-US" sz="1000" b="1" dirty="0">
+                <a:solidFill>
+                  <a:srgbClr val="F5A524"/>
+                </a:solidFill>
+                <a:latin typeface="Calibri" pitchFamily="34" charset="0"/>
+                <a:ea typeface="Calibri" pitchFamily="34" charset="-122"/>
+                <a:cs typeface="Calibri" pitchFamily="34" charset="-120"/>
+              </a:rPr>
+              <a:t>•</a:t>
+            </a:r>
+            <a:endParaRPr lang="en-US" sz="1000" dirty="0"/>
+          </a:p>
+        </p:txBody>
+      </p:sp>
+      <p:sp>
+        <p:nvSpPr>
+          <p:cNvPr id="16" name="Text 14"/>
+          <p:cNvSpPr/>
+          <p:nvPr/>
+        </p:nvSpPr>
+        <p:spPr>
+          <a:xfrm>
+            <a:off x="7086600" y="1632204"/>
+            <a:ext cx="4343400" cy="192024"/>
+          </a:xfrm>
+          <a:prstGeom prst="rect">
+            <a:avLst/>
+          </a:prstGeom>
+          <a:noFill/>
+          <a:ln/>
+        </p:spPr>
+        <p:txBody>
+          <a:bodyPr wrap="square" lIns="0" tIns="0" rIns="0" bIns="0" rtlCol="0" anchor="t"/>
+          <a:lstStyle/>
+          <a:p>
+            <a:pPr indent="0" marL="0">
+              <a:lnSpc>
+                <a:spcPts val="1200"/>
+              </a:lnSpc>
+              <a:buNone/>
+            </a:pPr>
+            <a:r>
+              <a:rPr lang="en-US" sz="1000" dirty="0">
+                <a:solidFill>
+                  <a:srgbClr val="B4B7BD"/>
+                </a:solidFill>
+                <a:latin typeface="Calibri" pitchFamily="34" charset="0"/>
+                <a:ea typeface="Calibri" pitchFamily="34" charset="-122"/>
+                <a:cs typeface="Calibri" pitchFamily="34" charset="-120"/>
+              </a:rPr>
+              <a:t>The incident type and layout installed with this pack</a:t>
+            </a:r>
+            <a:endParaRPr lang="en-US" sz="1000" dirty="0"/>
+          </a:p>
+        </p:txBody>
+      </p:sp>
+      <p:sp>
+        <p:nvSpPr>
+          <p:cNvPr id="17" name="Shape 15"/>
+          <p:cNvSpPr/>
+          <p:nvPr/>
+        </p:nvSpPr>
+        <p:spPr>
+          <a:xfrm>
+            <a:off x="548640" y="2446020"/>
+            <a:ext cx="6400800" cy="2336292"/>
+          </a:xfrm>
+          <a:prstGeom prst="roundRect">
+            <a:avLst>
+              <a:gd name="adj" fmla="val 1957"/>
+            </a:avLst>
+          </a:prstGeom>
+          <a:solidFill>
+            <a:srgbClr val="15171B"/>
+          </a:solidFill>
+          <a:ln w="12700">
+            <a:solidFill>
+              <a:srgbClr val="15171B"/>
+            </a:solidFill>
+            <a:prstDash val="solid"/>
+          </a:ln>
+        </p:spPr>
+      </p:sp>
+      <p:sp>
+        <p:nvSpPr>
+          <p:cNvPr id="18" name="Text 16"/>
+          <p:cNvSpPr/>
+          <p:nvPr/>
+        </p:nvSpPr>
+        <p:spPr>
+          <a:xfrm>
+            <a:off x="859536" y="2628900"/>
+            <a:ext cx="2743200" cy="256032"/>
+          </a:xfrm>
+          <a:prstGeom prst="rect">
+            <a:avLst/>
+          </a:prstGeom>
+          <a:noFill/>
+          <a:ln/>
+        </p:spPr>
+        <p:txBody>
+          <a:bodyPr wrap="square" lIns="0" tIns="0" rIns="0" bIns="0" rtlCol="0" anchor="t"/>
+          <a:lstStyle/>
+          <a:p>
+            <a:pPr indent="0" marL="0">
+              <a:buNone/>
+            </a:pPr>
+            <a:r>
+              <a:rPr lang="en-US" sz="1200" b="1" spc="100" kern="0" dirty="0">
+                <a:solidFill>
+                  <a:srgbClr val="E8551F"/>
+                </a:solidFill>
+                <a:latin typeface="Calibri" pitchFamily="34" charset="0"/>
+                <a:ea typeface="Calibri" pitchFamily="34" charset="-122"/>
+                <a:cs typeface="Calibri" pitchFamily="34" charset="-120"/>
+              </a:rPr>
+              <a:t>Steps</a:t>
+            </a:r>
+            <a:endParaRPr lang="en-US" sz="1200" dirty="0"/>
+          </a:p>
+        </p:txBody>
+      </p:sp>
+      <p:sp>
+        <p:nvSpPr>
+          <p:cNvPr id="19" name="Text 17"/>
+          <p:cNvSpPr/>
+          <p:nvPr/>
+        </p:nvSpPr>
+        <p:spPr>
+          <a:xfrm>
+            <a:off x="859536" y="2976372"/>
+            <a:ext cx="219456" cy="256032"/>
+          </a:xfrm>
+          <a:prstGeom prst="rect">
+            <a:avLst/>
+          </a:prstGeom>
+          <a:noFill/>
+          <a:ln/>
+        </p:spPr>
+        <p:txBody>
+          <a:bodyPr wrap="square" lIns="0" tIns="0" rIns="0" bIns="0" rtlCol="0" anchor="t"/>
+          <a:lstStyle/>
+          <a:p>
+            <a:pPr indent="0" marL="0">
+              <a:buNone/>
+            </a:pPr>
+            <a:r>
+              <a:rPr lang="en-US" sz="1150" b="1" dirty="0">
+                <a:solidFill>
+                  <a:srgbClr val="E8551F"/>
+                </a:solidFill>
+                <a:latin typeface="Calibri" pitchFamily="34" charset="0"/>
+                <a:ea typeface="Calibri" pitchFamily="34" charset="-122"/>
+                <a:cs typeface="Calibri" pitchFamily="34" charset="-120"/>
+              </a:rPr>
+              <a:t>1</a:t>
+            </a:r>
+            <a:endParaRPr lang="en-US" sz="1150" dirty="0"/>
+          </a:p>
+        </p:txBody>
+      </p:sp>
+      <p:sp>
+        <p:nvSpPr>
+          <p:cNvPr id="20" name="Text 18"/>
+          <p:cNvSpPr/>
+          <p:nvPr/>
+        </p:nvSpPr>
+        <p:spPr>
+          <a:xfrm>
+            <a:off x="1152144" y="2976372"/>
+            <a:ext cx="5486400" cy="246888"/>
+          </a:xfrm>
+          <a:prstGeom prst="rect">
+            <a:avLst/>
+          </a:prstGeom>
+          <a:noFill/>
+          <a:ln/>
+        </p:spPr>
+        <p:txBody>
+          <a:bodyPr wrap="square" lIns="0" tIns="0" rIns="0" bIns="0" rtlCol="0" anchor="t"/>
+          <a:lstStyle/>
+          <a:p>
+            <a:pPr indent="0" marL="0">
+              <a:lnSpc>
+                <a:spcPts val="1500"/>
+              </a:lnSpc>
+              <a:buNone/>
+            </a:pPr>
+            <a:r>
+              <a:rPr lang="en-US" sz="1150" dirty="0">
+                <a:solidFill>
+                  <a:srgbClr val="B4B7BD"/>
+                </a:solidFill>
+                <a:latin typeface="Calibri" pitchFamily="34" charset="0"/>
+                <a:ea typeface="Calibri" pitchFamily="34" charset="-122"/>
+                <a:cs typeface="Calibri" pitchFamily="34" charset="-120"/>
+              </a:rPr>
+              <a:t>Open an alert that triage has processed.</a:t>
+            </a:r>
+            <a:endParaRPr lang="en-US" sz="1150" dirty="0"/>
+          </a:p>
+        </p:txBody>
+      </p:sp>
+      <p:sp>
+        <p:nvSpPr>
+          <p:cNvPr id="21" name="Text 19"/>
+          <p:cNvSpPr/>
+          <p:nvPr/>
+        </p:nvSpPr>
+        <p:spPr>
+          <a:xfrm>
+            <a:off x="859536" y="3305556"/>
+            <a:ext cx="219456" cy="256032"/>
+          </a:xfrm>
+          <a:prstGeom prst="rect">
+            <a:avLst/>
+          </a:prstGeom>
+          <a:noFill/>
+          <a:ln/>
+        </p:spPr>
+        <p:txBody>
+          <a:bodyPr wrap="square" lIns="0" tIns="0" rIns="0" bIns="0" rtlCol="0" anchor="t"/>
+          <a:lstStyle/>
+          <a:p>
+            <a:pPr indent="0" marL="0">
+              <a:buNone/>
+            </a:pPr>
+            <a:r>
+              <a:rPr lang="en-US" sz="1150" b="1" dirty="0">
+                <a:solidFill>
+                  <a:srgbClr val="E8551F"/>
+                </a:solidFill>
+                <a:latin typeface="Calibri" pitchFamily="34" charset="0"/>
+                <a:ea typeface="Calibri" pitchFamily="34" charset="-122"/>
+                <a:cs typeface="Calibri" pitchFamily="34" charset="-120"/>
+              </a:rPr>
+              <a:t>2</a:t>
+            </a:r>
+            <a:endParaRPr lang="en-US" sz="1150" dirty="0"/>
+          </a:p>
+        </p:txBody>
+      </p:sp>
+      <p:sp>
+        <p:nvSpPr>
+          <p:cNvPr id="22" name="Text 20"/>
+          <p:cNvSpPr/>
+          <p:nvPr/>
+        </p:nvSpPr>
+        <p:spPr>
+          <a:xfrm>
+            <a:off x="1152144" y="3305556"/>
+            <a:ext cx="5486400" cy="246888"/>
+          </a:xfrm>
+          <a:prstGeom prst="rect">
+            <a:avLst/>
+          </a:prstGeom>
+          <a:noFill/>
+          <a:ln/>
+        </p:spPr>
+        <p:txBody>
+          <a:bodyPr wrap="square" lIns="0" tIns="0" rIns="0" bIns="0" rtlCol="0" anchor="t"/>
+          <a:lstStyle/>
+          <a:p>
+            <a:pPr indent="0" marL="0">
+              <a:lnSpc>
+                <a:spcPts val="1500"/>
+              </a:lnSpc>
+              <a:buNone/>
+            </a:pPr>
+            <a:r>
+              <a:rPr lang="en-US" sz="1150" dirty="0">
+                <a:solidFill>
+                  <a:srgbClr val="B4B7BD"/>
+                </a:solidFill>
+                <a:latin typeface="Calibri" pitchFamily="34" charset="0"/>
+                <a:ea typeface="Calibri" pitchFamily="34" charset="-122"/>
+                <a:cs typeface="Calibri" pitchFamily="34" charset="-120"/>
+              </a:rPr>
+              <a:t>Check its type is KOI Supply Chain Alert.</a:t>
+            </a:r>
+            <a:endParaRPr lang="en-US" sz="1150" dirty="0"/>
+          </a:p>
+        </p:txBody>
+      </p:sp>
+      <p:sp>
+        <p:nvSpPr>
+          <p:cNvPr id="23" name="Text 21"/>
+          <p:cNvSpPr/>
+          <p:nvPr/>
+        </p:nvSpPr>
+        <p:spPr>
+          <a:xfrm>
+            <a:off x="859536" y="3634740"/>
+            <a:ext cx="219456" cy="256032"/>
+          </a:xfrm>
+          <a:prstGeom prst="rect">
+            <a:avLst/>
+          </a:prstGeom>
+          <a:noFill/>
+          <a:ln/>
+        </p:spPr>
+        <p:txBody>
+          <a:bodyPr wrap="square" lIns="0" tIns="0" rIns="0" bIns="0" rtlCol="0" anchor="t"/>
+          <a:lstStyle/>
+          <a:p>
+            <a:pPr indent="0" marL="0">
+              <a:buNone/>
+            </a:pPr>
+            <a:r>
+              <a:rPr lang="en-US" sz="1150" b="1" dirty="0">
+                <a:solidFill>
+                  <a:srgbClr val="E8551F"/>
+                </a:solidFill>
+                <a:latin typeface="Calibri" pitchFamily="34" charset="0"/>
+                <a:ea typeface="Calibri" pitchFamily="34" charset="-122"/>
+                <a:cs typeface="Calibri" pitchFamily="34" charset="-120"/>
+              </a:rPr>
+              <a:t>3</a:t>
+            </a:r>
+            <a:endParaRPr lang="en-US" sz="1150" dirty="0"/>
+          </a:p>
+        </p:txBody>
+      </p:sp>
+      <p:sp>
+        <p:nvSpPr>
+          <p:cNvPr id="24" name="Text 22"/>
+          <p:cNvSpPr/>
+          <p:nvPr/>
+        </p:nvSpPr>
+        <p:spPr>
+          <a:xfrm>
+            <a:off x="1152144" y="3634740"/>
+            <a:ext cx="5486400" cy="246888"/>
+          </a:xfrm>
+          <a:prstGeom prst="rect">
+            <a:avLst/>
+          </a:prstGeom>
+          <a:noFill/>
+          <a:ln/>
+        </p:spPr>
+        <p:txBody>
+          <a:bodyPr wrap="square" lIns="0" tIns="0" rIns="0" bIns="0" rtlCol="0" anchor="t"/>
+          <a:lstStyle/>
+          <a:p>
+            <a:pPr indent="0" marL="0">
+              <a:lnSpc>
+                <a:spcPts val="1500"/>
+              </a:lnSpc>
+              <a:buNone/>
+            </a:pPr>
+            <a:r>
+              <a:rPr lang="en-US" sz="1150" dirty="0">
+                <a:solidFill>
+                  <a:srgbClr val="B4B7BD"/>
+                </a:solidFill>
+                <a:latin typeface="Calibri" pitchFamily="34" charset="0"/>
+                <a:ea typeface="Calibri" pitchFamily="34" charset="-122"/>
+                <a:cs typeface="Calibri" pitchFamily="34" charset="-120"/>
+              </a:rPr>
+              <a:t>Read the KOI Alert tab.</a:t>
+            </a:r>
+            <a:endParaRPr lang="en-US" sz="1150" dirty="0"/>
+          </a:p>
+        </p:txBody>
+      </p:sp>
+      <p:sp>
+        <p:nvSpPr>
+          <p:cNvPr id="25" name="Shape 23"/>
+          <p:cNvSpPr/>
+          <p:nvPr/>
+        </p:nvSpPr>
+        <p:spPr>
+          <a:xfrm>
+            <a:off x="7315200" y="2446020"/>
+            <a:ext cx="4297680" cy="2336292"/>
+          </a:xfrm>
+          <a:prstGeom prst="roundRect">
+            <a:avLst>
+              <a:gd name="adj" fmla="val 1957"/>
+            </a:avLst>
+          </a:prstGeom>
+          <a:solidFill>
+            <a:srgbClr val="1C2026"/>
+          </a:solidFill>
+          <a:ln w="12700">
+            <a:solidFill>
+              <a:srgbClr val="1C2026"/>
+            </a:solidFill>
+            <a:prstDash val="solid"/>
+          </a:ln>
+        </p:spPr>
+      </p:sp>
+      <p:sp>
+        <p:nvSpPr>
+          <p:cNvPr id="26" name="Text 24"/>
+          <p:cNvSpPr/>
+          <p:nvPr/>
+        </p:nvSpPr>
+        <p:spPr>
+          <a:xfrm>
+            <a:off x="7626096" y="2628900"/>
+            <a:ext cx="3108960" cy="256032"/>
+          </a:xfrm>
+          <a:prstGeom prst="rect">
+            <a:avLst/>
+          </a:prstGeom>
+          <a:noFill/>
+          <a:ln/>
+        </p:spPr>
+        <p:txBody>
+          <a:bodyPr wrap="square" lIns="0" tIns="0" rIns="0" bIns="0" rtlCol="0" anchor="t"/>
+          <a:lstStyle/>
+          <a:p>
+            <a:pPr indent="0" marL="0">
+              <a:buNone/>
+            </a:pPr>
+            <a:r>
+              <a:rPr lang="en-US" sz="1200" b="1" spc="100" kern="0" dirty="0">
+                <a:solidFill>
+                  <a:srgbClr val="3FB950"/>
+                </a:solidFill>
+                <a:latin typeface="Calibri" pitchFamily="34" charset="0"/>
+                <a:ea typeface="Calibri" pitchFamily="34" charset="-122"/>
+                <a:cs typeface="Calibri" pitchFamily="34" charset="-120"/>
+              </a:rPr>
+              <a:t>What to expect</a:t>
+            </a:r>
+            <a:endParaRPr lang="en-US" sz="1200" dirty="0"/>
+          </a:p>
+        </p:txBody>
+      </p:sp>
+      <p:sp>
+        <p:nvSpPr>
+          <p:cNvPr id="27" name="Text 25"/>
+          <p:cNvSpPr/>
+          <p:nvPr/>
+        </p:nvSpPr>
+        <p:spPr>
+          <a:xfrm>
+            <a:off x="7626096" y="2976372"/>
+            <a:ext cx="219456" cy="256032"/>
+          </a:xfrm>
+          <a:prstGeom prst="rect">
+            <a:avLst/>
+          </a:prstGeom>
+          <a:noFill/>
+          <a:ln/>
+        </p:spPr>
+        <p:txBody>
+          <a:bodyPr wrap="square" lIns="0" tIns="0" rIns="0" bIns="0" rtlCol="0" anchor="t"/>
+          <a:lstStyle/>
+          <a:p>
+            <a:pPr indent="0" marL="0">
+              <a:buNone/>
+            </a:pPr>
+            <a:r>
+              <a:rPr lang="en-US" sz="1150" b="1" dirty="0">
+                <a:solidFill>
+                  <a:srgbClr val="3FB950"/>
+                </a:solidFill>
+                <a:latin typeface="Calibri" pitchFamily="34" charset="0"/>
+                <a:ea typeface="Calibri" pitchFamily="34" charset="-122"/>
+                <a:cs typeface="Calibri" pitchFamily="34" charset="-120"/>
+              </a:rPr>
+              <a:t>✓</a:t>
+            </a:r>
+            <a:endParaRPr lang="en-US" sz="1150" dirty="0"/>
+          </a:p>
+        </p:txBody>
+      </p:sp>
+      <p:sp>
+        <p:nvSpPr>
+          <p:cNvPr id="28" name="Text 26"/>
+          <p:cNvSpPr/>
+          <p:nvPr/>
+        </p:nvSpPr>
+        <p:spPr>
+          <a:xfrm>
+            <a:off x="7918704" y="2976372"/>
+            <a:ext cx="3383280" cy="438912"/>
+          </a:xfrm>
+          <a:prstGeom prst="rect">
+            <a:avLst/>
+          </a:prstGeom>
+          <a:noFill/>
+          <a:ln/>
+        </p:spPr>
+        <p:txBody>
+          <a:bodyPr wrap="square" lIns="0" tIns="0" rIns="0" bIns="0" rtlCol="0" anchor="t"/>
+          <a:lstStyle/>
+          <a:p>
+            <a:pPr indent="0" marL="0">
+              <a:lnSpc>
+                <a:spcPts val="1500"/>
+              </a:lnSpc>
+              <a:buNone/>
+            </a:pPr>
+            <a:r>
+              <a:rPr lang="en-US" sz="1150" dirty="0">
+                <a:solidFill>
+                  <a:srgbClr val="B4B7BD"/>
+                </a:solidFill>
+                <a:latin typeface="Calibri" pitchFamily="34" charset="0"/>
+                <a:ea typeface="Calibri" pitchFamily="34" charset="-122"/>
+                <a:cs typeface="Calibri" pitchFamily="34" charset="-120"/>
+              </a:rPr>
+              <a:t>19 KOI fields are populated on the alert itself.</a:t>
+            </a:r>
+            <a:endParaRPr lang="en-US" sz="1150" dirty="0"/>
+          </a:p>
+        </p:txBody>
+      </p:sp>
+      <p:sp>
+        <p:nvSpPr>
+          <p:cNvPr id="29" name="Text 27"/>
+          <p:cNvSpPr/>
+          <p:nvPr/>
+        </p:nvSpPr>
+        <p:spPr>
+          <a:xfrm>
+            <a:off x="7626096" y="3493008"/>
+            <a:ext cx="219456" cy="256032"/>
+          </a:xfrm>
+          <a:prstGeom prst="rect">
+            <a:avLst/>
+          </a:prstGeom>
+          <a:noFill/>
+          <a:ln/>
+        </p:spPr>
+        <p:txBody>
+          <a:bodyPr wrap="square" lIns="0" tIns="0" rIns="0" bIns="0" rtlCol="0" anchor="t"/>
+          <a:lstStyle/>
+          <a:p>
+            <a:pPr indent="0" marL="0">
+              <a:buNone/>
+            </a:pPr>
+            <a:r>
+              <a:rPr lang="en-US" sz="1150" b="1" dirty="0">
+                <a:solidFill>
+                  <a:srgbClr val="3FB950"/>
+                </a:solidFill>
+                <a:latin typeface="Calibri" pitchFamily="34" charset="0"/>
+                <a:ea typeface="Calibri" pitchFamily="34" charset="-122"/>
+                <a:cs typeface="Calibri" pitchFamily="34" charset="-120"/>
+              </a:rPr>
+              <a:t>✓</a:t>
+            </a:r>
+            <a:endParaRPr lang="en-US" sz="1150" dirty="0"/>
+          </a:p>
+        </p:txBody>
+      </p:sp>
+      <p:sp>
+        <p:nvSpPr>
+          <p:cNvPr id="30" name="Text 28"/>
+          <p:cNvSpPr/>
+          <p:nvPr/>
+        </p:nvSpPr>
+        <p:spPr>
+          <a:xfrm>
+            <a:off x="7918704" y="3493008"/>
+            <a:ext cx="3383280" cy="438912"/>
+          </a:xfrm>
+          <a:prstGeom prst="rect">
+            <a:avLst/>
+          </a:prstGeom>
+          <a:noFill/>
+          <a:ln/>
+        </p:spPr>
+        <p:txBody>
+          <a:bodyPr wrap="square" lIns="0" tIns="0" rIns="0" bIns="0" rtlCol="0" anchor="t"/>
+          <a:lstStyle/>
+          <a:p>
+            <a:pPr indent="0" marL="0">
+              <a:lnSpc>
+                <a:spcPts val="1500"/>
+              </a:lnSpc>
+              <a:buNone/>
+            </a:pPr>
+            <a:r>
+              <a:rPr lang="en-US" sz="1150" dirty="0">
+                <a:solidFill>
+                  <a:srgbClr val="B4B7BD"/>
+                </a:solidFill>
+                <a:latin typeface="Calibri" pitchFamily="34" charset="0"/>
+                <a:ea typeface="Calibri" pitchFamily="34" charset="-122"/>
+                <a:cs typeface="Calibri" pitchFamily="34" charset="-120"/>
+              </a:rPr>
+              <a:t>They are grouped: item, risk and verdict, affected host, governance, summary.</a:t>
+            </a:r>
+            <a:endParaRPr lang="en-US" sz="1150" dirty="0"/>
+          </a:p>
+        </p:txBody>
+      </p:sp>
+      <p:sp>
+        <p:nvSpPr>
+          <p:cNvPr id="31" name="Text 29"/>
+          <p:cNvSpPr/>
+          <p:nvPr/>
+        </p:nvSpPr>
+        <p:spPr>
+          <a:xfrm>
+            <a:off x="7626096" y="4009644"/>
+            <a:ext cx="219456" cy="256032"/>
+          </a:xfrm>
+          <a:prstGeom prst="rect">
+            <a:avLst/>
+          </a:prstGeom>
+          <a:noFill/>
+          <a:ln/>
+        </p:spPr>
+        <p:txBody>
+          <a:bodyPr wrap="square" lIns="0" tIns="0" rIns="0" bIns="0" rtlCol="0" anchor="t"/>
+          <a:lstStyle/>
+          <a:p>
+            <a:pPr indent="0" marL="0">
+              <a:buNone/>
+            </a:pPr>
+            <a:r>
+              <a:rPr lang="en-US" sz="1150" b="1" dirty="0">
+                <a:solidFill>
+                  <a:srgbClr val="3FB950"/>
+                </a:solidFill>
+                <a:latin typeface="Calibri" pitchFamily="34" charset="0"/>
+                <a:ea typeface="Calibri" pitchFamily="34" charset="-122"/>
+                <a:cs typeface="Calibri" pitchFamily="34" charset="-120"/>
+              </a:rPr>
+              <a:t>✓</a:t>
+            </a:r>
+            <a:endParaRPr lang="en-US" sz="1150" dirty="0"/>
+          </a:p>
+        </p:txBody>
+      </p:sp>
+      <p:sp>
+        <p:nvSpPr>
+          <p:cNvPr id="32" name="Text 30"/>
+          <p:cNvSpPr/>
+          <p:nvPr/>
+        </p:nvSpPr>
+        <p:spPr>
+          <a:xfrm>
+            <a:off x="7918704" y="4009644"/>
+            <a:ext cx="3383280" cy="438912"/>
+          </a:xfrm>
+          <a:prstGeom prst="rect">
+            <a:avLst/>
+          </a:prstGeom>
+          <a:noFill/>
+          <a:ln/>
+        </p:spPr>
+        <p:txBody>
+          <a:bodyPr wrap="square" lIns="0" tIns="0" rIns="0" bIns="0" rtlCol="0" anchor="t"/>
+          <a:lstStyle/>
+          <a:p>
+            <a:pPr indent="0" marL="0">
+              <a:lnSpc>
+                <a:spcPts val="1500"/>
+              </a:lnSpc>
+              <a:buNone/>
+            </a:pPr>
+            <a:r>
+              <a:rPr lang="en-US" sz="1150" dirty="0">
+                <a:solidFill>
+                  <a:srgbClr val="B4B7BD"/>
+                </a:solidFill>
+                <a:latin typeface="Calibri" pitchFamily="34" charset="0"/>
+                <a:ea typeface="Calibri" pitchFamily="34" charset="-122"/>
+                <a:cs typeface="Calibri" pitchFamily="34" charset="-120"/>
+              </a:rPr>
+              <a:t>An analyst sees the picture without opening the War Room.</a:t>
+            </a:r>
+            <a:endParaRPr lang="en-US" sz="1150" dirty="0"/>
+          </a:p>
+        </p:txBody>
+      </p:sp>
+    </p:spTree>
+  </p:cSld>
+  <p:clrMapOvr>
+    <a:masterClrMapping/>
+  </p:clrMapOvr>
+</p:sld>
+</file>
+
+<file path=ppt/slides/slide16.xml><?xml version="1.0" encoding="utf-8"?>
+<p:sld xmlns:a="http://schemas.openxmlformats.org/drawingml/2006/main" xmlns:r="http://schemas.openxmlformats.org/officeDocument/2006/relationships" xmlns:p="http://schemas.openxmlformats.org/presentationml/2006/main">
+  <p:cSld name="Slide 16">
     <p:bg>
       <p:bgPr>
         <a:solidFill>

--- a/docs/KOI_Marketplace_Pack_Test_Guide.pptx
+++ b/docs/KOI_Marketplace_Pack_Test_Guide.pptx
@@ -5636,7 +5636,7 @@
                 <a:ea typeface="Calibri" pitchFamily="34" charset="-122"/>
                 <a:cs typeface="Calibri" pitchFamily="34" charset="-120"/>
               </a:rPr>
-              <a:t>KoiScanTracker — an automation, not a playbook. Ours, and different from the KOI deployment script opposite. For manual upload use dist/automation-KoiScanTracker.yml (one file).</a:t>
+              <a:t>KoiScanTracker — an automation, not a playbook. Ours, and different from the KOI deployment script opposite. Manual upload takes exactly one file: dist/automation-KoiScanTracker.yml</a:t>
             </a:r>
             <a:endParaRPr lang="en-US" sz="1050" dirty="0"/>
           </a:p>
@@ -6227,7 +6227,7 @@
         <p:spPr>
           <a:xfrm>
             <a:off x="1152144" y="5394960"/>
-            <a:ext cx="10149840" cy="438912"/>
+            <a:ext cx="10149840" cy="246888"/>
           </a:xfrm>
           <a:prstGeom prst="rect">
             <a:avLst/>
@@ -6254,7 +6254,7 @@
                 <a:ea typeface="Calibri" pitchFamily="34" charset="-122"/>
                 <a:cs typeface="Calibri" pitchFamily="34" charset="-120"/>
               </a:rPr>
-              <a:t>Automation → Scripts → Import for KoiScanTracker — upload dist/automation-KoiScanTracker.yml. One file, code already inside; do not upload the two files under Scripts/.</a:t>
+              <a:t>Automation → Scripts → Import → dist/automation-KoiScanTracker.yml. Open it first and you will see the Python inside it.</a:t>
             </a:r>
             <a:endParaRPr lang="en-US" sz="1150" dirty="0"/>
           </a:p>
@@ -6268,7 +6268,7 @@
         </p:nvSpPr>
         <p:spPr>
           <a:xfrm>
-            <a:off x="859536" y="5911596"/>
+            <a:off x="859536" y="5724144"/>
             <a:ext cx="219456" cy="256032"/>
           </a:xfrm>
           <a:prstGeom prst="rect">
@@ -6307,7 +6307,7 @@
         </p:nvSpPr>
         <p:spPr>
           <a:xfrm>
-            <a:off x="1152144" y="5911596"/>
+            <a:off x="1152144" y="5724144"/>
             <a:ext cx="10149840" cy="246888"/>
           </a:xfrm>
           <a:prstGeom prst="rect">
@@ -6335,6 +6335,87 @@
                 <a:ea typeface="Calibri" pitchFamily="34" charset="-122"/>
                 <a:cs typeface="Calibri" pitchFamily="34" charset="-120"/>
               </a:rPr>
+              <a:t>Not Scripts/KoiScanTracker/KoiScanTracker.yml — that file reads script: '-' on purpose and would import an empty automation.</a:t>
+            </a:r>
+            <a:endParaRPr lang="en-US" sz="1150" dirty="0"/>
+          </a:p>
+        </p:txBody>
+      </p:sp>
+      <p:sp>
+        <p:nvSpPr>
+          <p:cNvPr id="32" name="Text 30"/>
+          <p:cNvSpPr/>
+          <p:nvPr/>
+        </p:nvSpPr>
+        <p:spPr>
+          <a:xfrm>
+            <a:off x="859536" y="6053328"/>
+            <a:ext cx="219456" cy="256032"/>
+          </a:xfrm>
+          <a:prstGeom prst="rect">
+            <a:avLst/>
+          </a:prstGeom>
+          <a:noFill/>
+          <a:ln/>
+        </p:spPr>
+        <p:txBody>
+          <a:bodyPr wrap="square" lIns="0" tIns="0" rIns="0" bIns="0" rtlCol="0" anchor="t"/>
+          <a:lstStyle/>
+          <a:p>
+            <a:pPr indent="0" marL="0">
+              <a:buNone/>
+            </a:pPr>
+            <a:r>
+              <a:rPr lang="en-US" sz="1150" b="1" dirty="0">
+                <a:solidFill>
+                  <a:srgbClr val="E8551F"/>
+                </a:solidFill>
+                <a:latin typeface="Calibri" pitchFamily="34" charset="0"/>
+                <a:ea typeface="Calibri" pitchFamily="34" charset="-122"/>
+                <a:cs typeface="Calibri" pitchFamily="34" charset="-120"/>
+              </a:rPr>
+              <a:t>5</a:t>
+            </a:r>
+            <a:endParaRPr lang="en-US" sz="1150" dirty="0"/>
+          </a:p>
+        </p:txBody>
+      </p:sp>
+      <p:sp>
+        <p:nvSpPr>
+          <p:cNvPr id="33" name="Text 31"/>
+          <p:cNvSpPr/>
+          <p:nvPr/>
+        </p:nvSpPr>
+        <p:spPr>
+          <a:xfrm>
+            <a:off x="1152144" y="6053328"/>
+            <a:ext cx="10149840" cy="246888"/>
+          </a:xfrm>
+          <a:prstGeom prst="rect">
+            <a:avLst/>
+          </a:prstGeom>
+          <a:noFill/>
+          <a:ln/>
+        </p:spPr>
+        <p:txBody>
+          <a:bodyPr wrap="square" lIns="0" tIns="0" rIns="0" bIns="0" rtlCol="0" anchor="t"/>
+          <a:lstStyle/>
+          <a:p>
+            <a:pPr indent="0" marL="0">
+              <a:lnSpc>
+                <a:spcPts val="1500"/>
+              </a:lnSpc>
+              <a:buNone/>
+            </a:pPr>
+            <a:r>
+              <a:rPr lang="en-US" sz="1150" dirty="0">
+                <a:solidFill>
+                  <a:srgbClr val="B4B7BD"/>
+                </a:solidFill>
+                <a:latin typeface="Calibri" pitchFamily="34" charset="0"/>
+                <a:ea typeface="Calibri" pitchFamily="34" charset="-122"/>
+                <a:cs typeface="Calibri" pitchFamily="34" charset="-120"/>
+              </a:rPr>
               <a:t>Settings → Object Setup → Lists → New List, type JSON, named exactly Koi Script Runner. Paste the block from Lists/README.md.</a:t>
             </a:r>
             <a:endParaRPr lang="en-US" sz="1150" dirty="0"/>
@@ -6343,13 +6424,13 @@
       </p:sp>
       <p:sp>
         <p:nvSpPr>
-          <p:cNvPr id="32" name="Text 30"/>
-          <p:cNvSpPr/>
-          <p:nvPr/>
-        </p:nvSpPr>
-        <p:spPr>
-          <a:xfrm>
-            <a:off x="859536" y="6240780"/>
+          <p:cNvPr id="34" name="Text 32"/>
+          <p:cNvSpPr/>
+          <p:nvPr/>
+        </p:nvSpPr>
+        <p:spPr>
+          <a:xfrm>
+            <a:off x="859536" y="6382512"/>
             <a:ext cx="219456" cy="256032"/>
           </a:xfrm>
           <a:prstGeom prst="rect">
@@ -6374,7 +6455,7 @@
                 <a:ea typeface="Calibri" pitchFamily="34" charset="-122"/>
                 <a:cs typeface="Calibri" pitchFamily="34" charset="-120"/>
               </a:rPr>
-              <a:t>5</a:t>
+              <a:t>6</a:t>
             </a:r>
             <a:endParaRPr lang="en-US" sz="1150" dirty="0"/>
           </a:p>
@@ -6382,13 +6463,13 @@
       </p:sp>
       <p:sp>
         <p:nvSpPr>
-          <p:cNvPr id="33" name="Text 31"/>
-          <p:cNvSpPr/>
-          <p:nvPr/>
-        </p:nvSpPr>
-        <p:spPr>
-          <a:xfrm>
-            <a:off x="1152144" y="6240780"/>
+          <p:cNvPr id="35" name="Text 33"/>
+          <p:cNvSpPr/>
+          <p:nvPr/>
+        </p:nvSpPr>
+        <p:spPr>
+          <a:xfrm>
+            <a:off x="1152144" y="6382512"/>
             <a:ext cx="10149840" cy="246888"/>
           </a:xfrm>
           <a:prstGeom prst="rect">

--- a/docs/KOI_Marketplace_Pack_Test_Guide.pptx
+++ b/docs/KOI_Marketplace_Pack_Test_Guide.pptx
@@ -5636,7 +5636,7 @@
                 <a:ea typeface="Calibri" pitchFamily="34" charset="-122"/>
                 <a:cs typeface="Calibri" pitchFamily="34" charset="-120"/>
               </a:rPr>
-              <a:t>KoiScanTracker — an automation, not a playbook. Ours, and different from the KOI deployment script opposite. Manual upload takes exactly one file: dist/automation-KoiScanTracker.yml</a:t>
+              <a:t>KoiScanTracker — an automation, not a playbook, and separate from the KOI deployment script opposite. Manual import takes one file: Packs/KoiContentExtension/dist/automation-KoiScanTracker.yml</a:t>
             </a:r>
             <a:endParaRPr lang="en-US" sz="1050" dirty="0"/>
           </a:p>
@@ -6254,7 +6254,7 @@
                 <a:ea typeface="Calibri" pitchFamily="34" charset="-122"/>
                 <a:cs typeface="Calibri" pitchFamily="34" charset="-120"/>
               </a:rPr>
-              <a:t>Automation → Scripts → Import → dist/automation-KoiScanTracker.yml. Open it first and you will see the Python inside it.</a:t>
+              <a:t>Automation → Scripts → Import → Packs/KoiContentExtension/dist/automation-KoiScanTracker.yml</a:t>
             </a:r>
             <a:endParaRPr lang="en-US" sz="1150" dirty="0"/>
           </a:p>
@@ -6308,7 +6308,7 @@
         <p:spPr>
           <a:xfrm>
             <a:off x="1152144" y="5724144"/>
-            <a:ext cx="10149840" cy="246888"/>
+            <a:ext cx="10149840" cy="438912"/>
           </a:xfrm>
           <a:prstGeom prst="rect">
             <a:avLst/>
@@ -6335,7 +6335,7 @@
                 <a:ea typeface="Calibri" pitchFamily="34" charset="-122"/>
                 <a:cs typeface="Calibri" pitchFamily="34" charset="-120"/>
               </a:rPr>
-              <a:t>Not Scripts/KoiScanTracker/KoiScanTracker.yml — that file reads script: '-' on purpose and would import an empty automation.</a:t>
+              <a:t>Settings → Object Setup → Lists → New List, type JSON, named exactly Koi Script Runner. Paste the block from Packs/KoiContentExtension/Lists/README.md.</a:t>
             </a:r>
             <a:endParaRPr lang="en-US" sz="1150" dirty="0"/>
           </a:p>
@@ -6349,7 +6349,7 @@
         </p:nvSpPr>
         <p:spPr>
           <a:xfrm>
-            <a:off x="859536" y="6053328"/>
+            <a:off x="859536" y="6240780"/>
             <a:ext cx="219456" cy="256032"/>
           </a:xfrm>
           <a:prstGeom prst="rect">
@@ -6388,88 +6388,7 @@
         </p:nvSpPr>
         <p:spPr>
           <a:xfrm>
-            <a:off x="1152144" y="6053328"/>
-            <a:ext cx="10149840" cy="246888"/>
-          </a:xfrm>
-          <a:prstGeom prst="rect">
-            <a:avLst/>
-          </a:prstGeom>
-          <a:noFill/>
-          <a:ln/>
-        </p:spPr>
-        <p:txBody>
-          <a:bodyPr wrap="square" lIns="0" tIns="0" rIns="0" bIns="0" rtlCol="0" anchor="t"/>
-          <a:lstStyle/>
-          <a:p>
-            <a:pPr indent="0" marL="0">
-              <a:lnSpc>
-                <a:spcPts val="1500"/>
-              </a:lnSpc>
-              <a:buNone/>
-            </a:pPr>
-            <a:r>
-              <a:rPr lang="en-US" sz="1150" dirty="0">
-                <a:solidFill>
-                  <a:srgbClr val="B4B7BD"/>
-                </a:solidFill>
-                <a:latin typeface="Calibri" pitchFamily="34" charset="0"/>
-                <a:ea typeface="Calibri" pitchFamily="34" charset="-122"/>
-                <a:cs typeface="Calibri" pitchFamily="34" charset="-120"/>
-              </a:rPr>
-              <a:t>Settings → Object Setup → Lists → New List, type JSON, named exactly Koi Script Runner. Paste the block from Lists/README.md.</a:t>
-            </a:r>
-            <a:endParaRPr lang="en-US" sz="1150" dirty="0"/>
-          </a:p>
-        </p:txBody>
-      </p:sp>
-      <p:sp>
-        <p:nvSpPr>
-          <p:cNvPr id="34" name="Text 32"/>
-          <p:cNvSpPr/>
-          <p:nvPr/>
-        </p:nvSpPr>
-        <p:spPr>
-          <a:xfrm>
-            <a:off x="859536" y="6382512"/>
-            <a:ext cx="219456" cy="256032"/>
-          </a:xfrm>
-          <a:prstGeom prst="rect">
-            <a:avLst/>
-          </a:prstGeom>
-          <a:noFill/>
-          <a:ln/>
-        </p:spPr>
-        <p:txBody>
-          <a:bodyPr wrap="square" lIns="0" tIns="0" rIns="0" bIns="0" rtlCol="0" anchor="t"/>
-          <a:lstStyle/>
-          <a:p>
-            <a:pPr indent="0" marL="0">
-              <a:buNone/>
-            </a:pPr>
-            <a:r>
-              <a:rPr lang="en-US" sz="1150" b="1" dirty="0">
-                <a:solidFill>
-                  <a:srgbClr val="E8551F"/>
-                </a:solidFill>
-                <a:latin typeface="Calibri" pitchFamily="34" charset="0"/>
-                <a:ea typeface="Calibri" pitchFamily="34" charset="-122"/>
-                <a:cs typeface="Calibri" pitchFamily="34" charset="-120"/>
-              </a:rPr>
-              <a:t>6</a:t>
-            </a:r>
-            <a:endParaRPr lang="en-US" sz="1150" dirty="0"/>
-          </a:p>
-        </p:txBody>
-      </p:sp>
-      <p:sp>
-        <p:nvSpPr>
-          <p:cNvPr id="35" name="Text 33"/>
-          <p:cNvSpPr/>
-          <p:nvPr/>
-        </p:nvSpPr>
-        <p:spPr>
-          <a:xfrm>
-            <a:off x="1152144" y="6382512"/>
+            <a:off x="1152144" y="6240780"/>
             <a:ext cx="10149840" cy="246888"/>
           </a:xfrm>
           <a:prstGeom prst="rect">
